--- a/presentation/Solace-Demo-Meridian-2026-09-04.pptx
+++ b/presentation/Solace-Demo-Meridian-2026-09-04.pptx
@@ -3,27 +3,28 @@
 <p:presentation xmlns:a="http://schemas.openxmlformats.org/drawingml/2006/main" xmlns:r="http://schemas.openxmlformats.org/officeDocument/2006/relationships" xmlns:p="http://schemas.openxmlformats.org/presentationml/2006/main" saveSubsetFonts="1" autoCompressPictures="0">
   <p:sldMasterIdLst>
     <p:sldMasterId id="2147483672" r:id="rId1"/>
+    <p:sldMasterId id="2147483684" r:id="rId2"/>
   </p:sldMasterIdLst>
   <p:notesMasterIdLst>
-    <p:notesMasterId r:id="rId18"/>
+    <p:notesMasterId r:id="rId19"/>
   </p:notesMasterIdLst>
   <p:sldIdLst>
-    <p:sldId id="306" r:id="rId2"/>
-    <p:sldId id="305" r:id="rId3"/>
-    <p:sldId id="325" r:id="rId4"/>
-    <p:sldId id="327" r:id="rId5"/>
-    <p:sldId id="328" r:id="rId6"/>
-    <p:sldId id="312" r:id="rId7"/>
-    <p:sldId id="323" r:id="rId8"/>
-    <p:sldId id="334" r:id="rId9"/>
-    <p:sldId id="330" r:id="rId10"/>
-    <p:sldId id="331" r:id="rId11"/>
-    <p:sldId id="316" r:id="rId12"/>
-    <p:sldId id="332" r:id="rId13"/>
-    <p:sldId id="333" r:id="rId14"/>
-    <p:sldId id="318" r:id="rId15"/>
-    <p:sldId id="319" r:id="rId16"/>
-    <p:sldId id="320" r:id="rId17"/>
+    <p:sldId id="306" r:id="rId3"/>
+    <p:sldId id="305" r:id="rId4"/>
+    <p:sldId id="325" r:id="rId5"/>
+    <p:sldId id="327" r:id="rId6"/>
+    <p:sldId id="328" r:id="rId7"/>
+    <p:sldId id="312" r:id="rId8"/>
+    <p:sldId id="323" r:id="rId9"/>
+    <p:sldId id="334" r:id="rId10"/>
+    <p:sldId id="330" r:id="rId11"/>
+    <p:sldId id="331" r:id="rId12"/>
+    <p:sldId id="316" r:id="rId13"/>
+    <p:sldId id="276" r:id="rId14"/>
+    <p:sldId id="336" r:id="rId15"/>
+    <p:sldId id="318" r:id="rId16"/>
+    <p:sldId id="319" r:id="rId17"/>
+    <p:sldId id="320" r:id="rId18"/>
   </p:sldIdLst>
   <p:sldSz cx="12192000" cy="6858000"/>
   <p:notesSz cx="7102475" cy="9388475"/>
@@ -147,7 +148,7 @@
 <file path=ppt/revisionInfo.xml><?xml version="1.0" encoding="utf-8"?>
 <p1510:revInfo xmlns:a="http://schemas.openxmlformats.org/drawingml/2006/main" xmlns:r="http://schemas.openxmlformats.org/officeDocument/2006/relationships" xmlns:p1510="http://schemas.microsoft.com/office/powerpoint/2015/10/main">
   <p1510:revLst>
-    <p1510:client id="{A47D988F-889B-483D-889E-02BC87B607D3}" v="4" dt="2026-09-04T02:53:19.120"/>
+    <p1510:client id="{A47D988F-889B-483D-889E-02BC87B607D3}" v="10" dt="2026-09-04T06:30:56.155"/>
   </p1510:revLst>
 </p1510:revInfo>
 </file>
@@ -156,11 +157,162 @@
 <pc:chgInfo xmlns:a="http://schemas.openxmlformats.org/drawingml/2006/main" xmlns:r="http://schemas.openxmlformats.org/officeDocument/2006/relationships" xmlns:ac="http://schemas.microsoft.com/office/drawing/2013/main/command" xmlns:pc="http://schemas.microsoft.com/office/powerpoint/2013/main/command">
   <pc:docChgLst>
     <pc:chgData name="tony august" userId="0e1c2837a28b706a" providerId="LiveId" clId="{AD05CBBD-285A-40D0-ABA1-E4D8FAD69F9B}"/>
-    <pc:docChg chg="undo custSel addSld delSld modSld modNotesMaster">
-      <pc:chgData name="tony august" userId="0e1c2837a28b706a" providerId="LiveId" clId="{AD05CBBD-285A-40D0-ABA1-E4D8FAD69F9B}" dt="2026-09-04T02:54:44.347" v="1758"/>
+    <pc:docChg chg="undo custSel addSld delSld modSld sldOrd modNotesMaster">
+      <pc:chgData name="tony august" userId="0e1c2837a28b706a" providerId="LiveId" clId="{AD05CBBD-285A-40D0-ABA1-E4D8FAD69F9B}" dt="2026-09-04T06:42:28.146" v="3027" actId="20577"/>
       <pc:docMkLst>
         <pc:docMk/>
       </pc:docMkLst>
+      <pc:sldChg chg="addSp delSp modSp add mod">
+        <pc:chgData name="tony august" userId="0e1c2837a28b706a" providerId="LiveId" clId="{AD05CBBD-285A-40D0-ABA1-E4D8FAD69F9B}" dt="2026-09-04T06:02:04.717" v="2115" actId="1076"/>
+        <pc:sldMkLst>
+          <pc:docMk/>
+          <pc:sldMk cId="3530555159" sldId="276"/>
+        </pc:sldMkLst>
+        <pc:spChg chg="mod">
+          <ac:chgData name="tony august" userId="0e1c2837a28b706a" providerId="LiveId" clId="{AD05CBBD-285A-40D0-ABA1-E4D8FAD69F9B}" dt="2026-09-04T05:45:48.720" v="2051" actId="6549"/>
+          <ac:spMkLst>
+            <pc:docMk/>
+            <pc:sldMk cId="3530555159" sldId="276"/>
+            <ac:spMk id="2" creationId="{00000000-0000-0000-0000-000000000000}"/>
+          </ac:spMkLst>
+        </pc:spChg>
+        <pc:spChg chg="mod">
+          <ac:chgData name="tony august" userId="0e1c2837a28b706a" providerId="LiveId" clId="{AD05CBBD-285A-40D0-ABA1-E4D8FAD69F9B}" dt="2026-09-04T05:48:43.113" v="2073" actId="1076"/>
+          <ac:spMkLst>
+            <pc:docMk/>
+            <pc:sldMk cId="3530555159" sldId="276"/>
+            <ac:spMk id="4" creationId="{00000000-0000-0000-0000-000000000000}"/>
+          </ac:spMkLst>
+        </pc:spChg>
+        <pc:spChg chg="mod">
+          <ac:chgData name="tony august" userId="0e1c2837a28b706a" providerId="LiveId" clId="{AD05CBBD-285A-40D0-ABA1-E4D8FAD69F9B}" dt="2026-09-04T05:53:43.141" v="2089" actId="208"/>
+          <ac:spMkLst>
+            <pc:docMk/>
+            <pc:sldMk cId="3530555159" sldId="276"/>
+            <ac:spMk id="10" creationId="{00000000-0000-0000-0000-000000000000}"/>
+          </ac:spMkLst>
+        </pc:spChg>
+        <pc:spChg chg="add del mod">
+          <ac:chgData name="tony august" userId="0e1c2837a28b706a" providerId="LiveId" clId="{AD05CBBD-285A-40D0-ABA1-E4D8FAD69F9B}" dt="2026-09-04T05:47:39.787" v="2064" actId="478"/>
+          <ac:spMkLst>
+            <pc:docMk/>
+            <pc:sldMk cId="3530555159" sldId="276"/>
+            <ac:spMk id="16" creationId="{5D855CD7-9A12-29AC-37BC-FD426879CB51}"/>
+          </ac:spMkLst>
+        </pc:spChg>
+        <pc:spChg chg="mod">
+          <ac:chgData name="tony august" userId="0e1c2837a28b706a" providerId="LiveId" clId="{AD05CBBD-285A-40D0-ABA1-E4D8FAD69F9B}" dt="2026-09-04T05:48:46.983" v="2074" actId="1037"/>
+          <ac:spMkLst>
+            <pc:docMk/>
+            <pc:sldMk cId="3530555159" sldId="276"/>
+            <ac:spMk id="25" creationId="{00000000-0000-0000-0000-000000000000}"/>
+          </ac:spMkLst>
+        </pc:spChg>
+        <pc:spChg chg="add mod">
+          <ac:chgData name="tony august" userId="0e1c2837a28b706a" providerId="LiveId" clId="{AD05CBBD-285A-40D0-ABA1-E4D8FAD69F9B}" dt="2026-09-04T05:48:32.984" v="2071" actId="1582"/>
+          <ac:spMkLst>
+            <pc:docMk/>
+            <pc:sldMk cId="3530555159" sldId="276"/>
+            <ac:spMk id="27" creationId="{B070FF0D-59FB-DB52-A761-C7CC12BB6096}"/>
+          </ac:spMkLst>
+        </pc:spChg>
+        <pc:spChg chg="mod">
+          <ac:chgData name="tony august" userId="0e1c2837a28b706a" providerId="LiveId" clId="{AD05CBBD-285A-40D0-ABA1-E4D8FAD69F9B}" dt="2026-09-04T05:55:13.155" v="2099" actId="1076"/>
+          <ac:spMkLst>
+            <pc:docMk/>
+            <pc:sldMk cId="3530555159" sldId="276"/>
+            <ac:spMk id="30" creationId="{00000000-0000-0000-0000-000000000000}"/>
+          </ac:spMkLst>
+        </pc:spChg>
+        <pc:spChg chg="mod">
+          <ac:chgData name="tony august" userId="0e1c2837a28b706a" providerId="LiveId" clId="{AD05CBBD-285A-40D0-ABA1-E4D8FAD69F9B}" dt="2026-09-04T05:46:27.961" v="2057" actId="20577"/>
+          <ac:spMkLst>
+            <pc:docMk/>
+            <pc:sldMk cId="3530555159" sldId="276"/>
+            <ac:spMk id="31" creationId="{00000000-0000-0000-0000-000000000000}"/>
+          </ac:spMkLst>
+        </pc:spChg>
+        <pc:spChg chg="mod">
+          <ac:chgData name="tony august" userId="0e1c2837a28b706a" providerId="LiveId" clId="{AD05CBBD-285A-40D0-ABA1-E4D8FAD69F9B}" dt="2026-09-04T05:48:04.342" v="2069" actId="14100"/>
+          <ac:spMkLst>
+            <pc:docMk/>
+            <pc:sldMk cId="3530555159" sldId="276"/>
+            <ac:spMk id="43" creationId="{00000000-0000-0000-0000-000000000000}"/>
+          </ac:spMkLst>
+        </pc:spChg>
+        <pc:spChg chg="mod">
+          <ac:chgData name="tony august" userId="0e1c2837a28b706a" providerId="LiveId" clId="{AD05CBBD-285A-40D0-ABA1-E4D8FAD69F9B}" dt="2026-09-04T05:50:13.900" v="2077" actId="14100"/>
+          <ac:spMkLst>
+            <pc:docMk/>
+            <pc:sldMk cId="3530555159" sldId="276"/>
+            <ac:spMk id="45" creationId="{00000000-0000-0000-0000-000000000000}"/>
+          </ac:spMkLst>
+        </pc:spChg>
+        <pc:spChg chg="mod">
+          <ac:chgData name="tony august" userId="0e1c2837a28b706a" providerId="LiveId" clId="{AD05CBBD-285A-40D0-ABA1-E4D8FAD69F9B}" dt="2026-09-04T05:50:42.755" v="2084" actId="1076"/>
+          <ac:spMkLst>
+            <pc:docMk/>
+            <pc:sldMk cId="3530555159" sldId="276"/>
+            <ac:spMk id="47" creationId="{00000000-0000-0000-0000-000000000000}"/>
+          </ac:spMkLst>
+        </pc:spChg>
+        <pc:spChg chg="mod">
+          <ac:chgData name="tony august" userId="0e1c2837a28b706a" providerId="LiveId" clId="{AD05CBBD-285A-40D0-ABA1-E4D8FAD69F9B}" dt="2026-09-04T05:57:54.698" v="2111" actId="1076"/>
+          <ac:spMkLst>
+            <pc:docMk/>
+            <pc:sldMk cId="3530555159" sldId="276"/>
+            <ac:spMk id="48" creationId="{00000000-0000-0000-0000-000000000000}"/>
+          </ac:spMkLst>
+        </pc:spChg>
+        <pc:spChg chg="add mod">
+          <ac:chgData name="tony august" userId="0e1c2837a28b706a" providerId="LiveId" clId="{AD05CBBD-285A-40D0-ABA1-E4D8FAD69F9B}" dt="2026-09-04T06:02:04.717" v="2115" actId="1076"/>
+          <ac:spMkLst>
+            <pc:docMk/>
+            <pc:sldMk cId="3530555159" sldId="276"/>
+            <ac:spMk id="50" creationId="{0DCA7C0D-D61A-63A1-A946-F26AFCDDCCFA}"/>
+          </ac:spMkLst>
+        </pc:spChg>
+        <pc:spChg chg="mod">
+          <ac:chgData name="tony august" userId="0e1c2837a28b706a" providerId="LiveId" clId="{AD05CBBD-285A-40D0-ABA1-E4D8FAD69F9B}" dt="2026-09-04T05:50:09.551" v="2076" actId="14100"/>
+          <ac:spMkLst>
+            <pc:docMk/>
+            <pc:sldMk cId="3530555159" sldId="276"/>
+            <ac:spMk id="69" creationId="{941D0095-2D6A-C8F5-6DFB-F38AE841A191}"/>
+          </ac:spMkLst>
+        </pc:spChg>
+        <pc:picChg chg="del mod">
+          <ac:chgData name="tony august" userId="0e1c2837a28b706a" providerId="LiveId" clId="{AD05CBBD-285A-40D0-ABA1-E4D8FAD69F9B}" dt="2026-09-04T05:57:01.618" v="2105" actId="478"/>
+          <ac:picMkLst>
+            <pc:docMk/>
+            <pc:sldMk cId="3530555159" sldId="276"/>
+            <ac:picMk id="46" creationId="{00000000-0000-0000-0000-000000000000}"/>
+          </ac:picMkLst>
+        </pc:picChg>
+        <pc:picChg chg="add mod">
+          <ac:chgData name="tony august" userId="0e1c2837a28b706a" providerId="LiveId" clId="{AD05CBBD-285A-40D0-ABA1-E4D8FAD69F9B}" dt="2026-09-04T05:57:08.230" v="2106" actId="1076"/>
+          <ac:picMkLst>
+            <pc:docMk/>
+            <pc:sldMk cId="3530555159" sldId="276"/>
+            <ac:picMk id="49" creationId="{38CD5D56-51CC-3D54-0B7A-E56DA29C0293}"/>
+          </ac:picMkLst>
+        </pc:picChg>
+        <pc:picChg chg="add mod">
+          <ac:chgData name="tony august" userId="0e1c2837a28b706a" providerId="LiveId" clId="{AD05CBBD-285A-40D0-ABA1-E4D8FAD69F9B}" dt="2026-09-04T05:57:42.911" v="2110" actId="465"/>
+          <ac:picMkLst>
+            <pc:docMk/>
+            <pc:sldMk cId="3530555159" sldId="276"/>
+            <ac:picMk id="64" creationId="{A4D94555-7BB3-7A47-9A28-0E1D748AB778}"/>
+          </ac:picMkLst>
+        </pc:picChg>
+        <pc:picChg chg="add mod">
+          <ac:chgData name="tony august" userId="0e1c2837a28b706a" providerId="LiveId" clId="{AD05CBBD-285A-40D0-ABA1-E4D8FAD69F9B}" dt="2026-09-04T05:57:20.661" v="2108" actId="1076"/>
+          <ac:picMkLst>
+            <pc:docMk/>
+            <pc:sldMk cId="3530555159" sldId="276"/>
+            <ac:picMk id="68" creationId="{AD56B588-4E4E-64C1-4A6D-ADCB3B4E74FF}"/>
+          </ac:picMkLst>
+        </pc:picChg>
+      </pc:sldChg>
       <pc:sldChg chg="addSp delSp modSp add mod modNotes">
         <pc:chgData name="tony august" userId="0e1c2837a28b706a" providerId="LiveId" clId="{AD05CBBD-285A-40D0-ABA1-E4D8FAD69F9B}" dt="2026-09-03T02:02:18.310" v="1243" actId="20577"/>
         <pc:sldMkLst>
@@ -363,7 +515,7 @@
         </pc:spChg>
       </pc:sldChg>
       <pc:sldChg chg="modSp add mod">
-        <pc:chgData name="tony august" userId="0e1c2837a28b706a" providerId="LiveId" clId="{AD05CBBD-285A-40D0-ABA1-E4D8FAD69F9B}" dt="2026-09-04T01:18:51.686" v="1348"/>
+        <pc:chgData name="tony august" userId="0e1c2837a28b706a" providerId="LiveId" clId="{AD05CBBD-285A-40D0-ABA1-E4D8FAD69F9B}" dt="2026-09-04T06:42:28.146" v="3027" actId="20577"/>
         <pc:sldMkLst>
           <pc:docMk/>
           <pc:sldMk cId="698426052" sldId="327"/>
@@ -433,7 +585,7 @@
           </ac:spMkLst>
         </pc:spChg>
         <pc:spChg chg="mod">
-          <ac:chgData name="tony august" userId="0e1c2837a28b706a" providerId="LiveId" clId="{AD05CBBD-285A-40D0-ABA1-E4D8FAD69F9B}" dt="2026-09-04T01:18:51.685" v="1347"/>
+          <ac:chgData name="tony august" userId="0e1c2837a28b706a" providerId="LiveId" clId="{AD05CBBD-285A-40D0-ABA1-E4D8FAD69F9B}" dt="2026-09-04T06:42:28.146" v="3027" actId="20577"/>
           <ac:spMkLst>
             <pc:docMk/>
             <pc:sldMk cId="698426052" sldId="327"/>
@@ -509,19 +661,27 @@
           </ac:spMkLst>
         </pc:spChg>
       </pc:sldChg>
-      <pc:sldChg chg="add">
-        <pc:chgData name="tony august" userId="0e1c2837a28b706a" providerId="LiveId" clId="{AD05CBBD-285A-40D0-ABA1-E4D8FAD69F9B}" dt="2026-09-04T01:27:53.663" v="1355"/>
+      <pc:sldChg chg="add del mod ord modShow">
+        <pc:chgData name="tony august" userId="0e1c2837a28b706a" providerId="LiveId" clId="{AD05CBBD-285A-40D0-ABA1-E4D8FAD69F9B}" dt="2026-09-04T05:59:49.720" v="2114" actId="47"/>
         <pc:sldMkLst>
           <pc:docMk/>
           <pc:sldMk cId="1453052294" sldId="332"/>
         </pc:sldMkLst>
       </pc:sldChg>
-      <pc:sldChg chg="add">
-        <pc:chgData name="tony august" userId="0e1c2837a28b706a" providerId="LiveId" clId="{AD05CBBD-285A-40D0-ABA1-E4D8FAD69F9B}" dt="2026-09-04T01:28:11.755" v="1357"/>
+      <pc:sldChg chg="modSp add del mod">
+        <pc:chgData name="tony august" userId="0e1c2837a28b706a" providerId="LiveId" clId="{AD05CBBD-285A-40D0-ABA1-E4D8FAD69F9B}" dt="2026-09-04T06:22:49.929" v="2118"/>
         <pc:sldMkLst>
           <pc:docMk/>
           <pc:sldMk cId="2392921007" sldId="333"/>
         </pc:sldMkLst>
+        <pc:spChg chg="mod">
+          <ac:chgData name="tony august" userId="0e1c2837a28b706a" providerId="LiveId" clId="{AD05CBBD-285A-40D0-ABA1-E4D8FAD69F9B}" dt="2026-09-04T06:12:06.955" v="2116" actId="1076"/>
+          <ac:spMkLst>
+            <pc:docMk/>
+            <pc:sldMk cId="2392921007" sldId="333"/>
+            <ac:spMk id="6" creationId="{00000000-0000-0000-0000-000000000000}"/>
+          </ac:spMkLst>
+        </pc:spChg>
       </pc:sldChg>
       <pc:sldChg chg="modSp add mod">
         <pc:chgData name="tony august" userId="0e1c2837a28b706a" providerId="LiveId" clId="{AD05CBBD-285A-40D0-ABA1-E4D8FAD69F9B}" dt="2026-09-04T02:54:44.347" v="1758"/>
@@ -591,6 +751,140 @@
             <pc:docMk/>
             <pc:sldMk cId="3136990422" sldId="334"/>
             <ac:spMk id="206" creationId="{00000000-0000-0000-0000-000000000000}"/>
+          </ac:spMkLst>
+        </pc:spChg>
+      </pc:sldChg>
+      <pc:sldChg chg="modSp add del mod">
+        <pc:chgData name="tony august" userId="0e1c2837a28b706a" providerId="LiveId" clId="{AD05CBBD-285A-40D0-ABA1-E4D8FAD69F9B}" dt="2026-09-04T06:23:23.149" v="2128"/>
+        <pc:sldMkLst>
+          <pc:docMk/>
+          <pc:sldMk cId="1796555840" sldId="335"/>
+        </pc:sldMkLst>
+        <pc:spChg chg="mod">
+          <ac:chgData name="tony august" userId="0e1c2837a28b706a" providerId="LiveId" clId="{AD05CBBD-285A-40D0-ABA1-E4D8FAD69F9B}" dt="2026-09-04T06:22:50.487" v="2120"/>
+          <ac:spMkLst>
+            <pc:docMk/>
+            <pc:sldMk cId="1796555840" sldId="335"/>
+            <ac:spMk id="6" creationId="{00000000-0000-0000-0000-000000000000}"/>
+          </ac:spMkLst>
+        </pc:spChg>
+        <pc:spChg chg="mod">
+          <ac:chgData name="tony august" userId="0e1c2837a28b706a" providerId="LiveId" clId="{AD05CBBD-285A-40D0-ABA1-E4D8FAD69F9B}" dt="2026-09-04T06:22:50.490" v="2122"/>
+          <ac:spMkLst>
+            <pc:docMk/>
+            <pc:sldMk cId="1796555840" sldId="335"/>
+            <ac:spMk id="9" creationId="{00000000-0000-0000-0000-000000000000}"/>
+          </ac:spMkLst>
+        </pc:spChg>
+        <pc:spChg chg="mod">
+          <ac:chgData name="tony august" userId="0e1c2837a28b706a" providerId="LiveId" clId="{AD05CBBD-285A-40D0-ABA1-E4D8FAD69F9B}" dt="2026-09-04T06:23:10.913" v="2123"/>
+          <ac:spMkLst>
+            <pc:docMk/>
+            <pc:sldMk cId="1796555840" sldId="335"/>
+            <ac:spMk id="200" creationId="{00000000-0000-0000-0000-000000000000}"/>
+          </ac:spMkLst>
+        </pc:spChg>
+        <pc:spChg chg="mod">
+          <ac:chgData name="tony august" userId="0e1c2837a28b706a" providerId="LiveId" clId="{AD05CBBD-285A-40D0-ABA1-E4D8FAD69F9B}" dt="2026-09-04T06:23:10.914" v="2124"/>
+          <ac:spMkLst>
+            <pc:docMk/>
+            <pc:sldMk cId="1796555840" sldId="335"/>
+            <ac:spMk id="201" creationId="{00000000-0000-0000-0000-000000000000}"/>
+          </ac:spMkLst>
+        </pc:spChg>
+        <pc:spChg chg="mod">
+          <ac:chgData name="tony august" userId="0e1c2837a28b706a" providerId="LiveId" clId="{AD05CBBD-285A-40D0-ABA1-E4D8FAD69F9B}" dt="2026-09-04T06:23:10.914" v="2125"/>
+          <ac:spMkLst>
+            <pc:docMk/>
+            <pc:sldMk cId="1796555840" sldId="335"/>
+            <ac:spMk id="202" creationId="{00000000-0000-0000-0000-000000000000}"/>
+          </ac:spMkLst>
+        </pc:spChg>
+        <pc:spChg chg="mod">
+          <ac:chgData name="tony august" userId="0e1c2837a28b706a" providerId="LiveId" clId="{AD05CBBD-285A-40D0-ABA1-E4D8FAD69F9B}" dt="2026-09-04T06:23:10.914" v="2126"/>
+          <ac:spMkLst>
+            <pc:docMk/>
+            <pc:sldMk cId="1796555840" sldId="335"/>
+            <ac:spMk id="203" creationId="{00000000-0000-0000-0000-000000000000}"/>
+          </ac:spMkLst>
+        </pc:spChg>
+      </pc:sldChg>
+      <pc:sldChg chg="addSp modSp add mod">
+        <pc:chgData name="tony august" userId="0e1c2837a28b706a" providerId="LiveId" clId="{AD05CBBD-285A-40D0-ABA1-E4D8FAD69F9B}" dt="2026-09-04T06:31:23.714" v="2195" actId="1076"/>
+        <pc:sldMkLst>
+          <pc:docMk/>
+          <pc:sldMk cId="2837592851" sldId="336"/>
+        </pc:sldMkLst>
+        <pc:spChg chg="mod">
+          <ac:chgData name="tony august" userId="0e1c2837a28b706a" providerId="LiveId" clId="{AD05CBBD-285A-40D0-ABA1-E4D8FAD69F9B}" dt="2026-09-04T06:30:42.294" v="2190" actId="255"/>
+          <ac:spMkLst>
+            <pc:docMk/>
+            <pc:sldMk cId="2837592851" sldId="336"/>
+            <ac:spMk id="6" creationId="{00000000-0000-0000-0000-000000000000}"/>
+          </ac:spMkLst>
+        </pc:spChg>
+        <pc:spChg chg="mod">
+          <ac:chgData name="tony august" userId="0e1c2837a28b706a" providerId="LiveId" clId="{AD05CBBD-285A-40D0-ABA1-E4D8FAD69F9B}" dt="2026-09-04T06:29:47.997" v="2177" actId="14100"/>
+          <ac:spMkLst>
+            <pc:docMk/>
+            <pc:sldMk cId="2837592851" sldId="336"/>
+            <ac:spMk id="8" creationId="{00000000-0000-0000-0000-000000000000}"/>
+          </ac:spMkLst>
+        </pc:spChg>
+        <pc:spChg chg="mod">
+          <ac:chgData name="tony august" userId="0e1c2837a28b706a" providerId="LiveId" clId="{AD05CBBD-285A-40D0-ABA1-E4D8FAD69F9B}" dt="2026-09-04T06:29:54" v="2179" actId="1035"/>
+          <ac:spMkLst>
+            <pc:docMk/>
+            <pc:sldMk cId="2837592851" sldId="336"/>
+            <ac:spMk id="9" creationId="{00000000-0000-0000-0000-000000000000}"/>
+          </ac:spMkLst>
+        </pc:spChg>
+        <pc:spChg chg="add mod">
+          <ac:chgData name="tony august" userId="0e1c2837a28b706a" providerId="LiveId" clId="{AD05CBBD-285A-40D0-ABA1-E4D8FAD69F9B}" dt="2026-09-04T06:25:41.709" v="2144" actId="207"/>
+          <ac:spMkLst>
+            <pc:docMk/>
+            <pc:sldMk cId="2837592851" sldId="336"/>
+            <ac:spMk id="10" creationId="{DE676705-2D4C-318E-49C9-5548E3207ADA}"/>
+          </ac:spMkLst>
+        </pc:spChg>
+        <pc:spChg chg="add mod">
+          <ac:chgData name="tony august" userId="0e1c2837a28b706a" providerId="LiveId" clId="{AD05CBBD-285A-40D0-ABA1-E4D8FAD69F9B}" dt="2026-09-04T06:31:23.714" v="2195" actId="1076"/>
+          <ac:spMkLst>
+            <pc:docMk/>
+            <pc:sldMk cId="2837592851" sldId="336"/>
+            <ac:spMk id="11" creationId="{75E40F59-0269-84C2-8106-7D5906A7E39F}"/>
+          </ac:spMkLst>
+        </pc:spChg>
+        <pc:spChg chg="mod">
+          <ac:chgData name="tony august" userId="0e1c2837a28b706a" providerId="LiveId" clId="{AD05CBBD-285A-40D0-ABA1-E4D8FAD69F9B}" dt="2026-09-04T06:30:02.416" v="2180" actId="1076"/>
+          <ac:spMkLst>
+            <pc:docMk/>
+            <pc:sldMk cId="2837592851" sldId="336"/>
+            <ac:spMk id="200" creationId="{00000000-0000-0000-0000-000000000000}"/>
+          </ac:spMkLst>
+        </pc:spChg>
+        <pc:spChg chg="mod">
+          <ac:chgData name="tony august" userId="0e1c2837a28b706a" providerId="LiveId" clId="{AD05CBBD-285A-40D0-ABA1-E4D8FAD69F9B}" dt="2026-09-04T06:30:02.416" v="2180" actId="1076"/>
+          <ac:spMkLst>
+            <pc:docMk/>
+            <pc:sldMk cId="2837592851" sldId="336"/>
+            <ac:spMk id="201" creationId="{00000000-0000-0000-0000-000000000000}"/>
+          </ac:spMkLst>
+        </pc:spChg>
+        <pc:spChg chg="mod">
+          <ac:chgData name="tony august" userId="0e1c2837a28b706a" providerId="LiveId" clId="{AD05CBBD-285A-40D0-ABA1-E4D8FAD69F9B}" dt="2026-09-04T06:30:02.416" v="2180" actId="1076"/>
+          <ac:spMkLst>
+            <pc:docMk/>
+            <pc:sldMk cId="2837592851" sldId="336"/>
+            <ac:spMk id="202" creationId="{00000000-0000-0000-0000-000000000000}"/>
+          </ac:spMkLst>
+        </pc:spChg>
+        <pc:spChg chg="mod">
+          <ac:chgData name="tony august" userId="0e1c2837a28b706a" providerId="LiveId" clId="{AD05CBBD-285A-40D0-ABA1-E4D8FAD69F9B}" dt="2026-09-04T06:30:02.416" v="2180" actId="1076"/>
+          <ac:spMkLst>
+            <pc:docMk/>
+            <pc:sldMk cId="2837592851" sldId="336"/>
+            <ac:spMk id="203" creationId="{00000000-0000-0000-0000-000000000000}"/>
           </ac:spMkLst>
         </pc:spChg>
       </pc:sldChg>
@@ -1126,15 +1420,10 @@
             <a:spLocks noGrp="1" noRot="1" noChangeAspect="1"/>
           </p:cNvSpPr>
           <p:nvPr>
-            <p:ph type="sldImg" idx="2"/>
+            <p:ph type="sldImg"/>
           </p:nvPr>
         </p:nvSpPr>
-        <p:spPr>
-          <a:xfrm>
-            <a:off x="735013" y="704850"/>
-            <a:ext cx="5632450" cy="3168650"/>
-          </a:xfrm>
-        </p:spPr>
+        <p:spPr/>
       </p:sp>
       <p:sp>
         <p:nvSpPr>
@@ -1143,7 +1432,7 @@
             <a:spLocks noGrp="1"/>
           </p:cNvSpPr>
           <p:nvPr>
-            <p:ph type="body" sz="quarter" idx="3"/>
+            <p:ph type="body" idx="1"/>
           </p:nvPr>
         </p:nvSpPr>
         <p:spPr/>
@@ -1151,19 +1440,7 @@
           <a:bodyPr/>
           <a:lstStyle/>
           <a:p>
-            <a:r>
-              <a:t>Opens on R5 so the agentic tier arrives as the answer to something they asked for, not as technology being pushed.</a:t>
-            </a:r>
-          </a:p>
-          <a:p>
-            <a:r>
-              <a:t>THE argument: why Solace and not a lightweight agent framework. Most frameworks wire agents together with synchronous HTTP tool calls. Put A2A on the broker and you get decoupling, durability, back-pressure and replay from infrastructure the enterprise already trusts.</a:t>
-            </a:r>
-          </a:p>
-          <a:p>
-            <a:r>
-              <a:t>LIVE IF READY. If not, walk the architecture and say plainly that it is the tier still in build — announced in advance, agreed with Emerson.</a:t>
-            </a:r>
+            <a:endParaRPr lang="en-US" dirty="0"/>
           </a:p>
         </p:txBody>
       </p:sp>
@@ -1174,12 +1451,88 @@
             <a:spLocks noGrp="1"/>
           </p:cNvSpPr>
           <p:nvPr>
-            <p:ph type="sldNum" sz="quarter" idx="5"/>
+            <p:ph type="sldNum" sz="quarter" idx="10"/>
           </p:nvPr>
         </p:nvSpPr>
         <p:spPr/>
+        <p:txBody>
+          <a:bodyPr/>
+          <a:lstStyle/>
+          <a:p>
+            <a:pPr marL="0" marR="0" lvl="0" indent="0" algn="l" defTabSz="914400" rtl="0" eaLnBrk="1" fontAlgn="auto" latinLnBrk="0" hangingPunct="1">
+              <a:lnSpc>
+                <a:spcPct val="100000"/>
+              </a:lnSpc>
+              <a:spcBef>
+                <a:spcPts val="0"/>
+              </a:spcBef>
+              <a:spcAft>
+                <a:spcPts val="0"/>
+              </a:spcAft>
+              <a:buClrTx/>
+              <a:buSzTx/>
+              <a:buFontTx/>
+              <a:buNone/>
+              <a:tabLst/>
+              <a:defRPr/>
+            </a:pPr>
+            <a:fld id="{F7021451-1387-4CA6-816F-3879F97B5CBC}" type="slidenum">
+              <a:rPr kumimoji="0" lang="en-US" sz="1800" b="0" i="0" u="none" strike="noStrike" kern="1200" cap="none" spc="0" normalizeH="0" baseline="0" noProof="0">
+                <a:ln>
+                  <a:noFill/>
+                </a:ln>
+                <a:solidFill>
+                  <a:prstClr val="black"/>
+                </a:solidFill>
+                <a:effectLst/>
+                <a:uLnTx/>
+                <a:uFillTx/>
+                <a:latin typeface="Aptos" panose="02110004020202020204"/>
+                <a:ea typeface="+mn-ea"/>
+                <a:cs typeface="+mn-cs"/>
+              </a:rPr>
+              <a:pPr marL="0" marR="0" lvl="0" indent="0" algn="l" defTabSz="914400" rtl="0" eaLnBrk="1" fontAlgn="auto" latinLnBrk="0" hangingPunct="1">
+                <a:lnSpc>
+                  <a:spcPct val="100000"/>
+                </a:lnSpc>
+                <a:spcBef>
+                  <a:spcPts val="0"/>
+                </a:spcBef>
+                <a:spcAft>
+                  <a:spcPts val="0"/>
+                </a:spcAft>
+                <a:buClrTx/>
+                <a:buSzTx/>
+                <a:buFontTx/>
+                <a:buNone/>
+                <a:tabLst/>
+                <a:defRPr/>
+              </a:pPr>
+              <a:t>12</a:t>
+            </a:fld>
+            <a:endParaRPr kumimoji="0" lang="en-US" sz="1800" b="0" i="0" u="none" strike="noStrike" kern="1200" cap="none" spc="0" normalizeH="0" baseline="0" noProof="0">
+              <a:ln>
+                <a:noFill/>
+              </a:ln>
+              <a:solidFill>
+                <a:prstClr val="black"/>
+              </a:solidFill>
+              <a:effectLst/>
+              <a:uLnTx/>
+              <a:uFillTx/>
+              <a:latin typeface="Aptos" panose="02110004020202020204"/>
+              <a:ea typeface="+mn-ea"/>
+              <a:cs typeface="+mn-cs"/>
+            </a:endParaRPr>
+          </a:p>
+        </p:txBody>
       </p:sp>
     </p:spTree>
+    <p:extLst>
+      <p:ext uri="{BB962C8B-B14F-4D97-AF65-F5344CB8AC3E}">
+        <p14:creationId xmlns:p14="http://schemas.microsoft.com/office/powerpoint/2010/main" val="1024086991"/>
+      </p:ext>
+    </p:extLst>
   </p:cSld>
   <p:clrMapOvr>
     <a:masterClrMapping/>
@@ -2296,7 +2649,7 @@
           <a:p>
             <a:fld id="{5BCAD085-E8A6-8845-BD4E-CB4CCA059FC4}" type="datetimeFigureOut">
               <a:rPr lang="en-US" smtClean="0"/>
-              <a:t>9/3/2026</a:t>
+              <a:t>9/4/2026</a:t>
             </a:fld>
             <a:endParaRPr lang="en-US"/>
           </a:p>
@@ -2464,7 +2817,7 @@
           <a:p>
             <a:fld id="{5BCAD085-E8A6-8845-BD4E-CB4CCA059FC4}" type="datetimeFigureOut">
               <a:rPr lang="en-US" smtClean="0"/>
-              <a:t>9/3/2026</a:t>
+              <a:t>9/4/2026</a:t>
             </a:fld>
             <a:endParaRPr lang="en-US"/>
           </a:p>
@@ -2642,7 +2995,7 @@
           <a:p>
             <a:fld id="{5BCAD085-E8A6-8845-BD4E-CB4CCA059FC4}" type="datetimeFigureOut">
               <a:rPr lang="en-US" smtClean="0"/>
-              <a:t>9/3/2026</a:t>
+              <a:t>9/4/2026</a:t>
             </a:fld>
             <a:endParaRPr lang="en-US"/>
           </a:p>
@@ -2694,6 +3047,41 @@
     <p:extLst>
       <p:ext uri="{BB962C8B-B14F-4D97-AF65-F5344CB8AC3E}">
         <p14:creationId xmlns:p14="http://schemas.microsoft.com/office/powerpoint/2010/main" val="3612223792"/>
+      </p:ext>
+    </p:extLst>
+  </p:cSld>
+  <p:clrMapOvr>
+    <a:masterClrMapping/>
+  </p:clrMapOvr>
+</p:sldLayout>
+</file>
+
+<file path=ppt/slideLayouts/slideLayout12.xml><?xml version="1.0" encoding="utf-8"?>
+<p:sldLayout xmlns:a="http://schemas.openxmlformats.org/drawingml/2006/main" xmlns:r="http://schemas.openxmlformats.org/officeDocument/2006/relationships" xmlns:p="http://schemas.openxmlformats.org/presentationml/2006/main" preserve="1">
+  <p:cSld name="DEFAULT">
+    <p:bg>
+      <p:bgRef idx="1001">
+        <a:schemeClr val="bg1"/>
+      </p:bgRef>
+    </p:bg>
+    <p:spTree>
+      <p:nvGrpSpPr>
+        <p:cNvPr id="1" name=""/>
+        <p:cNvGrpSpPr/>
+        <p:nvPr/>
+      </p:nvGrpSpPr>
+      <p:grpSpPr>
+        <a:xfrm>
+          <a:off x="0" y="0"/>
+          <a:ext cx="0" cy="0"/>
+          <a:chOff x="0" y="0"/>
+          <a:chExt cx="0" cy="0"/>
+        </a:xfrm>
+      </p:grpSpPr>
+    </p:spTree>
+    <p:extLst>
+      <p:ext uri="{BB962C8B-B14F-4D97-AF65-F5344CB8AC3E}">
+        <p14:creationId xmlns:p14="http://schemas.microsoft.com/office/powerpoint/2010/main" val="3530500861"/>
       </p:ext>
     </p:extLst>
   </p:cSld>
@@ -2810,7 +3198,7 @@
           <a:p>
             <a:fld id="{5BCAD085-E8A6-8845-BD4E-CB4CCA059FC4}" type="datetimeFigureOut">
               <a:rPr lang="en-US" smtClean="0"/>
-              <a:t>9/3/2026</a:t>
+              <a:t>9/4/2026</a:t>
             </a:fld>
             <a:endParaRPr lang="en-US"/>
           </a:p>
@@ -3055,7 +3443,7 @@
           <a:p>
             <a:fld id="{5BCAD085-E8A6-8845-BD4E-CB4CCA059FC4}" type="datetimeFigureOut">
               <a:rPr lang="en-US" smtClean="0"/>
-              <a:t>9/3/2026</a:t>
+              <a:t>9/4/2026</a:t>
             </a:fld>
             <a:endParaRPr lang="en-US"/>
           </a:p>
@@ -3340,7 +3728,7 @@
           <a:p>
             <a:fld id="{5BCAD085-E8A6-8845-BD4E-CB4CCA059FC4}" type="datetimeFigureOut">
               <a:rPr lang="en-US" smtClean="0"/>
-              <a:t>9/3/2026</a:t>
+              <a:t>9/4/2026</a:t>
             </a:fld>
             <a:endParaRPr lang="en-US"/>
           </a:p>
@@ -3759,7 +4147,7 @@
           <a:p>
             <a:fld id="{5BCAD085-E8A6-8845-BD4E-CB4CCA059FC4}" type="datetimeFigureOut">
               <a:rPr lang="en-US" smtClean="0"/>
-              <a:t>9/3/2026</a:t>
+              <a:t>9/4/2026</a:t>
             </a:fld>
             <a:endParaRPr lang="en-US"/>
           </a:p>
@@ -3876,7 +4264,7 @@
           <a:p>
             <a:fld id="{5BCAD085-E8A6-8845-BD4E-CB4CCA059FC4}" type="datetimeFigureOut">
               <a:rPr lang="en-US" smtClean="0"/>
-              <a:t>9/3/2026</a:t>
+              <a:t>9/4/2026</a:t>
             </a:fld>
             <a:endParaRPr lang="en-US"/>
           </a:p>
@@ -3971,7 +4359,7 @@
           <a:p>
             <a:fld id="{5BCAD085-E8A6-8845-BD4E-CB4CCA059FC4}" type="datetimeFigureOut">
               <a:rPr lang="en-US" smtClean="0"/>
-              <a:t>9/3/2026</a:t>
+              <a:t>9/4/2026</a:t>
             </a:fld>
             <a:endParaRPr lang="en-US"/>
           </a:p>
@@ -4246,7 +4634,7 @@
           <a:p>
             <a:fld id="{5BCAD085-E8A6-8845-BD4E-CB4CCA059FC4}" type="datetimeFigureOut">
               <a:rPr lang="en-US" smtClean="0"/>
-              <a:t>9/3/2026</a:t>
+              <a:t>9/4/2026</a:t>
             </a:fld>
             <a:endParaRPr lang="en-US"/>
           </a:p>
@@ -4498,7 +4886,7 @@
           <a:p>
             <a:fld id="{5BCAD085-E8A6-8845-BD4E-CB4CCA059FC4}" type="datetimeFigureOut">
               <a:rPr lang="en-US" smtClean="0"/>
-              <a:t>9/3/2026</a:t>
+              <a:t>9/4/2026</a:t>
             </a:fld>
             <a:endParaRPr lang="en-US"/>
           </a:p>
@@ -4709,7 +5097,7 @@
           <a:p>
             <a:fld id="{5BCAD085-E8A6-8845-BD4E-CB4CCA059FC4}" type="datetimeFigureOut">
               <a:rPr lang="en-US" smtClean="0"/>
-              <a:t>9/3/2026</a:t>
+              <a:t>9/4/2026</a:t>
             </a:fld>
             <a:endParaRPr lang="en-US"/>
           </a:p>
@@ -5067,6 +5455,293 @@
 </p:sldMaster>
 </file>
 
+<file path=ppt/slideMasters/slideMaster2.xml><?xml version="1.0" encoding="utf-8"?>
+<p:sldMaster xmlns:a="http://schemas.openxmlformats.org/drawingml/2006/main" xmlns:r="http://schemas.openxmlformats.org/officeDocument/2006/relationships" xmlns:p="http://schemas.openxmlformats.org/presentationml/2006/main">
+  <p:cSld>
+    <p:bg>
+      <p:bgRef idx="1001">
+        <a:schemeClr val="bg1"/>
+      </p:bgRef>
+    </p:bg>
+    <p:spTree>
+      <p:nvGrpSpPr>
+        <p:cNvPr id="1" name=""/>
+        <p:cNvGrpSpPr/>
+        <p:nvPr/>
+      </p:nvGrpSpPr>
+      <p:grpSpPr>
+        <a:xfrm>
+          <a:off x="0" y="0"/>
+          <a:ext cx="0" cy="0"/>
+          <a:chOff x="0" y="0"/>
+          <a:chExt cx="0" cy="0"/>
+        </a:xfrm>
+      </p:grpSpPr>
+    </p:spTree>
+    <p:extLst>
+      <p:ext uri="{BB962C8B-B14F-4D97-AF65-F5344CB8AC3E}">
+        <p14:creationId xmlns:p14="http://schemas.microsoft.com/office/powerpoint/2010/main" val="4190345641"/>
+      </p:ext>
+    </p:extLst>
+  </p:cSld>
+  <p:clrMap bg1="lt1" tx1="dk1" bg2="lt2" tx2="dk2" accent1="accent1" accent2="accent2" accent3="accent3" accent4="accent4" accent5="accent5" accent6="accent6" hlink="hlink" folHlink="folHlink"/>
+  <p:sldLayoutIdLst>
+    <p:sldLayoutId id="2147483685" r:id="rId1"/>
+  </p:sldLayoutIdLst>
+  <p:hf sldNum="0" hdr="0" ftr="0" dt="0"/>
+  <p:txStyles>
+    <p:titleStyle>
+      <a:lvl1pPr algn="ctr" defTabSz="914400" rtl="0" eaLnBrk="1" latinLnBrk="0" hangingPunct="1">
+        <a:spcBef>
+          <a:spcPct val="0"/>
+        </a:spcBef>
+        <a:buNone/>
+        <a:defRPr sz="4400" kern="1200">
+          <a:solidFill>
+            <a:schemeClr val="tx1"/>
+          </a:solidFill>
+          <a:latin typeface="+mj-lt"/>
+          <a:ea typeface="+mj-ea"/>
+          <a:cs typeface="+mj-cs"/>
+        </a:defRPr>
+      </a:lvl1pPr>
+    </p:titleStyle>
+    <p:bodyStyle>
+      <a:lvl1pPr marL="342900" indent="-342900" algn="l" defTabSz="914400" rtl="0" eaLnBrk="1" latinLnBrk="0" hangingPunct="1">
+        <a:spcBef>
+          <a:spcPct val="20000"/>
+        </a:spcBef>
+        <a:buFont typeface="Arial" pitchFamily="34" charset="0"/>
+        <a:buChar char="•"/>
+        <a:defRPr sz="3200" kern="1200">
+          <a:solidFill>
+            <a:schemeClr val="tx1"/>
+          </a:solidFill>
+          <a:latin typeface="+mn-lt"/>
+          <a:ea typeface="+mn-ea"/>
+          <a:cs typeface="+mn-cs"/>
+        </a:defRPr>
+      </a:lvl1pPr>
+      <a:lvl2pPr marL="742950" indent="-285750" algn="l" defTabSz="914400" rtl="0" eaLnBrk="1" latinLnBrk="0" hangingPunct="1">
+        <a:spcBef>
+          <a:spcPct val="20000"/>
+        </a:spcBef>
+        <a:buFont typeface="Arial" pitchFamily="34" charset="0"/>
+        <a:buChar char="–"/>
+        <a:defRPr sz="2800" kern="1200">
+          <a:solidFill>
+            <a:schemeClr val="tx1"/>
+          </a:solidFill>
+          <a:latin typeface="+mn-lt"/>
+          <a:ea typeface="+mn-ea"/>
+          <a:cs typeface="+mn-cs"/>
+        </a:defRPr>
+      </a:lvl2pPr>
+      <a:lvl3pPr marL="1143000" indent="-228600" algn="l" defTabSz="914400" rtl="0" eaLnBrk="1" latinLnBrk="0" hangingPunct="1">
+        <a:spcBef>
+          <a:spcPct val="20000"/>
+        </a:spcBef>
+        <a:buFont typeface="Arial" pitchFamily="34" charset="0"/>
+        <a:buChar char="•"/>
+        <a:defRPr sz="2400" kern="1200">
+          <a:solidFill>
+            <a:schemeClr val="tx1"/>
+          </a:solidFill>
+          <a:latin typeface="+mn-lt"/>
+          <a:ea typeface="+mn-ea"/>
+          <a:cs typeface="+mn-cs"/>
+        </a:defRPr>
+      </a:lvl3pPr>
+      <a:lvl4pPr marL="1600200" indent="-228600" algn="l" defTabSz="914400" rtl="0" eaLnBrk="1" latinLnBrk="0" hangingPunct="1">
+        <a:spcBef>
+          <a:spcPct val="20000"/>
+        </a:spcBef>
+        <a:buFont typeface="Arial" pitchFamily="34" charset="0"/>
+        <a:buChar char="–"/>
+        <a:defRPr sz="2000" kern="1200">
+          <a:solidFill>
+            <a:schemeClr val="tx1"/>
+          </a:solidFill>
+          <a:latin typeface="+mn-lt"/>
+          <a:ea typeface="+mn-ea"/>
+          <a:cs typeface="+mn-cs"/>
+        </a:defRPr>
+      </a:lvl4pPr>
+      <a:lvl5pPr marL="2057400" indent="-228600" algn="l" defTabSz="914400" rtl="0" eaLnBrk="1" latinLnBrk="0" hangingPunct="1">
+        <a:spcBef>
+          <a:spcPct val="20000"/>
+        </a:spcBef>
+        <a:buFont typeface="Arial" pitchFamily="34" charset="0"/>
+        <a:buChar char="»"/>
+        <a:defRPr sz="2000" kern="1200">
+          <a:solidFill>
+            <a:schemeClr val="tx1"/>
+          </a:solidFill>
+          <a:latin typeface="+mn-lt"/>
+          <a:ea typeface="+mn-ea"/>
+          <a:cs typeface="+mn-cs"/>
+        </a:defRPr>
+      </a:lvl5pPr>
+      <a:lvl6pPr marL="2514600" indent="-228600" algn="l" defTabSz="914400" rtl="0" eaLnBrk="1" latinLnBrk="0" hangingPunct="1">
+        <a:spcBef>
+          <a:spcPct val="20000"/>
+        </a:spcBef>
+        <a:buFont typeface="Arial" pitchFamily="34" charset="0"/>
+        <a:buChar char="•"/>
+        <a:defRPr sz="2000" kern="1200">
+          <a:solidFill>
+            <a:schemeClr val="tx1"/>
+          </a:solidFill>
+          <a:latin typeface="+mn-lt"/>
+          <a:ea typeface="+mn-ea"/>
+          <a:cs typeface="+mn-cs"/>
+        </a:defRPr>
+      </a:lvl6pPr>
+      <a:lvl7pPr marL="2971800" indent="-228600" algn="l" defTabSz="914400" rtl="0" eaLnBrk="1" latinLnBrk="0" hangingPunct="1">
+        <a:spcBef>
+          <a:spcPct val="20000"/>
+        </a:spcBef>
+        <a:buFont typeface="Arial" pitchFamily="34" charset="0"/>
+        <a:buChar char="•"/>
+        <a:defRPr sz="2000" kern="1200">
+          <a:solidFill>
+            <a:schemeClr val="tx1"/>
+          </a:solidFill>
+          <a:latin typeface="+mn-lt"/>
+          <a:ea typeface="+mn-ea"/>
+          <a:cs typeface="+mn-cs"/>
+        </a:defRPr>
+      </a:lvl7pPr>
+      <a:lvl8pPr marL="3429000" indent="-228600" algn="l" defTabSz="914400" rtl="0" eaLnBrk="1" latinLnBrk="0" hangingPunct="1">
+        <a:spcBef>
+          <a:spcPct val="20000"/>
+        </a:spcBef>
+        <a:buFont typeface="Arial" pitchFamily="34" charset="0"/>
+        <a:buChar char="•"/>
+        <a:defRPr sz="2000" kern="1200">
+          <a:solidFill>
+            <a:schemeClr val="tx1"/>
+          </a:solidFill>
+          <a:latin typeface="+mn-lt"/>
+          <a:ea typeface="+mn-ea"/>
+          <a:cs typeface="+mn-cs"/>
+        </a:defRPr>
+      </a:lvl8pPr>
+      <a:lvl9pPr marL="3886200" indent="-228600" algn="l" defTabSz="914400" rtl="0" eaLnBrk="1" latinLnBrk="0" hangingPunct="1">
+        <a:spcBef>
+          <a:spcPct val="20000"/>
+        </a:spcBef>
+        <a:buFont typeface="Arial" pitchFamily="34" charset="0"/>
+        <a:buChar char="•"/>
+        <a:defRPr sz="2000" kern="1200">
+          <a:solidFill>
+            <a:schemeClr val="tx1"/>
+          </a:solidFill>
+          <a:latin typeface="+mn-lt"/>
+          <a:ea typeface="+mn-ea"/>
+          <a:cs typeface="+mn-cs"/>
+        </a:defRPr>
+      </a:lvl9pPr>
+    </p:bodyStyle>
+    <p:otherStyle>
+      <a:defPPr>
+        <a:defRPr lang="en-US"/>
+      </a:defPPr>
+      <a:lvl1pPr marL="0" algn="l" defTabSz="914400" rtl="0" eaLnBrk="1" latinLnBrk="0" hangingPunct="1">
+        <a:defRPr sz="1800" kern="1200">
+          <a:solidFill>
+            <a:schemeClr val="tx1"/>
+          </a:solidFill>
+          <a:latin typeface="+mn-lt"/>
+          <a:ea typeface="+mn-ea"/>
+          <a:cs typeface="+mn-cs"/>
+        </a:defRPr>
+      </a:lvl1pPr>
+      <a:lvl2pPr marL="457200" algn="l" defTabSz="914400" rtl="0" eaLnBrk="1" latinLnBrk="0" hangingPunct="1">
+        <a:defRPr sz="1800" kern="1200">
+          <a:solidFill>
+            <a:schemeClr val="tx1"/>
+          </a:solidFill>
+          <a:latin typeface="+mn-lt"/>
+          <a:ea typeface="+mn-ea"/>
+          <a:cs typeface="+mn-cs"/>
+        </a:defRPr>
+      </a:lvl2pPr>
+      <a:lvl3pPr marL="914400" algn="l" defTabSz="914400" rtl="0" eaLnBrk="1" latinLnBrk="0" hangingPunct="1">
+        <a:defRPr sz="1800" kern="1200">
+          <a:solidFill>
+            <a:schemeClr val="tx1"/>
+          </a:solidFill>
+          <a:latin typeface="+mn-lt"/>
+          <a:ea typeface="+mn-ea"/>
+          <a:cs typeface="+mn-cs"/>
+        </a:defRPr>
+      </a:lvl3pPr>
+      <a:lvl4pPr marL="1371600" algn="l" defTabSz="914400" rtl="0" eaLnBrk="1" latinLnBrk="0" hangingPunct="1">
+        <a:defRPr sz="1800" kern="1200">
+          <a:solidFill>
+            <a:schemeClr val="tx1"/>
+          </a:solidFill>
+          <a:latin typeface="+mn-lt"/>
+          <a:ea typeface="+mn-ea"/>
+          <a:cs typeface="+mn-cs"/>
+        </a:defRPr>
+      </a:lvl4pPr>
+      <a:lvl5pPr marL="1828800" algn="l" defTabSz="914400" rtl="0" eaLnBrk="1" latinLnBrk="0" hangingPunct="1">
+        <a:defRPr sz="1800" kern="1200">
+          <a:solidFill>
+            <a:schemeClr val="tx1"/>
+          </a:solidFill>
+          <a:latin typeface="+mn-lt"/>
+          <a:ea typeface="+mn-ea"/>
+          <a:cs typeface="+mn-cs"/>
+        </a:defRPr>
+      </a:lvl5pPr>
+      <a:lvl6pPr marL="2286000" algn="l" defTabSz="914400" rtl="0" eaLnBrk="1" latinLnBrk="0" hangingPunct="1">
+        <a:defRPr sz="1800" kern="1200">
+          <a:solidFill>
+            <a:schemeClr val="tx1"/>
+          </a:solidFill>
+          <a:latin typeface="+mn-lt"/>
+          <a:ea typeface="+mn-ea"/>
+          <a:cs typeface="+mn-cs"/>
+        </a:defRPr>
+      </a:lvl6pPr>
+      <a:lvl7pPr marL="2743200" algn="l" defTabSz="914400" rtl="0" eaLnBrk="1" latinLnBrk="0" hangingPunct="1">
+        <a:defRPr sz="1800" kern="1200">
+          <a:solidFill>
+            <a:schemeClr val="tx1"/>
+          </a:solidFill>
+          <a:latin typeface="+mn-lt"/>
+          <a:ea typeface="+mn-ea"/>
+          <a:cs typeface="+mn-cs"/>
+        </a:defRPr>
+      </a:lvl7pPr>
+      <a:lvl8pPr marL="3200400" algn="l" defTabSz="914400" rtl="0" eaLnBrk="1" latinLnBrk="0" hangingPunct="1">
+        <a:defRPr sz="1800" kern="1200">
+          <a:solidFill>
+            <a:schemeClr val="tx1"/>
+          </a:solidFill>
+          <a:latin typeface="+mn-lt"/>
+          <a:ea typeface="+mn-ea"/>
+          <a:cs typeface="+mn-cs"/>
+        </a:defRPr>
+      </a:lvl8pPr>
+      <a:lvl9pPr marL="3657600" algn="l" defTabSz="914400" rtl="0" eaLnBrk="1" latinLnBrk="0" hangingPunct="1">
+        <a:defRPr sz="1800" kern="1200">
+          <a:solidFill>
+            <a:schemeClr val="tx1"/>
+          </a:solidFill>
+          <a:latin typeface="+mn-lt"/>
+          <a:ea typeface="+mn-ea"/>
+          <a:cs typeface="+mn-cs"/>
+        </a:defRPr>
+      </a:lvl9pPr>
+    </p:otherStyle>
+  </p:txStyles>
+</p:sldMaster>
+</file>
+
 <file path=ppt/slides/slide1.xml><?xml version="1.0" encoding="utf-8"?>
 <p:sld xmlns:a="http://schemas.openxmlformats.org/drawingml/2006/main" xmlns:r="http://schemas.openxmlformats.org/officeDocument/2006/relationships" xmlns:p="http://schemas.openxmlformats.org/presentationml/2006/main">
   <p:cSld>
@@ -6290,6 +6965,20 @@
 <file path=ppt/slides/slide12.xml><?xml version="1.0" encoding="utf-8"?>
 <p:sld xmlns:a="http://schemas.openxmlformats.org/drawingml/2006/main" xmlns:r="http://schemas.openxmlformats.org/officeDocument/2006/relationships" xmlns:p="http://schemas.openxmlformats.org/presentationml/2006/main">
   <p:cSld>
+    <p:bg>
+      <p:bgPr>
+        <a:blipFill dpi="0" rotWithShape="1">
+          <a:blip r:embed="rId3">
+            <a:lum/>
+          </a:blip>
+          <a:srcRect/>
+          <a:stretch>
+            <a:fillRect/>
+          </a:stretch>
+        </a:blipFill>
+        <a:effectLst/>
+      </p:bgPr>
+    </p:bg>
     <p:spTree>
       <p:nvGrpSpPr>
         <p:cNvPr id="1" name=""/>
@@ -6306,14 +6995,3492 @@
       </p:grpSpPr>
       <p:sp>
         <p:nvSpPr>
-          <p:cNvPr id="2" name="TextBox 1"/>
+          <p:cNvPr id="2" name="Text 0"/>
+          <p:cNvSpPr/>
+          <p:nvPr/>
+        </p:nvSpPr>
+        <p:spPr>
+          <a:xfrm>
+            <a:off x="1588" y="128016"/>
+            <a:ext cx="12188952" cy="457200"/>
+          </a:xfrm>
+          <a:prstGeom prst="rect">
+            <a:avLst/>
+          </a:prstGeom>
+          <a:noFill/>
+          <a:ln/>
+        </p:spPr>
+        <p:txBody>
+          <a:bodyPr wrap="square" lIns="0" tIns="0" rIns="0" bIns="0" rtlCol="0" anchor="ctr"/>
+          <a:lstStyle/>
+          <a:p>
+            <a:pPr marL="0" marR="0" lvl="0" indent="0" algn="ctr" defTabSz="914400" rtl="0" eaLnBrk="1" fontAlgn="auto" latinLnBrk="0" hangingPunct="1">
+              <a:lnSpc>
+                <a:spcPct val="100000"/>
+              </a:lnSpc>
+              <a:spcBef>
+                <a:spcPts val="0"/>
+              </a:spcBef>
+              <a:spcAft>
+                <a:spcPts val="0"/>
+              </a:spcAft>
+              <a:buClrTx/>
+              <a:buSzTx/>
+              <a:buFontTx/>
+              <a:buNone/>
+              <a:tabLst/>
+              <a:defRPr/>
+            </a:pPr>
+            <a:r>
+              <a:rPr kumimoji="0" lang="en-US" sz="3000" b="1" i="0" u="none" strike="noStrike" kern="1200" cap="none" spc="0" normalizeH="0" baseline="0" noProof="0" dirty="0">
+                <a:ln>
+                  <a:noFill/>
+                </a:ln>
+                <a:solidFill>
+                  <a:srgbClr val="CFE9FF"/>
+                </a:solidFill>
+                <a:effectLst/>
+                <a:uLnTx/>
+                <a:uFillTx/>
+                <a:latin typeface="Calibri" pitchFamily="34" charset="0"/>
+                <a:ea typeface="Calibri" pitchFamily="34" charset="-122"/>
+                <a:cs typeface="Calibri" pitchFamily="34" charset="-120"/>
+              </a:rPr>
+              <a:t>AI DRIVEN EXCEPTION HANDLING</a:t>
+            </a:r>
+            <a:endParaRPr kumimoji="0" lang="en-US" sz="3000" b="0" i="0" u="none" strike="noStrike" kern="1200" cap="none" spc="0" normalizeH="0" baseline="0" noProof="0" dirty="0">
+              <a:ln>
+                <a:noFill/>
+              </a:ln>
+              <a:solidFill>
+                <a:prstClr val="black"/>
+              </a:solidFill>
+              <a:effectLst/>
+              <a:uLnTx/>
+              <a:uFillTx/>
+              <a:latin typeface="Calibri" panose="020F0502020204030204"/>
+              <a:ea typeface="+mn-ea"/>
+              <a:cs typeface="+mn-cs"/>
+            </a:endParaRPr>
+          </a:p>
+        </p:txBody>
+      </p:sp>
+      <p:sp>
+        <p:nvSpPr>
+          <p:cNvPr id="3" name="Text 1"/>
+          <p:cNvSpPr/>
+          <p:nvPr/>
+        </p:nvSpPr>
+        <p:spPr>
+          <a:xfrm>
+            <a:off x="1588" y="566928"/>
+            <a:ext cx="12188952" cy="292608"/>
+          </a:xfrm>
+          <a:prstGeom prst="rect">
+            <a:avLst/>
+          </a:prstGeom>
+          <a:noFill/>
+          <a:ln/>
+        </p:spPr>
+        <p:txBody>
+          <a:bodyPr wrap="square" lIns="0" tIns="0" rIns="0" bIns="0" rtlCol="0" anchor="ctr"/>
+          <a:lstStyle/>
+          <a:p>
+            <a:pPr marL="0" marR="0" lvl="0" indent="0" algn="ctr" defTabSz="914400" rtl="0" eaLnBrk="1" fontAlgn="auto" latinLnBrk="0" hangingPunct="1">
+              <a:lnSpc>
+                <a:spcPct val="100000"/>
+              </a:lnSpc>
+              <a:spcBef>
+                <a:spcPts val="0"/>
+              </a:spcBef>
+              <a:spcAft>
+                <a:spcPts val="0"/>
+              </a:spcAft>
+              <a:buClrTx/>
+              <a:buSzTx/>
+              <a:buFontTx/>
+              <a:buNone/>
+              <a:tabLst/>
+              <a:defRPr/>
+            </a:pPr>
+            <a:r>
+              <a:rPr kumimoji="0" lang="en-US" sz="1500" b="0" i="0" u="none" strike="noStrike" kern="1200" cap="none" spc="0" normalizeH="0" baseline="0" noProof="0" dirty="0">
+                <a:ln>
+                  <a:noFill/>
+                </a:ln>
+                <a:solidFill>
+                  <a:srgbClr val="6FC4F2"/>
+                </a:solidFill>
+                <a:effectLst/>
+                <a:uLnTx/>
+                <a:uFillTx/>
+                <a:latin typeface="Calibri" pitchFamily="34" charset="0"/>
+                <a:ea typeface="Calibri" pitchFamily="34" charset="-122"/>
+                <a:cs typeface="Calibri" pitchFamily="34" charset="-120"/>
+              </a:rPr>
+              <a:t>How Agentic Augmentation and Guardrails Shift Human Workloads</a:t>
+            </a:r>
+            <a:endParaRPr kumimoji="0" lang="en-US" sz="1500" b="0" i="0" u="none" strike="noStrike" kern="1200" cap="none" spc="0" normalizeH="0" baseline="0" noProof="0" dirty="0">
+              <a:ln>
+                <a:noFill/>
+              </a:ln>
+              <a:solidFill>
+                <a:prstClr val="black"/>
+              </a:solidFill>
+              <a:effectLst/>
+              <a:uLnTx/>
+              <a:uFillTx/>
+              <a:latin typeface="Calibri" panose="020F0502020204030204"/>
+              <a:ea typeface="+mn-ea"/>
+              <a:cs typeface="+mn-cs"/>
+            </a:endParaRPr>
+          </a:p>
+        </p:txBody>
+      </p:sp>
+      <p:sp>
+        <p:nvSpPr>
+          <p:cNvPr id="4" name="Shape 2"/>
+          <p:cNvSpPr/>
+          <p:nvPr/>
+        </p:nvSpPr>
+        <p:spPr>
+          <a:xfrm>
+            <a:off x="312484" y="932688"/>
+            <a:ext cx="11676888" cy="2724912"/>
+          </a:xfrm>
+          <a:prstGeom prst="roundRect">
+            <a:avLst>
+              <a:gd name="adj" fmla="val 2013"/>
+            </a:avLst>
+          </a:prstGeom>
+          <a:solidFill>
+            <a:srgbClr val="0B1D37"/>
+          </a:solidFill>
+          <a:ln w="15875">
+            <a:solidFill>
+              <a:srgbClr val="245F92"/>
+            </a:solidFill>
+            <a:prstDash val="solid"/>
+          </a:ln>
+          <a:effectLst>
+            <a:outerShdw blurRad="152400" dist="50800" dir="16200000" algn="bl" rotWithShape="0">
+              <a:srgbClr val="2E86C8">
+                <a:alpha val="55000"/>
+              </a:srgbClr>
+            </a:outerShdw>
+          </a:effectLst>
+        </p:spPr>
+        <p:txBody>
+          <a:bodyPr/>
+          <a:lstStyle/>
+          <a:p>
+            <a:pPr marL="0" marR="0" lvl="0" indent="0" algn="l" defTabSz="914400" rtl="0" eaLnBrk="1" fontAlgn="auto" latinLnBrk="0" hangingPunct="1">
+              <a:lnSpc>
+                <a:spcPct val="100000"/>
+              </a:lnSpc>
+              <a:spcBef>
+                <a:spcPts val="0"/>
+              </a:spcBef>
+              <a:spcAft>
+                <a:spcPts val="0"/>
+              </a:spcAft>
+              <a:buClrTx/>
+              <a:buSzTx/>
+              <a:buFontTx/>
+              <a:buNone/>
+              <a:tabLst/>
+              <a:defRPr/>
+            </a:pPr>
+            <a:endParaRPr kumimoji="0" lang="en-US" sz="1800" b="0" i="0" u="none" strike="noStrike" kern="1200" cap="none" spc="0" normalizeH="0" baseline="0" noProof="0">
+              <a:ln>
+                <a:noFill/>
+              </a:ln>
+              <a:solidFill>
+                <a:prstClr val="black"/>
+              </a:solidFill>
+              <a:effectLst/>
+              <a:uLnTx/>
+              <a:uFillTx/>
+              <a:latin typeface="Calibri" panose="020F0502020204030204"/>
+              <a:ea typeface="+mn-ea"/>
+              <a:cs typeface="+mn-cs"/>
+            </a:endParaRPr>
+          </a:p>
+        </p:txBody>
+      </p:sp>
+      <p:sp>
+        <p:nvSpPr>
+          <p:cNvPr id="5" name="Text 3"/>
+          <p:cNvSpPr/>
+          <p:nvPr/>
+        </p:nvSpPr>
+        <p:spPr>
+          <a:xfrm>
+            <a:off x="513652" y="1024128"/>
+            <a:ext cx="8750808" cy="310896"/>
+          </a:xfrm>
+          <a:prstGeom prst="rect">
+            <a:avLst/>
+          </a:prstGeom>
+          <a:noFill/>
+          <a:ln/>
+        </p:spPr>
+        <p:txBody>
+          <a:bodyPr wrap="square" lIns="0" tIns="0" rIns="0" bIns="0" rtlCol="0" anchor="ctr"/>
+          <a:lstStyle/>
+          <a:p>
+            <a:pPr marL="0" marR="0" lvl="0" indent="0" algn="l" defTabSz="914400" rtl="0" eaLnBrk="1" fontAlgn="auto" latinLnBrk="0" hangingPunct="1">
+              <a:lnSpc>
+                <a:spcPct val="100000"/>
+              </a:lnSpc>
+              <a:spcBef>
+                <a:spcPts val="0"/>
+              </a:spcBef>
+              <a:spcAft>
+                <a:spcPts val="0"/>
+              </a:spcAft>
+              <a:buClrTx/>
+              <a:buSzTx/>
+              <a:buFontTx/>
+              <a:buNone/>
+              <a:tabLst/>
+              <a:defRPr/>
+            </a:pPr>
+            <a:r>
+              <a:rPr kumimoji="0" lang="en-US" sz="1400" b="1" i="0" u="none" strike="noStrike" kern="1200" cap="none" spc="0" normalizeH="0" baseline="0" noProof="0" dirty="0">
+                <a:ln>
+                  <a:noFill/>
+                </a:ln>
+                <a:solidFill>
+                  <a:srgbClr val="CFE9FF"/>
+                </a:solidFill>
+                <a:effectLst/>
+                <a:uLnTx/>
+                <a:uFillTx/>
+                <a:latin typeface="Calibri" pitchFamily="34" charset="0"/>
+                <a:ea typeface="Calibri" pitchFamily="34" charset="-122"/>
+                <a:cs typeface="Calibri" pitchFamily="34" charset="-120"/>
+              </a:rPr>
+              <a:t>LEGACY FLOW  </a:t>
+            </a:r>
+            <a:r>
+              <a:rPr kumimoji="0" lang="en-US" sz="1200" b="0" i="0" u="none" strike="noStrike" kern="1200" cap="none" spc="0" normalizeH="0" baseline="0" noProof="0" dirty="0">
+                <a:ln>
+                  <a:noFill/>
+                </a:ln>
+                <a:solidFill>
+                  <a:srgbClr val="6FC4F2"/>
+                </a:solidFill>
+                <a:effectLst/>
+                <a:uLnTx/>
+                <a:uFillTx/>
+                <a:latin typeface="Calibri" pitchFamily="34" charset="0"/>
+                <a:ea typeface="Calibri" pitchFamily="34" charset="-122"/>
+                <a:cs typeface="Calibri" pitchFamily="34" charset="-120"/>
+              </a:rPr>
+              <a:t>(Deterministic + Human Exception Queue)</a:t>
+            </a:r>
+            <a:endParaRPr kumimoji="0" lang="en-US" sz="1400" b="0" i="0" u="none" strike="noStrike" kern="1200" cap="none" spc="0" normalizeH="0" baseline="0" noProof="0" dirty="0">
+              <a:ln>
+                <a:noFill/>
+              </a:ln>
+              <a:solidFill>
+                <a:prstClr val="black"/>
+              </a:solidFill>
+              <a:effectLst/>
+              <a:uLnTx/>
+              <a:uFillTx/>
+              <a:latin typeface="Calibri" panose="020F0502020204030204"/>
+              <a:ea typeface="+mn-ea"/>
+              <a:cs typeface="+mn-cs"/>
+            </a:endParaRPr>
+          </a:p>
+        </p:txBody>
+      </p:sp>
+      <p:sp>
+        <p:nvSpPr>
+          <p:cNvPr id="6" name="Text 4"/>
+          <p:cNvSpPr/>
+          <p:nvPr/>
+        </p:nvSpPr>
+        <p:spPr>
+          <a:xfrm>
+            <a:off x="9191308" y="1024128"/>
+            <a:ext cx="2514600" cy="310896"/>
+          </a:xfrm>
+          <a:prstGeom prst="rect">
+            <a:avLst/>
+          </a:prstGeom>
+          <a:noFill/>
+          <a:ln/>
+        </p:spPr>
+        <p:txBody>
+          <a:bodyPr wrap="square" lIns="0" tIns="0" rIns="0" bIns="0" rtlCol="0" anchor="ctr"/>
+          <a:lstStyle/>
+          <a:p>
+            <a:pPr marL="0" marR="0" lvl="0" indent="0" algn="r" defTabSz="914400" rtl="0" eaLnBrk="1" fontAlgn="auto" latinLnBrk="0" hangingPunct="1">
+              <a:lnSpc>
+                <a:spcPct val="100000"/>
+              </a:lnSpc>
+              <a:spcBef>
+                <a:spcPts val="0"/>
+              </a:spcBef>
+              <a:spcAft>
+                <a:spcPts val="0"/>
+              </a:spcAft>
+              <a:buClrTx/>
+              <a:buSzTx/>
+              <a:buFontTx/>
+              <a:buNone/>
+              <a:tabLst/>
+              <a:defRPr/>
+            </a:pPr>
+            <a:r>
+              <a:rPr kumimoji="0" lang="en-US" sz="1200" b="0" i="1" u="none" strike="noStrike" kern="1200" cap="none" spc="0" normalizeH="0" baseline="0" noProof="0" dirty="0">
+                <a:ln>
+                  <a:noFill/>
+                </a:ln>
+                <a:solidFill>
+                  <a:srgbClr val="8FBBDD"/>
+                </a:solidFill>
+                <a:effectLst/>
+                <a:uLnTx/>
+                <a:uFillTx/>
+                <a:latin typeface="Calibri" panose="020F0502020204030204"/>
+                <a:ea typeface="+mn-ea"/>
+                <a:cs typeface="+mn-cs"/>
+              </a:rPr>
+              <a:t>Throughput | Quality</a:t>
+            </a:r>
+            <a:endParaRPr kumimoji="0" lang="en-US" sz="1200" b="0" i="0" u="none" strike="noStrike" kern="1200" cap="none" spc="0" normalizeH="0" baseline="0" noProof="0" dirty="0">
+              <a:ln>
+                <a:noFill/>
+              </a:ln>
+              <a:solidFill>
+                <a:prstClr val="black"/>
+              </a:solidFill>
+              <a:effectLst/>
+              <a:uLnTx/>
+              <a:uFillTx/>
+              <a:latin typeface="Calibri" panose="020F0502020204030204"/>
+              <a:ea typeface="+mn-ea"/>
+              <a:cs typeface="+mn-cs"/>
+            </a:endParaRPr>
+          </a:p>
+        </p:txBody>
+      </p:sp>
+      <p:pic>
+        <p:nvPicPr>
+          <p:cNvPr id="7" name="Image 0" descr="/home/claude/icon_input.png"/>
+          <p:cNvPicPr>
+            <a:picLocks noChangeAspect="1"/>
+          </p:cNvPicPr>
+          <p:nvPr/>
+        </p:nvPicPr>
+        <p:blipFill>
+          <a:blip r:embed="rId4"/>
+          <a:stretch>
+            <a:fillRect/>
+          </a:stretch>
+        </p:blipFill>
+        <p:spPr>
+          <a:xfrm>
+            <a:off x="504508" y="1874520"/>
+            <a:ext cx="548640" cy="548640"/>
+          </a:xfrm>
+          <a:prstGeom prst="rect">
+            <a:avLst/>
+          </a:prstGeom>
+        </p:spPr>
+      </p:pic>
+      <p:sp>
+        <p:nvSpPr>
+          <p:cNvPr id="8" name="Text 5"/>
+          <p:cNvSpPr/>
+          <p:nvPr/>
+        </p:nvSpPr>
+        <p:spPr>
+          <a:xfrm>
+            <a:off x="138748" y="2441448"/>
+            <a:ext cx="1280160" cy="384048"/>
+          </a:xfrm>
+          <a:prstGeom prst="rect">
+            <a:avLst/>
+          </a:prstGeom>
+          <a:noFill/>
+          <a:ln/>
+        </p:spPr>
+        <p:txBody>
+          <a:bodyPr wrap="square" lIns="0" tIns="0" rIns="0" bIns="0" rtlCol="0" anchor="t"/>
+          <a:lstStyle/>
+          <a:p>
+            <a:pPr marL="0" marR="0" lvl="0" indent="0" algn="ctr" defTabSz="914400" rtl="0" eaLnBrk="1" fontAlgn="auto" latinLnBrk="0" hangingPunct="1">
+              <a:lnSpc>
+                <a:spcPct val="90000"/>
+              </a:lnSpc>
+              <a:spcBef>
+                <a:spcPts val="0"/>
+              </a:spcBef>
+              <a:spcAft>
+                <a:spcPts val="0"/>
+              </a:spcAft>
+              <a:buClrTx/>
+              <a:buSzTx/>
+              <a:buFontTx/>
+              <a:buNone/>
+              <a:tabLst/>
+              <a:defRPr/>
+            </a:pPr>
+            <a:r>
+              <a:rPr kumimoji="0" lang="en-US" sz="1050" b="1" i="0" u="none" strike="noStrike" kern="1200" cap="none" spc="0" normalizeH="0" baseline="0" noProof="0" dirty="0">
+                <a:ln>
+                  <a:noFill/>
+                </a:ln>
+                <a:solidFill>
+                  <a:srgbClr val="EAF4FF"/>
+                </a:solidFill>
+                <a:effectLst/>
+                <a:uLnTx/>
+                <a:uFillTx/>
+                <a:latin typeface="Calibri" pitchFamily="34" charset="0"/>
+                <a:ea typeface="Calibri" pitchFamily="34" charset="-122"/>
+                <a:cs typeface="Calibri" pitchFamily="34" charset="-120"/>
+              </a:rPr>
+              <a:t>INPUT DATA</a:t>
+            </a:r>
+            <a:endParaRPr kumimoji="0" lang="en-US" sz="1050" b="0" i="0" u="none" strike="noStrike" kern="1200" cap="none" spc="0" normalizeH="0" baseline="0" noProof="0" dirty="0">
+              <a:ln>
+                <a:noFill/>
+              </a:ln>
+              <a:solidFill>
+                <a:prstClr val="black"/>
+              </a:solidFill>
+              <a:effectLst/>
+              <a:uLnTx/>
+              <a:uFillTx/>
+              <a:latin typeface="Calibri" panose="020F0502020204030204"/>
+              <a:ea typeface="+mn-ea"/>
+              <a:cs typeface="+mn-cs"/>
+            </a:endParaRPr>
+          </a:p>
+        </p:txBody>
+      </p:sp>
+      <p:sp>
+        <p:nvSpPr>
+          <p:cNvPr id="9" name="Shape 6"/>
+          <p:cNvSpPr/>
+          <p:nvPr/>
+        </p:nvSpPr>
+        <p:spPr>
+          <a:xfrm>
+            <a:off x="1327468" y="2258568"/>
+            <a:ext cx="329184" cy="237744"/>
+          </a:xfrm>
+          <a:prstGeom prst="rightArrow">
+            <a:avLst/>
+          </a:prstGeom>
+          <a:solidFill>
+            <a:srgbClr val="4FA8E0"/>
+          </a:solidFill>
+          <a:ln/>
+        </p:spPr>
+        <p:txBody>
+          <a:bodyPr/>
+          <a:lstStyle/>
+          <a:p>
+            <a:pPr marL="0" marR="0" lvl="0" indent="0" algn="l" defTabSz="914400" rtl="0" eaLnBrk="1" fontAlgn="auto" latinLnBrk="0" hangingPunct="1">
+              <a:lnSpc>
+                <a:spcPct val="100000"/>
+              </a:lnSpc>
+              <a:spcBef>
+                <a:spcPts val="0"/>
+              </a:spcBef>
+              <a:spcAft>
+                <a:spcPts val="0"/>
+              </a:spcAft>
+              <a:buClrTx/>
+              <a:buSzTx/>
+              <a:buFontTx/>
+              <a:buNone/>
+              <a:tabLst/>
+              <a:defRPr/>
+            </a:pPr>
+            <a:endParaRPr kumimoji="0" lang="en-US" sz="1800" b="0" i="0" u="none" strike="noStrike" kern="1200" cap="none" spc="0" normalizeH="0" baseline="0" noProof="0">
+              <a:ln>
+                <a:noFill/>
+              </a:ln>
+              <a:solidFill>
+                <a:prstClr val="black"/>
+              </a:solidFill>
+              <a:effectLst/>
+              <a:uLnTx/>
+              <a:uFillTx/>
+              <a:latin typeface="Calibri" panose="020F0502020204030204"/>
+              <a:ea typeface="+mn-ea"/>
+              <a:cs typeface="+mn-cs"/>
+            </a:endParaRPr>
+          </a:p>
+        </p:txBody>
+      </p:sp>
+      <p:sp>
+        <p:nvSpPr>
+          <p:cNvPr id="10" name="Shape 7"/>
+          <p:cNvSpPr/>
+          <p:nvPr/>
+        </p:nvSpPr>
+        <p:spPr>
+          <a:xfrm>
+            <a:off x="1738948" y="1920240"/>
+            <a:ext cx="1572768" cy="914400"/>
+          </a:xfrm>
+          <a:prstGeom prst="roundRect">
+            <a:avLst>
+              <a:gd name="adj" fmla="val 7000"/>
+            </a:avLst>
+          </a:prstGeom>
+          <a:solidFill>
+            <a:srgbClr val="0F2A4E"/>
+          </a:solidFill>
+          <a:ln w="19050">
+            <a:solidFill>
+              <a:srgbClr val="5BB9EE"/>
+            </a:solidFill>
+            <a:prstDash val="solid"/>
+          </a:ln>
+          <a:effectLst>
+            <a:outerShdw blurRad="114300" dist="50800" dir="16200000" algn="bl" rotWithShape="0">
+              <a:srgbClr val="2E86C8">
+                <a:alpha val="55000"/>
+              </a:srgbClr>
+            </a:outerShdw>
+          </a:effectLst>
+        </p:spPr>
+        <p:txBody>
+          <a:bodyPr/>
+          <a:lstStyle/>
+          <a:p>
+            <a:pPr marL="0" marR="0" lvl="0" indent="0" algn="l" defTabSz="914400" rtl="0" eaLnBrk="1" fontAlgn="auto" latinLnBrk="0" hangingPunct="1">
+              <a:lnSpc>
+                <a:spcPct val="100000"/>
+              </a:lnSpc>
+              <a:spcBef>
+                <a:spcPts val="0"/>
+              </a:spcBef>
+              <a:spcAft>
+                <a:spcPts val="0"/>
+              </a:spcAft>
+              <a:buClrTx/>
+              <a:buSzTx/>
+              <a:buFontTx/>
+              <a:buNone/>
+              <a:tabLst/>
+              <a:defRPr/>
+            </a:pPr>
+            <a:endParaRPr kumimoji="0" lang="en-US" sz="1800" b="0" i="0" u="none" strike="noStrike" kern="1200" cap="none" spc="0" normalizeH="0" baseline="0" noProof="0">
+              <a:ln>
+                <a:noFill/>
+              </a:ln>
+              <a:solidFill>
+                <a:prstClr val="black"/>
+              </a:solidFill>
+              <a:effectLst/>
+              <a:uLnTx/>
+              <a:uFillTx/>
+              <a:latin typeface="Calibri" panose="020F0502020204030204"/>
+              <a:ea typeface="+mn-ea"/>
+              <a:cs typeface="+mn-cs"/>
+            </a:endParaRPr>
+          </a:p>
+        </p:txBody>
+      </p:sp>
+      <p:pic>
+        <p:nvPicPr>
+          <p:cNvPr id="11" name="Image 1" descr="/home/claude/icon_code.png"/>
+          <p:cNvPicPr>
+            <a:picLocks noChangeAspect="1"/>
+          </p:cNvPicPr>
+          <p:nvPr/>
+        </p:nvPicPr>
+        <p:blipFill>
+          <a:blip r:embed="rId5"/>
+          <a:stretch>
+            <a:fillRect/>
+          </a:stretch>
+        </p:blipFill>
+        <p:spPr>
+          <a:xfrm>
+            <a:off x="1857820" y="2148840"/>
+            <a:ext cx="457200" cy="457200"/>
+          </a:xfrm>
+          <a:prstGeom prst="rect">
+            <a:avLst/>
+          </a:prstGeom>
+        </p:spPr>
+      </p:pic>
+      <p:sp>
+        <p:nvSpPr>
+          <p:cNvPr id="12" name="Text 8"/>
+          <p:cNvSpPr/>
+          <p:nvPr/>
+        </p:nvSpPr>
+        <p:spPr>
+          <a:xfrm>
+            <a:off x="2360740" y="1920240"/>
+            <a:ext cx="914400" cy="914400"/>
+          </a:xfrm>
+          <a:prstGeom prst="rect">
+            <a:avLst/>
+          </a:prstGeom>
+          <a:noFill/>
+          <a:ln/>
+        </p:spPr>
+        <p:txBody>
+          <a:bodyPr wrap="square" lIns="25400" tIns="25400" rIns="25400" bIns="25400" rtlCol="0" anchor="ctr"/>
+          <a:lstStyle/>
+          <a:p>
+            <a:pPr marL="0" marR="0" lvl="0" indent="0" algn="l" defTabSz="914400" rtl="0" eaLnBrk="1" fontAlgn="auto" latinLnBrk="0" hangingPunct="1">
+              <a:lnSpc>
+                <a:spcPct val="90000"/>
+              </a:lnSpc>
+              <a:spcBef>
+                <a:spcPts val="0"/>
+              </a:spcBef>
+              <a:spcAft>
+                <a:spcPts val="0"/>
+              </a:spcAft>
+              <a:buClrTx/>
+              <a:buSzTx/>
+              <a:buFontTx/>
+              <a:buNone/>
+              <a:tabLst/>
+              <a:defRPr/>
+            </a:pPr>
+            <a:r>
+              <a:rPr kumimoji="0" lang="en-US" sz="1050" b="1" i="0" u="none" strike="noStrike" kern="1200" cap="none" spc="0" normalizeH="0" baseline="0" noProof="0" dirty="0">
+                <a:ln>
+                  <a:noFill/>
+                </a:ln>
+                <a:solidFill>
+                  <a:srgbClr val="EAF4FF"/>
+                </a:solidFill>
+                <a:effectLst/>
+                <a:uLnTx/>
+                <a:uFillTx/>
+                <a:latin typeface="Calibri" pitchFamily="34" charset="0"/>
+                <a:ea typeface="Calibri" pitchFamily="34" charset="-122"/>
+                <a:cs typeface="Calibri" pitchFamily="34" charset="-120"/>
+              </a:rPr>
+              <a:t>BUSINESS RULE ENGINE</a:t>
+            </a:r>
+            <a:endParaRPr kumimoji="0" lang="en-US" sz="1050" b="0" i="0" u="none" strike="noStrike" kern="1200" cap="none" spc="0" normalizeH="0" baseline="0" noProof="0" dirty="0">
+              <a:ln>
+                <a:noFill/>
+              </a:ln>
+              <a:solidFill>
+                <a:prstClr val="black"/>
+              </a:solidFill>
+              <a:effectLst/>
+              <a:uLnTx/>
+              <a:uFillTx/>
+              <a:latin typeface="Calibri" panose="020F0502020204030204"/>
+              <a:ea typeface="+mn-ea"/>
+              <a:cs typeface="+mn-cs"/>
+            </a:endParaRPr>
+          </a:p>
+        </p:txBody>
+      </p:sp>
+      <p:sp>
+        <p:nvSpPr>
+          <p:cNvPr id="13" name="Shape 9"/>
+          <p:cNvSpPr/>
+          <p:nvPr/>
+        </p:nvSpPr>
+        <p:spPr>
+          <a:xfrm>
+            <a:off x="3348292" y="2258568"/>
+            <a:ext cx="2123186" cy="237744"/>
+          </a:xfrm>
+          <a:prstGeom prst="rightArrow">
+            <a:avLst/>
+          </a:prstGeom>
+          <a:solidFill>
+            <a:srgbClr val="4FA8E0"/>
+          </a:solidFill>
+          <a:ln/>
+        </p:spPr>
+        <p:txBody>
+          <a:bodyPr/>
+          <a:lstStyle/>
+          <a:p>
+            <a:pPr marL="0" marR="0" lvl="0" indent="0" algn="l" defTabSz="914400" rtl="0" eaLnBrk="1" fontAlgn="auto" latinLnBrk="0" hangingPunct="1">
+              <a:lnSpc>
+                <a:spcPct val="100000"/>
+              </a:lnSpc>
+              <a:spcBef>
+                <a:spcPts val="0"/>
+              </a:spcBef>
+              <a:spcAft>
+                <a:spcPts val="0"/>
+              </a:spcAft>
+              <a:buClrTx/>
+              <a:buSzTx/>
+              <a:buFontTx/>
+              <a:buNone/>
+              <a:tabLst/>
+              <a:defRPr/>
+            </a:pPr>
+            <a:endParaRPr kumimoji="0" lang="en-US" sz="1800" b="0" i="0" u="none" strike="noStrike" kern="1200" cap="none" spc="0" normalizeH="0" baseline="0" noProof="0">
+              <a:ln>
+                <a:noFill/>
+              </a:ln>
+              <a:solidFill>
+                <a:prstClr val="black"/>
+              </a:solidFill>
+              <a:effectLst/>
+              <a:uLnTx/>
+              <a:uFillTx/>
+              <a:latin typeface="Calibri" panose="020F0502020204030204"/>
+              <a:ea typeface="+mn-ea"/>
+              <a:cs typeface="+mn-cs"/>
+            </a:endParaRPr>
+          </a:p>
+        </p:txBody>
+      </p:sp>
+      <p:sp>
+        <p:nvSpPr>
+          <p:cNvPr id="17" name="Shape 13"/>
+          <p:cNvSpPr/>
+          <p:nvPr/>
+        </p:nvSpPr>
+        <p:spPr>
+          <a:xfrm rot="5400000">
+            <a:off x="6073204" y="1211580"/>
+            <a:ext cx="1207008" cy="2331720"/>
+          </a:xfrm>
+          <a:prstGeom prst="trapezoid">
+            <a:avLst/>
+          </a:prstGeom>
+          <a:solidFill>
+            <a:srgbClr val="0F2A4E">
+              <a:alpha val="85000"/>
+            </a:srgbClr>
+          </a:solidFill>
+          <a:ln w="19050">
+            <a:solidFill>
+              <a:srgbClr val="5BB9EE"/>
+            </a:solidFill>
+            <a:prstDash val="solid"/>
+          </a:ln>
+          <a:effectLst>
+            <a:outerShdw blurRad="114300" dist="50800" dir="16200000" algn="bl" rotWithShape="0">
+              <a:srgbClr val="2E86C8">
+                <a:alpha val="55000"/>
+              </a:srgbClr>
+            </a:outerShdw>
+          </a:effectLst>
+        </p:spPr>
+        <p:txBody>
+          <a:bodyPr/>
+          <a:lstStyle/>
+          <a:p>
+            <a:pPr marL="0" marR="0" lvl="0" indent="0" algn="l" defTabSz="914400" rtl="0" eaLnBrk="1" fontAlgn="auto" latinLnBrk="0" hangingPunct="1">
+              <a:lnSpc>
+                <a:spcPct val="100000"/>
+              </a:lnSpc>
+              <a:spcBef>
+                <a:spcPts val="0"/>
+              </a:spcBef>
+              <a:spcAft>
+                <a:spcPts val="0"/>
+              </a:spcAft>
+              <a:buClrTx/>
+              <a:buSzTx/>
+              <a:buFontTx/>
+              <a:buNone/>
+              <a:tabLst/>
+              <a:defRPr/>
+            </a:pPr>
+            <a:endParaRPr kumimoji="0" lang="en-US" sz="1800" b="0" i="0" u="none" strike="noStrike" kern="1200" cap="none" spc="0" normalizeH="0" baseline="0" noProof="0">
+              <a:ln>
+                <a:noFill/>
+              </a:ln>
+              <a:solidFill>
+                <a:prstClr val="black"/>
+              </a:solidFill>
+              <a:effectLst/>
+              <a:uLnTx/>
+              <a:uFillTx/>
+              <a:latin typeface="Calibri" panose="020F0502020204030204"/>
+              <a:ea typeface="+mn-ea"/>
+              <a:cs typeface="+mn-cs"/>
+            </a:endParaRPr>
+          </a:p>
+        </p:txBody>
+      </p:sp>
+      <p:pic>
+        <p:nvPicPr>
+          <p:cNvPr id="18" name="Image 2" descr="/home/claude/icon_users.png"/>
+          <p:cNvPicPr>
+            <a:picLocks noChangeAspect="1"/>
+          </p:cNvPicPr>
+          <p:nvPr/>
+        </p:nvPicPr>
+        <p:blipFill>
+          <a:blip r:embed="rId6"/>
+          <a:stretch>
+            <a:fillRect/>
+          </a:stretch>
+        </p:blipFill>
+        <p:spPr>
+          <a:xfrm>
+            <a:off x="5808028" y="2157984"/>
+            <a:ext cx="402336" cy="402336"/>
+          </a:xfrm>
+          <a:prstGeom prst="rect">
+            <a:avLst/>
+          </a:prstGeom>
+        </p:spPr>
+      </p:pic>
+      <p:pic>
+        <p:nvPicPr>
+          <p:cNvPr id="19" name="Image 3" descr="/home/claude/icon_warn.png"/>
+          <p:cNvPicPr>
+            <a:picLocks noChangeAspect="1"/>
+          </p:cNvPicPr>
+          <p:nvPr/>
+        </p:nvPicPr>
+        <p:blipFill>
+          <a:blip r:embed="rId7"/>
+          <a:stretch>
+            <a:fillRect/>
+          </a:stretch>
+        </p:blipFill>
+        <p:spPr>
+          <a:xfrm>
+            <a:off x="5872036" y="2523744"/>
+            <a:ext cx="256032" cy="256032"/>
+          </a:xfrm>
+          <a:prstGeom prst="rect">
+            <a:avLst/>
+          </a:prstGeom>
+        </p:spPr>
+      </p:pic>
+      <p:sp>
+        <p:nvSpPr>
+          <p:cNvPr id="20" name="Text 14"/>
+          <p:cNvSpPr/>
+          <p:nvPr/>
+        </p:nvSpPr>
+        <p:spPr>
+          <a:xfrm>
+            <a:off x="6265228" y="1874520"/>
+            <a:ext cx="1554480" cy="1005840"/>
+          </a:xfrm>
+          <a:prstGeom prst="rect">
+            <a:avLst/>
+          </a:prstGeom>
+          <a:noFill/>
+          <a:ln/>
+        </p:spPr>
+        <p:txBody>
+          <a:bodyPr wrap="square" lIns="0" tIns="0" rIns="0" bIns="0" rtlCol="0" anchor="ctr"/>
+          <a:lstStyle/>
+          <a:p>
+            <a:pPr marL="0" marR="0" lvl="0" indent="0" algn="l" defTabSz="914400" rtl="0" eaLnBrk="1" fontAlgn="auto" latinLnBrk="0" hangingPunct="1">
+              <a:lnSpc>
+                <a:spcPct val="90000"/>
+              </a:lnSpc>
+              <a:spcBef>
+                <a:spcPts val="0"/>
+              </a:spcBef>
+              <a:spcAft>
+                <a:spcPts val="0"/>
+              </a:spcAft>
+              <a:buClrTx/>
+              <a:buSzTx/>
+              <a:buFontTx/>
+              <a:buNone/>
+              <a:tabLst/>
+              <a:defRPr/>
+            </a:pPr>
+            <a:r>
+              <a:rPr kumimoji="0" lang="en-US" sz="1000" b="1" i="0" u="none" strike="noStrike" kern="1200" cap="none" spc="0" normalizeH="0" baseline="0" noProof="0" dirty="0">
+                <a:ln>
+                  <a:noFill/>
+                </a:ln>
+                <a:solidFill>
+                  <a:srgbClr val="EAF4FF"/>
+                </a:solidFill>
+                <a:effectLst/>
+                <a:uLnTx/>
+                <a:uFillTx/>
+                <a:latin typeface="Calibri" pitchFamily="34" charset="0"/>
+                <a:ea typeface="Calibri" pitchFamily="34" charset="-122"/>
+                <a:cs typeface="Calibri" pitchFamily="34" charset="-120"/>
+              </a:rPr>
+              <a:t>HUMAN EXCEPTION</a:t>
+            </a:r>
+            <a:endParaRPr kumimoji="0" lang="en-US" sz="1000" b="0" i="0" u="none" strike="noStrike" kern="1200" cap="none" spc="0" normalizeH="0" baseline="0" noProof="0" dirty="0">
+              <a:ln>
+                <a:noFill/>
+              </a:ln>
+              <a:solidFill>
+                <a:prstClr val="black"/>
+              </a:solidFill>
+              <a:effectLst/>
+              <a:uLnTx/>
+              <a:uFillTx/>
+              <a:latin typeface="Calibri" panose="020F0502020204030204"/>
+              <a:ea typeface="+mn-ea"/>
+              <a:cs typeface="+mn-cs"/>
+            </a:endParaRPr>
+          </a:p>
+          <a:p>
+            <a:pPr marL="0" marR="0" lvl="0" indent="0" algn="l" defTabSz="914400" rtl="0" eaLnBrk="1" fontAlgn="auto" latinLnBrk="0" hangingPunct="1">
+              <a:lnSpc>
+                <a:spcPct val="90000"/>
+              </a:lnSpc>
+              <a:spcBef>
+                <a:spcPts val="0"/>
+              </a:spcBef>
+              <a:spcAft>
+                <a:spcPts val="0"/>
+              </a:spcAft>
+              <a:buClrTx/>
+              <a:buSzTx/>
+              <a:buFontTx/>
+              <a:buNone/>
+              <a:tabLst/>
+              <a:defRPr/>
+            </a:pPr>
+            <a:r>
+              <a:rPr kumimoji="0" lang="en-US" sz="1000" b="1" i="0" u="none" strike="noStrike" kern="1200" cap="none" spc="0" normalizeH="0" baseline="0" noProof="0" dirty="0">
+                <a:ln>
+                  <a:noFill/>
+                </a:ln>
+                <a:solidFill>
+                  <a:srgbClr val="EAF4FF"/>
+                </a:solidFill>
+                <a:effectLst/>
+                <a:uLnTx/>
+                <a:uFillTx/>
+                <a:latin typeface="Calibri" pitchFamily="34" charset="0"/>
+                <a:ea typeface="Calibri" pitchFamily="34" charset="-122"/>
+                <a:cs typeface="Calibri" pitchFamily="34" charset="-120"/>
+              </a:rPr>
+              <a:t>QUEUE</a:t>
+            </a:r>
+            <a:endParaRPr kumimoji="0" lang="en-US" sz="1000" b="0" i="0" u="none" strike="noStrike" kern="1200" cap="none" spc="0" normalizeH="0" baseline="0" noProof="0" dirty="0">
+              <a:ln>
+                <a:noFill/>
+              </a:ln>
+              <a:solidFill>
+                <a:prstClr val="black"/>
+              </a:solidFill>
+              <a:effectLst/>
+              <a:uLnTx/>
+              <a:uFillTx/>
+              <a:latin typeface="Calibri" panose="020F0502020204030204"/>
+              <a:ea typeface="+mn-ea"/>
+              <a:cs typeface="+mn-cs"/>
+            </a:endParaRPr>
+          </a:p>
+        </p:txBody>
+      </p:sp>
+      <p:sp>
+        <p:nvSpPr>
+          <p:cNvPr id="21" name="Shape 15"/>
+          <p:cNvSpPr/>
+          <p:nvPr/>
+        </p:nvSpPr>
+        <p:spPr>
+          <a:xfrm>
+            <a:off x="7883716" y="2258568"/>
+            <a:ext cx="310896" cy="237744"/>
+          </a:xfrm>
+          <a:prstGeom prst="rightArrow">
+            <a:avLst/>
+          </a:prstGeom>
+          <a:solidFill>
+            <a:srgbClr val="4FA8E0"/>
+          </a:solidFill>
+          <a:ln/>
+        </p:spPr>
+        <p:txBody>
+          <a:bodyPr/>
+          <a:lstStyle/>
+          <a:p>
+            <a:pPr marL="0" marR="0" lvl="0" indent="0" algn="l" defTabSz="914400" rtl="0" eaLnBrk="1" fontAlgn="auto" latinLnBrk="0" hangingPunct="1">
+              <a:lnSpc>
+                <a:spcPct val="100000"/>
+              </a:lnSpc>
+              <a:spcBef>
+                <a:spcPts val="0"/>
+              </a:spcBef>
+              <a:spcAft>
+                <a:spcPts val="0"/>
+              </a:spcAft>
+              <a:buClrTx/>
+              <a:buSzTx/>
+              <a:buFontTx/>
+              <a:buNone/>
+              <a:tabLst/>
+              <a:defRPr/>
+            </a:pPr>
+            <a:endParaRPr kumimoji="0" lang="en-US" sz="1800" b="0" i="0" u="none" strike="noStrike" kern="1200" cap="none" spc="0" normalizeH="0" baseline="0" noProof="0">
+              <a:ln>
+                <a:noFill/>
+              </a:ln>
+              <a:solidFill>
+                <a:prstClr val="black"/>
+              </a:solidFill>
+              <a:effectLst/>
+              <a:uLnTx/>
+              <a:uFillTx/>
+              <a:latin typeface="Calibri" panose="020F0502020204030204"/>
+              <a:ea typeface="+mn-ea"/>
+              <a:cs typeface="+mn-cs"/>
+            </a:endParaRPr>
+          </a:p>
+        </p:txBody>
+      </p:sp>
+      <p:sp>
+        <p:nvSpPr>
+          <p:cNvPr id="22" name="Shape 16"/>
+          <p:cNvSpPr/>
+          <p:nvPr/>
+        </p:nvSpPr>
+        <p:spPr>
+          <a:xfrm>
+            <a:off x="8249476" y="1920240"/>
+            <a:ext cx="2377440" cy="914400"/>
+          </a:xfrm>
+          <a:prstGeom prst="roundRect">
+            <a:avLst>
+              <a:gd name="adj" fmla="val 7000"/>
+            </a:avLst>
+          </a:prstGeom>
+          <a:solidFill>
+            <a:srgbClr val="0F2A4E"/>
+          </a:solidFill>
+          <a:ln w="19050">
+            <a:solidFill>
+              <a:srgbClr val="5BB9EE"/>
+            </a:solidFill>
+            <a:prstDash val="solid"/>
+          </a:ln>
+          <a:effectLst>
+            <a:outerShdw blurRad="114300" dist="50800" dir="16200000" algn="bl" rotWithShape="0">
+              <a:srgbClr val="2E86C8">
+                <a:alpha val="55000"/>
+              </a:srgbClr>
+            </a:outerShdw>
+          </a:effectLst>
+        </p:spPr>
+        <p:txBody>
+          <a:bodyPr/>
+          <a:lstStyle/>
+          <a:p>
+            <a:pPr marL="0" marR="0" lvl="0" indent="0" algn="l" defTabSz="914400" rtl="0" eaLnBrk="1" fontAlgn="auto" latinLnBrk="0" hangingPunct="1">
+              <a:lnSpc>
+                <a:spcPct val="100000"/>
+              </a:lnSpc>
+              <a:spcBef>
+                <a:spcPts val="0"/>
+              </a:spcBef>
+              <a:spcAft>
+                <a:spcPts val="0"/>
+              </a:spcAft>
+              <a:buClrTx/>
+              <a:buSzTx/>
+              <a:buFontTx/>
+              <a:buNone/>
+              <a:tabLst/>
+              <a:defRPr/>
+            </a:pPr>
+            <a:endParaRPr kumimoji="0" lang="en-US" sz="1800" b="0" i="0" u="none" strike="noStrike" kern="1200" cap="none" spc="0" normalizeH="0" baseline="0" noProof="0">
+              <a:ln>
+                <a:noFill/>
+              </a:ln>
+              <a:solidFill>
+                <a:prstClr val="black"/>
+              </a:solidFill>
+              <a:effectLst/>
+              <a:uLnTx/>
+              <a:uFillTx/>
+              <a:latin typeface="Calibri" panose="020F0502020204030204"/>
+              <a:ea typeface="+mn-ea"/>
+              <a:cs typeface="+mn-cs"/>
+            </a:endParaRPr>
+          </a:p>
+        </p:txBody>
+      </p:sp>
+      <p:pic>
+        <p:nvPicPr>
+          <p:cNvPr id="23" name="Image 4" descr="/home/claude/icon_human.png"/>
+          <p:cNvPicPr>
+            <a:picLocks noChangeAspect="1"/>
+          </p:cNvPicPr>
+          <p:nvPr/>
+        </p:nvPicPr>
+        <p:blipFill>
+          <a:blip r:embed="rId8"/>
+          <a:stretch>
+            <a:fillRect/>
+          </a:stretch>
+        </p:blipFill>
+        <p:spPr>
+          <a:xfrm>
+            <a:off x="8368348" y="2148840"/>
+            <a:ext cx="457200" cy="457200"/>
+          </a:xfrm>
+          <a:prstGeom prst="rect">
+            <a:avLst/>
+          </a:prstGeom>
+        </p:spPr>
+      </p:pic>
+      <p:sp>
+        <p:nvSpPr>
+          <p:cNvPr id="24" name="Text 17"/>
+          <p:cNvSpPr/>
+          <p:nvPr/>
+        </p:nvSpPr>
+        <p:spPr>
+          <a:xfrm>
+            <a:off x="8871268" y="1920240"/>
+            <a:ext cx="1719072" cy="914400"/>
+          </a:xfrm>
+          <a:prstGeom prst="rect">
+            <a:avLst/>
+          </a:prstGeom>
+          <a:noFill/>
+          <a:ln/>
+        </p:spPr>
+        <p:txBody>
+          <a:bodyPr wrap="square" lIns="25400" tIns="25400" rIns="25400" bIns="25400" rtlCol="0" anchor="ctr"/>
+          <a:lstStyle/>
+          <a:p>
+            <a:pPr marL="0" marR="0" lvl="0" indent="0" algn="l" defTabSz="914400" rtl="0" eaLnBrk="1" fontAlgn="auto" latinLnBrk="0" hangingPunct="1">
+              <a:lnSpc>
+                <a:spcPct val="90000"/>
+              </a:lnSpc>
+              <a:spcBef>
+                <a:spcPts val="0"/>
+              </a:spcBef>
+              <a:spcAft>
+                <a:spcPts val="0"/>
+              </a:spcAft>
+              <a:buClrTx/>
+              <a:buSzTx/>
+              <a:buFontTx/>
+              <a:buNone/>
+              <a:tabLst/>
+              <a:defRPr/>
+            </a:pPr>
+            <a:r>
+              <a:rPr kumimoji="0" lang="en-US" sz="1100" b="1" i="0" u="none" strike="noStrike" kern="1200" cap="none" spc="0" normalizeH="0" baseline="0" noProof="0" dirty="0">
+                <a:ln>
+                  <a:noFill/>
+                </a:ln>
+                <a:solidFill>
+                  <a:srgbClr val="EAF4FF"/>
+                </a:solidFill>
+                <a:effectLst/>
+                <a:uLnTx/>
+                <a:uFillTx/>
+                <a:latin typeface="Calibri" pitchFamily="34" charset="0"/>
+                <a:ea typeface="Calibri" pitchFamily="34" charset="-122"/>
+                <a:cs typeface="Calibri" pitchFamily="34" charset="-120"/>
+              </a:rPr>
+              <a:t>HUMAN MANUAL PROCESSING</a:t>
+            </a:r>
+            <a:endParaRPr kumimoji="0" lang="en-US" sz="1100" b="0" i="0" u="none" strike="noStrike" kern="1200" cap="none" spc="0" normalizeH="0" baseline="0" noProof="0" dirty="0">
+              <a:ln>
+                <a:noFill/>
+              </a:ln>
+              <a:solidFill>
+                <a:prstClr val="black"/>
+              </a:solidFill>
+              <a:effectLst/>
+              <a:uLnTx/>
+              <a:uFillTx/>
+              <a:latin typeface="Calibri" panose="020F0502020204030204"/>
+              <a:ea typeface="+mn-ea"/>
+              <a:cs typeface="+mn-cs"/>
+            </a:endParaRPr>
+          </a:p>
+        </p:txBody>
+      </p:sp>
+      <p:sp>
+        <p:nvSpPr>
+          <p:cNvPr id="25" name="Shape 18"/>
+          <p:cNvSpPr/>
+          <p:nvPr/>
+        </p:nvSpPr>
+        <p:spPr>
+          <a:xfrm>
+            <a:off x="2518352" y="2871216"/>
+            <a:ext cx="0" cy="329184"/>
+          </a:xfrm>
+          <a:prstGeom prst="line">
+            <a:avLst/>
+          </a:prstGeom>
+          <a:noFill/>
+          <a:ln w="19050">
+            <a:solidFill>
+              <a:srgbClr val="4FA8E0"/>
+            </a:solidFill>
+            <a:prstDash val="solid"/>
+          </a:ln>
+        </p:spPr>
+        <p:txBody>
+          <a:bodyPr/>
+          <a:lstStyle/>
+          <a:p>
+            <a:pPr marL="0" marR="0" lvl="0" indent="0" algn="l" defTabSz="914400" rtl="0" eaLnBrk="1" fontAlgn="auto" latinLnBrk="0" hangingPunct="1">
+              <a:lnSpc>
+                <a:spcPct val="100000"/>
+              </a:lnSpc>
+              <a:spcBef>
+                <a:spcPts val="0"/>
+              </a:spcBef>
+              <a:spcAft>
+                <a:spcPts val="0"/>
+              </a:spcAft>
+              <a:buClrTx/>
+              <a:buSzTx/>
+              <a:buFontTx/>
+              <a:buNone/>
+              <a:tabLst/>
+              <a:defRPr/>
+            </a:pPr>
+            <a:endParaRPr kumimoji="0" lang="en-US" sz="1800" b="0" i="0" u="none" strike="noStrike" kern="1200" cap="none" spc="0" normalizeH="0" baseline="0" noProof="0">
+              <a:ln>
+                <a:noFill/>
+              </a:ln>
+              <a:solidFill>
+                <a:prstClr val="black"/>
+              </a:solidFill>
+              <a:effectLst/>
+              <a:uLnTx/>
+              <a:uFillTx/>
+              <a:latin typeface="Calibri" panose="020F0502020204030204"/>
+              <a:ea typeface="+mn-ea"/>
+              <a:cs typeface="+mn-cs"/>
+            </a:endParaRPr>
+          </a:p>
+        </p:txBody>
+      </p:sp>
+      <p:sp>
+        <p:nvSpPr>
+          <p:cNvPr id="29" name="Text 21"/>
+          <p:cNvSpPr/>
+          <p:nvPr/>
+        </p:nvSpPr>
+        <p:spPr>
+          <a:xfrm>
+            <a:off x="8798116" y="2926080"/>
+            <a:ext cx="1792224" cy="566928"/>
+          </a:xfrm>
+          <a:prstGeom prst="rect">
+            <a:avLst/>
+          </a:prstGeom>
+          <a:noFill/>
+          <a:ln/>
+        </p:spPr>
+        <p:txBody>
+          <a:bodyPr wrap="square" lIns="25400" tIns="25400" rIns="25400" bIns="25400" rtlCol="0" anchor="ctr"/>
+          <a:lstStyle/>
+          <a:p>
+            <a:pPr marL="0" marR="0" lvl="0" indent="0" algn="l" defTabSz="914400" rtl="0" eaLnBrk="1" fontAlgn="auto" latinLnBrk="0" hangingPunct="1">
+              <a:lnSpc>
+                <a:spcPct val="90000"/>
+              </a:lnSpc>
+              <a:spcBef>
+                <a:spcPts val="0"/>
+              </a:spcBef>
+              <a:spcAft>
+                <a:spcPts val="0"/>
+              </a:spcAft>
+              <a:buClrTx/>
+              <a:buSzTx/>
+              <a:buFontTx/>
+              <a:buNone/>
+              <a:tabLst/>
+              <a:defRPr/>
+            </a:pPr>
+            <a:endParaRPr kumimoji="0" lang="en-US" sz="1000" b="0" i="0" u="none" strike="noStrike" kern="1200" cap="none" spc="0" normalizeH="0" baseline="0" noProof="0" dirty="0">
+              <a:ln>
+                <a:noFill/>
+              </a:ln>
+              <a:solidFill>
+                <a:prstClr val="black"/>
+              </a:solidFill>
+              <a:effectLst/>
+              <a:uLnTx/>
+              <a:uFillTx/>
+              <a:latin typeface="Calibri" panose="020F0502020204030204"/>
+              <a:ea typeface="+mn-ea"/>
+              <a:cs typeface="+mn-cs"/>
+            </a:endParaRPr>
+          </a:p>
+        </p:txBody>
+      </p:sp>
+      <p:sp>
+        <p:nvSpPr>
+          <p:cNvPr id="30" name="Shape 22"/>
+          <p:cNvSpPr/>
+          <p:nvPr/>
+        </p:nvSpPr>
+        <p:spPr>
+          <a:xfrm>
+            <a:off x="257620" y="3730752"/>
+            <a:ext cx="11676888" cy="3054096"/>
+          </a:xfrm>
+          <a:prstGeom prst="roundRect">
+            <a:avLst>
+              <a:gd name="adj" fmla="val 1796"/>
+            </a:avLst>
+          </a:prstGeom>
+          <a:solidFill>
+            <a:srgbClr val="0B1D37"/>
+          </a:solidFill>
+          <a:ln w="15875">
+            <a:solidFill>
+              <a:srgbClr val="245F92"/>
+            </a:solidFill>
+            <a:prstDash val="solid"/>
+          </a:ln>
+          <a:effectLst>
+            <a:outerShdw blurRad="152400" dist="50800" dir="16200000" algn="bl" rotWithShape="0">
+              <a:srgbClr val="2E86C8">
+                <a:alpha val="55000"/>
+              </a:srgbClr>
+            </a:outerShdw>
+          </a:effectLst>
+        </p:spPr>
+        <p:txBody>
+          <a:bodyPr/>
+          <a:lstStyle/>
+          <a:p>
+            <a:pPr marL="0" marR="0" lvl="0" indent="0" algn="l" defTabSz="914400" rtl="0" eaLnBrk="1" fontAlgn="auto" latinLnBrk="0" hangingPunct="1">
+              <a:lnSpc>
+                <a:spcPct val="100000"/>
+              </a:lnSpc>
+              <a:spcBef>
+                <a:spcPts val="0"/>
+              </a:spcBef>
+              <a:spcAft>
+                <a:spcPts val="0"/>
+              </a:spcAft>
+              <a:buClrTx/>
+              <a:buSzTx/>
+              <a:buFontTx/>
+              <a:buNone/>
+              <a:tabLst/>
+              <a:defRPr/>
+            </a:pPr>
+            <a:endParaRPr kumimoji="0" lang="en-US" sz="1800" b="0" i="0" u="none" strike="noStrike" kern="1200" cap="none" spc="0" normalizeH="0" baseline="0" noProof="0">
+              <a:ln>
+                <a:noFill/>
+              </a:ln>
+              <a:solidFill>
+                <a:prstClr val="black"/>
+              </a:solidFill>
+              <a:effectLst/>
+              <a:uLnTx/>
+              <a:uFillTx/>
+              <a:latin typeface="Calibri" panose="020F0502020204030204"/>
+              <a:ea typeface="+mn-ea"/>
+              <a:cs typeface="+mn-cs"/>
+            </a:endParaRPr>
+          </a:p>
+        </p:txBody>
+      </p:sp>
+      <p:sp>
+        <p:nvSpPr>
+          <p:cNvPr id="31" name="Text 23"/>
+          <p:cNvSpPr/>
+          <p:nvPr/>
+        </p:nvSpPr>
+        <p:spPr>
+          <a:xfrm>
+            <a:off x="513652" y="3822192"/>
+            <a:ext cx="8750808" cy="310896"/>
+          </a:xfrm>
+          <a:prstGeom prst="rect">
+            <a:avLst/>
+          </a:prstGeom>
+          <a:noFill/>
+          <a:ln/>
+        </p:spPr>
+        <p:txBody>
+          <a:bodyPr wrap="square" lIns="0" tIns="0" rIns="0" bIns="0" rtlCol="0" anchor="ctr"/>
+          <a:lstStyle/>
+          <a:p>
+            <a:pPr marL="0" marR="0" lvl="0" indent="0" algn="l" defTabSz="914400" rtl="0" eaLnBrk="1" fontAlgn="auto" latinLnBrk="0" hangingPunct="1">
+              <a:lnSpc>
+                <a:spcPct val="100000"/>
+              </a:lnSpc>
+              <a:spcBef>
+                <a:spcPts val="0"/>
+              </a:spcBef>
+              <a:spcAft>
+                <a:spcPts val="0"/>
+              </a:spcAft>
+              <a:buClrTx/>
+              <a:buSzTx/>
+              <a:buFontTx/>
+              <a:buNone/>
+              <a:tabLst/>
+              <a:defRPr/>
+            </a:pPr>
+            <a:r>
+              <a:rPr kumimoji="0" lang="en-US" sz="1400" b="1" i="0" u="none" strike="noStrike" kern="1200" cap="none" spc="0" normalizeH="0" baseline="0" noProof="0" dirty="0">
+                <a:ln>
+                  <a:noFill/>
+                </a:ln>
+                <a:solidFill>
+                  <a:srgbClr val="CFE9FF"/>
+                </a:solidFill>
+                <a:effectLst/>
+                <a:uLnTx/>
+                <a:uFillTx/>
+                <a:latin typeface="Calibri" pitchFamily="34" charset="0"/>
+                <a:ea typeface="Calibri" pitchFamily="34" charset="-122"/>
+                <a:cs typeface="Calibri" pitchFamily="34" charset="-120"/>
+              </a:rPr>
+              <a:t>AI FLOW  </a:t>
+            </a:r>
+            <a:r>
+              <a:rPr kumimoji="0" lang="en-US" sz="1200" b="0" i="0" u="none" strike="noStrike" kern="1200" cap="none" spc="0" normalizeH="0" baseline="0" noProof="0" dirty="0">
+                <a:ln>
+                  <a:noFill/>
+                </a:ln>
+                <a:solidFill>
+                  <a:srgbClr val="6FC4F2"/>
+                </a:solidFill>
+                <a:effectLst/>
+                <a:uLnTx/>
+                <a:uFillTx/>
+                <a:latin typeface="Calibri" pitchFamily="34" charset="0"/>
+                <a:ea typeface="Calibri" pitchFamily="34" charset="-122"/>
+                <a:cs typeface="Calibri" pitchFamily="34" charset="-120"/>
+              </a:rPr>
+              <a:t>( + Agentic Augmentation)</a:t>
+            </a:r>
+            <a:endParaRPr kumimoji="0" lang="en-US" sz="1400" b="0" i="0" u="none" strike="noStrike" kern="1200" cap="none" spc="0" normalizeH="0" baseline="0" noProof="0" dirty="0">
+              <a:ln>
+                <a:noFill/>
+              </a:ln>
+              <a:solidFill>
+                <a:prstClr val="black"/>
+              </a:solidFill>
+              <a:effectLst/>
+              <a:uLnTx/>
+              <a:uFillTx/>
+              <a:latin typeface="Calibri" panose="020F0502020204030204"/>
+              <a:ea typeface="+mn-ea"/>
+              <a:cs typeface="+mn-cs"/>
+            </a:endParaRPr>
+          </a:p>
+        </p:txBody>
+      </p:sp>
+      <p:sp>
+        <p:nvSpPr>
+          <p:cNvPr id="32" name="Text 24"/>
+          <p:cNvSpPr/>
+          <p:nvPr/>
+        </p:nvSpPr>
+        <p:spPr>
+          <a:xfrm>
+            <a:off x="7426856" y="3822192"/>
+            <a:ext cx="4279053" cy="365760"/>
+          </a:xfrm>
+          <a:prstGeom prst="rect">
+            <a:avLst/>
+          </a:prstGeom>
+          <a:noFill/>
+          <a:ln/>
+        </p:spPr>
+        <p:txBody>
+          <a:bodyPr wrap="square" lIns="0" tIns="0" rIns="0" bIns="0" rtlCol="0" anchor="ctr"/>
+          <a:lstStyle/>
+          <a:p>
+            <a:pPr marL="0" marR="0" lvl="0" indent="0" algn="r" defTabSz="914400" rtl="0" eaLnBrk="1" fontAlgn="auto" latinLnBrk="0" hangingPunct="1">
+              <a:lnSpc>
+                <a:spcPct val="100000"/>
+              </a:lnSpc>
+              <a:spcBef>
+                <a:spcPts val="0"/>
+              </a:spcBef>
+              <a:spcAft>
+                <a:spcPts val="0"/>
+              </a:spcAft>
+              <a:buClrTx/>
+              <a:buSzTx/>
+              <a:buFontTx/>
+              <a:buNone/>
+              <a:tabLst/>
+              <a:defRPr/>
+            </a:pPr>
+            <a:r>
+              <a:rPr kumimoji="0" lang="en-US" sz="1200" b="0" i="1" u="none" strike="noStrike" kern="1200" cap="none" spc="0" normalizeH="0" baseline="0" noProof="0" dirty="0">
+                <a:ln>
+                  <a:noFill/>
+                </a:ln>
+                <a:solidFill>
+                  <a:srgbClr val="8FBBDD"/>
+                </a:solidFill>
+                <a:effectLst/>
+                <a:uLnTx/>
+                <a:uFillTx/>
+                <a:latin typeface="Calibri" panose="020F0502020204030204"/>
+                <a:ea typeface="+mn-ea"/>
+                <a:cs typeface="+mn-cs"/>
+              </a:rPr>
+              <a:t>Throughput | Quality | Faster Resolution | Lower Cost </a:t>
+            </a:r>
+            <a:endParaRPr kumimoji="0" lang="en-US" sz="1200" b="0" i="0" u="none" strike="noStrike" kern="1200" cap="none" spc="0" normalizeH="0" baseline="0" noProof="0" dirty="0">
+              <a:ln>
+                <a:noFill/>
+              </a:ln>
+              <a:solidFill>
+                <a:prstClr val="black"/>
+              </a:solidFill>
+              <a:effectLst/>
+              <a:uLnTx/>
+              <a:uFillTx/>
+              <a:latin typeface="Calibri" panose="020F0502020204030204"/>
+              <a:ea typeface="+mn-ea"/>
+              <a:cs typeface="+mn-cs"/>
+            </a:endParaRPr>
+          </a:p>
+        </p:txBody>
+      </p:sp>
+      <p:pic>
+        <p:nvPicPr>
+          <p:cNvPr id="33" name="Image 6" descr="/home/claude/icon_input.png"/>
+          <p:cNvPicPr>
+            <a:picLocks noChangeAspect="1"/>
+          </p:cNvPicPr>
+          <p:nvPr/>
+        </p:nvPicPr>
+        <p:blipFill>
+          <a:blip r:embed="rId4"/>
+          <a:stretch>
+            <a:fillRect/>
+          </a:stretch>
+        </p:blipFill>
+        <p:spPr>
+          <a:xfrm>
+            <a:off x="504508" y="4187952"/>
+            <a:ext cx="548640" cy="548640"/>
+          </a:xfrm>
+          <a:prstGeom prst="rect">
+            <a:avLst/>
+          </a:prstGeom>
+        </p:spPr>
+      </p:pic>
+      <p:sp>
+        <p:nvSpPr>
+          <p:cNvPr id="34" name="Text 25"/>
+          <p:cNvSpPr/>
+          <p:nvPr/>
+        </p:nvSpPr>
+        <p:spPr>
+          <a:xfrm>
+            <a:off x="138748" y="4754880"/>
+            <a:ext cx="1280160" cy="384048"/>
+          </a:xfrm>
+          <a:prstGeom prst="rect">
+            <a:avLst/>
+          </a:prstGeom>
+          <a:noFill/>
+          <a:ln/>
+        </p:spPr>
+        <p:txBody>
+          <a:bodyPr wrap="square" lIns="0" tIns="0" rIns="0" bIns="0" rtlCol="0" anchor="t"/>
+          <a:lstStyle/>
+          <a:p>
+            <a:pPr marL="0" marR="0" lvl="0" indent="0" algn="ctr" defTabSz="914400" rtl="0" eaLnBrk="1" fontAlgn="auto" latinLnBrk="0" hangingPunct="1">
+              <a:lnSpc>
+                <a:spcPct val="90000"/>
+              </a:lnSpc>
+              <a:spcBef>
+                <a:spcPts val="0"/>
+              </a:spcBef>
+              <a:spcAft>
+                <a:spcPts val="0"/>
+              </a:spcAft>
+              <a:buClrTx/>
+              <a:buSzTx/>
+              <a:buFontTx/>
+              <a:buNone/>
+              <a:tabLst/>
+              <a:defRPr/>
+            </a:pPr>
+            <a:r>
+              <a:rPr kumimoji="0" lang="en-US" sz="1050" b="1" i="0" u="none" strike="noStrike" kern="1200" cap="none" spc="0" normalizeH="0" baseline="0" noProof="0" dirty="0">
+                <a:ln>
+                  <a:noFill/>
+                </a:ln>
+                <a:solidFill>
+                  <a:srgbClr val="EAF4FF"/>
+                </a:solidFill>
+                <a:effectLst/>
+                <a:uLnTx/>
+                <a:uFillTx/>
+                <a:latin typeface="Calibri" pitchFamily="34" charset="0"/>
+                <a:ea typeface="Calibri" pitchFamily="34" charset="-122"/>
+                <a:cs typeface="Calibri" pitchFamily="34" charset="-120"/>
+              </a:rPr>
+              <a:t>INPUT DATA</a:t>
+            </a:r>
+            <a:endParaRPr kumimoji="0" lang="en-US" sz="1050" b="0" i="0" u="none" strike="noStrike" kern="1200" cap="none" spc="0" normalizeH="0" baseline="0" noProof="0" dirty="0">
+              <a:ln>
+                <a:noFill/>
+              </a:ln>
+              <a:solidFill>
+                <a:prstClr val="black"/>
+              </a:solidFill>
+              <a:effectLst/>
+              <a:uLnTx/>
+              <a:uFillTx/>
+              <a:latin typeface="Calibri" panose="020F0502020204030204"/>
+              <a:ea typeface="+mn-ea"/>
+              <a:cs typeface="+mn-cs"/>
+            </a:endParaRPr>
+          </a:p>
+        </p:txBody>
+      </p:sp>
+      <p:sp>
+        <p:nvSpPr>
+          <p:cNvPr id="35" name="Shape 26"/>
+          <p:cNvSpPr/>
+          <p:nvPr/>
+        </p:nvSpPr>
+        <p:spPr>
+          <a:xfrm>
+            <a:off x="1327468" y="4562856"/>
+            <a:ext cx="329184" cy="237744"/>
+          </a:xfrm>
+          <a:prstGeom prst="rightArrow">
+            <a:avLst/>
+          </a:prstGeom>
+          <a:solidFill>
+            <a:srgbClr val="4FA8E0"/>
+          </a:solidFill>
+          <a:ln/>
+        </p:spPr>
+        <p:txBody>
+          <a:bodyPr/>
+          <a:lstStyle/>
+          <a:p>
+            <a:pPr marL="0" marR="0" lvl="0" indent="0" algn="l" defTabSz="914400" rtl="0" eaLnBrk="1" fontAlgn="auto" latinLnBrk="0" hangingPunct="1">
+              <a:lnSpc>
+                <a:spcPct val="100000"/>
+              </a:lnSpc>
+              <a:spcBef>
+                <a:spcPts val="0"/>
+              </a:spcBef>
+              <a:spcAft>
+                <a:spcPts val="0"/>
+              </a:spcAft>
+              <a:buClrTx/>
+              <a:buSzTx/>
+              <a:buFontTx/>
+              <a:buNone/>
+              <a:tabLst/>
+              <a:defRPr/>
+            </a:pPr>
+            <a:endParaRPr kumimoji="0" lang="en-US" sz="1800" b="0" i="0" u="none" strike="noStrike" kern="1200" cap="none" spc="0" normalizeH="0" baseline="0" noProof="0">
+              <a:ln>
+                <a:noFill/>
+              </a:ln>
+              <a:solidFill>
+                <a:prstClr val="black"/>
+              </a:solidFill>
+              <a:effectLst/>
+              <a:uLnTx/>
+              <a:uFillTx/>
+              <a:latin typeface="Calibri" panose="020F0502020204030204"/>
+              <a:ea typeface="+mn-ea"/>
+              <a:cs typeface="+mn-cs"/>
+            </a:endParaRPr>
+          </a:p>
+        </p:txBody>
+      </p:sp>
+      <p:sp>
+        <p:nvSpPr>
+          <p:cNvPr id="36" name="Shape 27"/>
+          <p:cNvSpPr/>
+          <p:nvPr/>
+        </p:nvSpPr>
+        <p:spPr>
+          <a:xfrm>
+            <a:off x="1738948" y="4224528"/>
+            <a:ext cx="1572768" cy="914400"/>
+          </a:xfrm>
+          <a:prstGeom prst="roundRect">
+            <a:avLst>
+              <a:gd name="adj" fmla="val 7000"/>
+            </a:avLst>
+          </a:prstGeom>
+          <a:solidFill>
+            <a:srgbClr val="0F2A4E"/>
+          </a:solidFill>
+          <a:ln w="19050">
+            <a:solidFill>
+              <a:srgbClr val="5BB9EE"/>
+            </a:solidFill>
+            <a:prstDash val="solid"/>
+          </a:ln>
+          <a:effectLst>
+            <a:outerShdw blurRad="114300" dist="50800" dir="16200000" algn="bl" rotWithShape="0">
+              <a:srgbClr val="2E86C8">
+                <a:alpha val="55000"/>
+              </a:srgbClr>
+            </a:outerShdw>
+          </a:effectLst>
+        </p:spPr>
+        <p:txBody>
+          <a:bodyPr/>
+          <a:lstStyle/>
+          <a:p>
+            <a:pPr marL="0" marR="0" lvl="0" indent="0" algn="l" defTabSz="914400" rtl="0" eaLnBrk="1" fontAlgn="auto" latinLnBrk="0" hangingPunct="1">
+              <a:lnSpc>
+                <a:spcPct val="100000"/>
+              </a:lnSpc>
+              <a:spcBef>
+                <a:spcPts val="0"/>
+              </a:spcBef>
+              <a:spcAft>
+                <a:spcPts val="0"/>
+              </a:spcAft>
+              <a:buClrTx/>
+              <a:buSzTx/>
+              <a:buFontTx/>
+              <a:buNone/>
+              <a:tabLst/>
+              <a:defRPr/>
+            </a:pPr>
+            <a:endParaRPr kumimoji="0" lang="en-US" sz="1800" b="0" i="0" u="none" strike="noStrike" kern="1200" cap="none" spc="0" normalizeH="0" baseline="0" noProof="0">
+              <a:ln>
+                <a:noFill/>
+              </a:ln>
+              <a:solidFill>
+                <a:prstClr val="black"/>
+              </a:solidFill>
+              <a:effectLst/>
+              <a:uLnTx/>
+              <a:uFillTx/>
+              <a:latin typeface="Calibri" panose="020F0502020204030204"/>
+              <a:ea typeface="+mn-ea"/>
+              <a:cs typeface="+mn-cs"/>
+            </a:endParaRPr>
+          </a:p>
+        </p:txBody>
+      </p:sp>
+      <p:pic>
+        <p:nvPicPr>
+          <p:cNvPr id="37" name="Image 7" descr="/home/claude/icon_code.png"/>
+          <p:cNvPicPr>
+            <a:picLocks noChangeAspect="1"/>
+          </p:cNvPicPr>
+          <p:nvPr/>
+        </p:nvPicPr>
+        <p:blipFill>
+          <a:blip r:embed="rId5"/>
+          <a:stretch>
+            <a:fillRect/>
+          </a:stretch>
+        </p:blipFill>
+        <p:spPr>
+          <a:xfrm>
+            <a:off x="1857820" y="4453128"/>
+            <a:ext cx="457200" cy="457200"/>
+          </a:xfrm>
+          <a:prstGeom prst="rect">
+            <a:avLst/>
+          </a:prstGeom>
+        </p:spPr>
+      </p:pic>
+      <p:sp>
+        <p:nvSpPr>
+          <p:cNvPr id="38" name="Text 28"/>
+          <p:cNvSpPr/>
+          <p:nvPr/>
+        </p:nvSpPr>
+        <p:spPr>
+          <a:xfrm>
+            <a:off x="2360740" y="4224528"/>
+            <a:ext cx="914400" cy="914400"/>
+          </a:xfrm>
+          <a:prstGeom prst="rect">
+            <a:avLst/>
+          </a:prstGeom>
+          <a:noFill/>
+          <a:ln/>
+        </p:spPr>
+        <p:txBody>
+          <a:bodyPr wrap="square" lIns="25400" tIns="25400" rIns="25400" bIns="25400" rtlCol="0" anchor="ctr"/>
+          <a:lstStyle/>
+          <a:p>
+            <a:pPr marL="0" marR="0" lvl="0" indent="0" algn="l" defTabSz="914400" rtl="0" eaLnBrk="1" fontAlgn="auto" latinLnBrk="0" hangingPunct="1">
+              <a:lnSpc>
+                <a:spcPct val="90000"/>
+              </a:lnSpc>
+              <a:spcBef>
+                <a:spcPts val="0"/>
+              </a:spcBef>
+              <a:spcAft>
+                <a:spcPts val="0"/>
+              </a:spcAft>
+              <a:buClrTx/>
+              <a:buSzTx/>
+              <a:buFontTx/>
+              <a:buNone/>
+              <a:tabLst/>
+              <a:defRPr/>
+            </a:pPr>
+            <a:r>
+              <a:rPr kumimoji="0" lang="en-US" sz="1050" b="1" i="0" u="none" strike="noStrike" kern="1200" cap="none" spc="0" normalizeH="0" baseline="0" noProof="0" dirty="0">
+                <a:ln>
+                  <a:noFill/>
+                </a:ln>
+                <a:solidFill>
+                  <a:srgbClr val="EAF4FF"/>
+                </a:solidFill>
+                <a:effectLst/>
+                <a:uLnTx/>
+                <a:uFillTx/>
+                <a:latin typeface="Calibri" pitchFamily="34" charset="0"/>
+                <a:ea typeface="Calibri" pitchFamily="34" charset="-122"/>
+                <a:cs typeface="Calibri" pitchFamily="34" charset="-120"/>
+              </a:rPr>
+              <a:t>BUSINESS RULE ENGINE</a:t>
+            </a:r>
+            <a:endParaRPr kumimoji="0" lang="en-US" sz="1050" b="0" i="0" u="none" strike="noStrike" kern="1200" cap="none" spc="0" normalizeH="0" baseline="0" noProof="0" dirty="0">
+              <a:ln>
+                <a:noFill/>
+              </a:ln>
+              <a:solidFill>
+                <a:prstClr val="black"/>
+              </a:solidFill>
+              <a:effectLst/>
+              <a:uLnTx/>
+              <a:uFillTx/>
+              <a:latin typeface="Calibri" panose="020F0502020204030204"/>
+              <a:ea typeface="+mn-ea"/>
+              <a:cs typeface="+mn-cs"/>
+            </a:endParaRPr>
+          </a:p>
+        </p:txBody>
+      </p:sp>
+      <p:sp>
+        <p:nvSpPr>
+          <p:cNvPr id="39" name="Shape 29"/>
+          <p:cNvSpPr/>
+          <p:nvPr/>
+        </p:nvSpPr>
+        <p:spPr>
+          <a:xfrm>
+            <a:off x="3348292" y="4562856"/>
+            <a:ext cx="1101852" cy="237744"/>
+          </a:xfrm>
+          <a:prstGeom prst="rightArrow">
+            <a:avLst/>
+          </a:prstGeom>
+          <a:solidFill>
+            <a:srgbClr val="FFC000"/>
+          </a:solidFill>
+          <a:ln/>
+        </p:spPr>
+        <p:txBody>
+          <a:bodyPr/>
+          <a:lstStyle/>
+          <a:p>
+            <a:pPr marL="0" marR="0" lvl="0" indent="0" algn="l" defTabSz="914400" rtl="0" eaLnBrk="1" fontAlgn="auto" latinLnBrk="0" hangingPunct="1">
+              <a:lnSpc>
+                <a:spcPct val="100000"/>
+              </a:lnSpc>
+              <a:spcBef>
+                <a:spcPts val="0"/>
+              </a:spcBef>
+              <a:spcAft>
+                <a:spcPts val="0"/>
+              </a:spcAft>
+              <a:buClrTx/>
+              <a:buSzTx/>
+              <a:buFontTx/>
+              <a:buNone/>
+              <a:tabLst/>
+              <a:defRPr/>
+            </a:pPr>
+            <a:endParaRPr kumimoji="0" lang="en-US" sz="1800" b="0" i="0" u="none" strike="noStrike" kern="1200" cap="none" spc="0" normalizeH="0" baseline="0" noProof="0">
+              <a:ln>
+                <a:noFill/>
+              </a:ln>
+              <a:solidFill>
+                <a:prstClr val="black"/>
+              </a:solidFill>
+              <a:effectLst/>
+              <a:uLnTx/>
+              <a:uFillTx/>
+              <a:latin typeface="Calibri" panose="020F0502020204030204"/>
+              <a:ea typeface="+mn-ea"/>
+              <a:cs typeface="+mn-cs"/>
+            </a:endParaRPr>
+          </a:p>
+        </p:txBody>
+      </p:sp>
+      <p:sp>
+        <p:nvSpPr>
+          <p:cNvPr id="40" name="Shape 30"/>
+          <p:cNvSpPr/>
+          <p:nvPr/>
+        </p:nvSpPr>
+        <p:spPr>
+          <a:xfrm>
+            <a:off x="4450144" y="4160520"/>
+            <a:ext cx="1737360" cy="1042416"/>
+          </a:xfrm>
+          <a:prstGeom prst="roundRect">
+            <a:avLst>
+              <a:gd name="adj" fmla="val 6140"/>
+            </a:avLst>
+          </a:prstGeom>
+          <a:solidFill>
+            <a:srgbClr val="0F2A4E"/>
+          </a:solidFill>
+          <a:ln w="34925">
+            <a:solidFill>
+              <a:srgbClr val="FFC000"/>
+            </a:solidFill>
+            <a:prstDash val="solid"/>
+          </a:ln>
+          <a:effectLst>
+            <a:glow rad="152400">
+              <a:srgbClr val="FFC000">
+                <a:alpha val="60000"/>
+              </a:srgbClr>
+            </a:glow>
+            <a:outerShdw blurRad="114300" dist="50800" dir="16200000" algn="bl" rotWithShape="0">
+              <a:srgbClr val="FFC000">
+                <a:alpha val="45000"/>
+              </a:srgbClr>
+            </a:outerShdw>
+          </a:effectLst>
+        </p:spPr>
+        <p:txBody>
+          <a:bodyPr/>
+          <a:lstStyle/>
+          <a:p>
+            <a:pPr marL="0" marR="0" lvl="0" indent="0" algn="l" defTabSz="914400" rtl="0" eaLnBrk="1" fontAlgn="auto" latinLnBrk="0" hangingPunct="1">
+              <a:lnSpc>
+                <a:spcPct val="100000"/>
+              </a:lnSpc>
+              <a:spcBef>
+                <a:spcPts val="0"/>
+              </a:spcBef>
+              <a:spcAft>
+                <a:spcPts val="0"/>
+              </a:spcAft>
+              <a:buClrTx/>
+              <a:buSzTx/>
+              <a:buFontTx/>
+              <a:buNone/>
+              <a:tabLst/>
+              <a:defRPr/>
+            </a:pPr>
+            <a:endParaRPr kumimoji="0" lang="en-US" sz="1800" b="0" i="0" u="none" strike="noStrike" kern="1200" cap="none" spc="0" normalizeH="0" baseline="0" noProof="0">
+              <a:ln>
+                <a:noFill/>
+              </a:ln>
+              <a:solidFill>
+                <a:prstClr val="black"/>
+              </a:solidFill>
+              <a:effectLst/>
+              <a:uLnTx/>
+              <a:uFillTx/>
+              <a:latin typeface="Calibri" panose="020F0502020204030204"/>
+              <a:ea typeface="+mn-ea"/>
+              <a:cs typeface="+mn-cs"/>
+            </a:endParaRPr>
+          </a:p>
+        </p:txBody>
+      </p:sp>
+      <p:pic>
+        <p:nvPicPr>
+          <p:cNvPr id="41" name="Image 8" descr="/home/claude/icon_shield.png"/>
+          <p:cNvPicPr>
+            <a:picLocks noChangeAspect="1"/>
+          </p:cNvPicPr>
+          <p:nvPr/>
+        </p:nvPicPr>
+        <p:blipFill>
+          <a:blip r:embed="rId9"/>
+          <a:stretch>
+            <a:fillRect/>
+          </a:stretch>
+        </p:blipFill>
+        <p:spPr>
+          <a:xfrm>
+            <a:off x="4569016" y="4453128"/>
+            <a:ext cx="457200" cy="457200"/>
+          </a:xfrm>
+          <a:prstGeom prst="rect">
+            <a:avLst/>
+          </a:prstGeom>
+        </p:spPr>
+      </p:pic>
+      <p:sp>
+        <p:nvSpPr>
+          <p:cNvPr id="42" name="Text 31"/>
+          <p:cNvSpPr/>
+          <p:nvPr/>
+        </p:nvSpPr>
+        <p:spPr>
+          <a:xfrm>
+            <a:off x="5071936" y="4160520"/>
+            <a:ext cx="1078992" cy="1042416"/>
+          </a:xfrm>
+          <a:prstGeom prst="rect">
+            <a:avLst/>
+          </a:prstGeom>
+          <a:noFill/>
+          <a:ln/>
+        </p:spPr>
+        <p:txBody>
+          <a:bodyPr wrap="square" lIns="25400" tIns="25400" rIns="25400" bIns="25400" rtlCol="0" anchor="ctr"/>
+          <a:lstStyle/>
+          <a:p>
+            <a:pPr marL="0" marR="0" lvl="0" indent="0" algn="l" defTabSz="914400" rtl="0" eaLnBrk="1" fontAlgn="auto" latinLnBrk="0" hangingPunct="1">
+              <a:lnSpc>
+                <a:spcPct val="90000"/>
+              </a:lnSpc>
+              <a:spcBef>
+                <a:spcPts val="0"/>
+              </a:spcBef>
+              <a:spcAft>
+                <a:spcPts val="0"/>
+              </a:spcAft>
+              <a:buClrTx/>
+              <a:buSzTx/>
+              <a:buFontTx/>
+              <a:buNone/>
+              <a:tabLst/>
+              <a:defRPr/>
+            </a:pPr>
+            <a:r>
+              <a:rPr kumimoji="0" lang="en-US" sz="1100" b="1" i="0" u="none" strike="noStrike" kern="1200" cap="none" spc="0" normalizeH="0" baseline="0" noProof="0" dirty="0">
+                <a:ln>
+                  <a:noFill/>
+                </a:ln>
+                <a:solidFill>
+                  <a:srgbClr val="EAF4FF"/>
+                </a:solidFill>
+                <a:effectLst/>
+                <a:uLnTx/>
+                <a:uFillTx/>
+                <a:latin typeface="Calibri" pitchFamily="34" charset="0"/>
+                <a:ea typeface="Calibri" pitchFamily="34" charset="-122"/>
+                <a:cs typeface="Calibri" pitchFamily="34" charset="-120"/>
+              </a:rPr>
+              <a:t>SYSTEM GUARDRAILS</a:t>
+            </a:r>
+            <a:endParaRPr kumimoji="0" lang="en-US" sz="1100" b="0" i="0" u="none" strike="noStrike" kern="1200" cap="none" spc="0" normalizeH="0" baseline="0" noProof="0" dirty="0">
+              <a:ln>
+                <a:noFill/>
+              </a:ln>
+              <a:solidFill>
+                <a:prstClr val="black"/>
+              </a:solidFill>
+              <a:effectLst/>
+              <a:uLnTx/>
+              <a:uFillTx/>
+              <a:latin typeface="Calibri" panose="020F0502020204030204"/>
+              <a:ea typeface="+mn-ea"/>
+              <a:cs typeface="+mn-cs"/>
+            </a:endParaRPr>
+          </a:p>
+        </p:txBody>
+      </p:sp>
+      <p:sp>
+        <p:nvSpPr>
+          <p:cNvPr id="43" name="Shape 32"/>
+          <p:cNvSpPr/>
+          <p:nvPr/>
+        </p:nvSpPr>
+        <p:spPr>
+          <a:xfrm>
+            <a:off x="6827584" y="4224528"/>
+            <a:ext cx="4695444" cy="914400"/>
+          </a:xfrm>
+          <a:prstGeom prst="rightArrow">
+            <a:avLst/>
+          </a:prstGeom>
+          <a:solidFill>
+            <a:srgbClr val="10375F">
+              <a:alpha val="92000"/>
+            </a:srgbClr>
+          </a:solidFill>
+          <a:ln w="19050">
+            <a:solidFill>
+              <a:srgbClr val="5BB9EE"/>
+            </a:solidFill>
+            <a:prstDash val="solid"/>
+          </a:ln>
+          <a:effectLst>
+            <a:outerShdw blurRad="139700" dist="50800" dir="16200000" algn="bl" rotWithShape="0">
+              <a:srgbClr val="2E86C8">
+                <a:alpha val="55000"/>
+              </a:srgbClr>
+            </a:outerShdw>
+          </a:effectLst>
+        </p:spPr>
+        <p:txBody>
+          <a:bodyPr/>
+          <a:lstStyle/>
+          <a:p>
+            <a:pPr marL="0" marR="0" lvl="0" indent="0" algn="l" defTabSz="914400" rtl="0" eaLnBrk="1" fontAlgn="auto" latinLnBrk="0" hangingPunct="1">
+              <a:lnSpc>
+                <a:spcPct val="100000"/>
+              </a:lnSpc>
+              <a:spcBef>
+                <a:spcPts val="0"/>
+              </a:spcBef>
+              <a:spcAft>
+                <a:spcPts val="0"/>
+              </a:spcAft>
+              <a:buClrTx/>
+              <a:buSzTx/>
+              <a:buFontTx/>
+              <a:buNone/>
+              <a:tabLst/>
+              <a:defRPr/>
+            </a:pPr>
+            <a:endParaRPr kumimoji="0" lang="en-US" sz="1800" b="0" i="0" u="none" strike="noStrike" kern="1200" cap="none" spc="0" normalizeH="0" baseline="0" noProof="0">
+              <a:ln>
+                <a:noFill/>
+              </a:ln>
+              <a:solidFill>
+                <a:prstClr val="black"/>
+              </a:solidFill>
+              <a:effectLst/>
+              <a:uLnTx/>
+              <a:uFillTx/>
+              <a:latin typeface="Calibri" panose="020F0502020204030204"/>
+              <a:ea typeface="+mn-ea"/>
+              <a:cs typeface="+mn-cs"/>
+            </a:endParaRPr>
+          </a:p>
+        </p:txBody>
+      </p:sp>
+      <p:sp>
+        <p:nvSpPr>
+          <p:cNvPr id="44" name="Text 33"/>
+          <p:cNvSpPr/>
+          <p:nvPr/>
+        </p:nvSpPr>
+        <p:spPr>
+          <a:xfrm>
+            <a:off x="5808028" y="4224528"/>
+            <a:ext cx="5120640" cy="914400"/>
+          </a:xfrm>
+          <a:prstGeom prst="rect">
+            <a:avLst/>
+          </a:prstGeom>
+          <a:noFill/>
+          <a:ln/>
+        </p:spPr>
+        <p:txBody>
+          <a:bodyPr wrap="square" lIns="0" tIns="0" rIns="0" bIns="0" rtlCol="0" anchor="ctr"/>
+          <a:lstStyle/>
+          <a:p>
+            <a:pPr marL="0" marR="0" lvl="0" indent="0" algn="ctr" defTabSz="914400" rtl="0" eaLnBrk="1" fontAlgn="auto" latinLnBrk="0" hangingPunct="1">
+              <a:lnSpc>
+                <a:spcPct val="95000"/>
+              </a:lnSpc>
+              <a:spcBef>
+                <a:spcPts val="0"/>
+              </a:spcBef>
+              <a:spcAft>
+                <a:spcPts val="0"/>
+              </a:spcAft>
+              <a:buClrTx/>
+              <a:buSzTx/>
+              <a:buFontTx/>
+              <a:buNone/>
+              <a:tabLst/>
+              <a:defRPr/>
+            </a:pPr>
+            <a:r>
+              <a:rPr kumimoji="0" lang="en-US" sz="1500" b="1" i="0" u="none" strike="noStrike" kern="1200" cap="none" spc="0" normalizeH="0" baseline="0" noProof="0" dirty="0">
+                <a:ln>
+                  <a:noFill/>
+                </a:ln>
+                <a:solidFill>
+                  <a:srgbClr val="CFE9FF"/>
+                </a:solidFill>
+                <a:effectLst/>
+                <a:uLnTx/>
+                <a:uFillTx/>
+                <a:latin typeface="Calibri" pitchFamily="34" charset="0"/>
+                <a:ea typeface="Calibri" pitchFamily="34" charset="-122"/>
+                <a:cs typeface="Calibri" pitchFamily="34" charset="-120"/>
+              </a:rPr>
+              <a:t>AUTO-EXECUTED
+</a:t>
+            </a:r>
+            <a:r>
+              <a:rPr kumimoji="0" lang="en-US" sz="1200" b="0" i="0" u="none" strike="noStrike" kern="1200" cap="none" spc="0" normalizeH="0" baseline="0" noProof="0" dirty="0">
+                <a:ln>
+                  <a:noFill/>
+                </a:ln>
+                <a:solidFill>
+                  <a:srgbClr val="6FC4F2"/>
+                </a:solidFill>
+                <a:effectLst/>
+                <a:uLnTx/>
+                <a:uFillTx/>
+                <a:latin typeface="Calibri" pitchFamily="34" charset="0"/>
+                <a:ea typeface="Calibri" pitchFamily="34" charset="-122"/>
+                <a:cs typeface="Calibri" pitchFamily="34" charset="-120"/>
+              </a:rPr>
+              <a:t>(Example: ~90%)</a:t>
+            </a:r>
+            <a:endParaRPr kumimoji="0" lang="en-US" sz="1500" b="0" i="0" u="none" strike="noStrike" kern="1200" cap="none" spc="0" normalizeH="0" baseline="0" noProof="0" dirty="0">
+              <a:ln>
+                <a:noFill/>
+              </a:ln>
+              <a:solidFill>
+                <a:srgbClr val="6FC4F2"/>
+              </a:solidFill>
+              <a:effectLst/>
+              <a:uLnTx/>
+              <a:uFillTx/>
+              <a:latin typeface="Calibri" panose="020F0502020204030204"/>
+              <a:ea typeface="+mn-ea"/>
+              <a:cs typeface="+mn-cs"/>
+            </a:endParaRPr>
+          </a:p>
+        </p:txBody>
+      </p:sp>
+      <p:sp>
+        <p:nvSpPr>
+          <p:cNvPr id="45" name="Shape 34"/>
+          <p:cNvSpPr/>
+          <p:nvPr/>
+        </p:nvSpPr>
+        <p:spPr>
+          <a:xfrm>
+            <a:off x="2970595" y="5401056"/>
+            <a:ext cx="1383537" cy="859536"/>
+          </a:xfrm>
+          <a:prstGeom prst="roundRect">
+            <a:avLst>
+              <a:gd name="adj" fmla="val 7447"/>
+            </a:avLst>
+          </a:prstGeom>
+          <a:solidFill>
+            <a:srgbClr val="0F2A4E"/>
+          </a:solidFill>
+          <a:ln w="34925">
+            <a:solidFill>
+              <a:srgbClr val="FFC000"/>
+            </a:solidFill>
+            <a:prstDash val="solid"/>
+          </a:ln>
+          <a:effectLst>
+            <a:glow rad="152400">
+              <a:srgbClr val="FFC000">
+                <a:alpha val="60000"/>
+              </a:srgbClr>
+            </a:glow>
+            <a:outerShdw blurRad="114300" dist="50800" dir="16200000" algn="bl" rotWithShape="0">
+              <a:srgbClr val="FFC000">
+                <a:alpha val="45000"/>
+              </a:srgbClr>
+            </a:outerShdw>
+          </a:effectLst>
+        </p:spPr>
+        <p:txBody>
+          <a:bodyPr/>
+          <a:lstStyle/>
+          <a:p>
+            <a:pPr marL="0" marR="0" lvl="0" indent="0" algn="l" defTabSz="914400" rtl="0" eaLnBrk="1" fontAlgn="auto" latinLnBrk="0" hangingPunct="1">
+              <a:lnSpc>
+                <a:spcPct val="100000"/>
+              </a:lnSpc>
+              <a:spcBef>
+                <a:spcPts val="0"/>
+              </a:spcBef>
+              <a:spcAft>
+                <a:spcPts val="0"/>
+              </a:spcAft>
+              <a:buClrTx/>
+              <a:buSzTx/>
+              <a:buFontTx/>
+              <a:buNone/>
+              <a:tabLst/>
+              <a:defRPr/>
+            </a:pPr>
+            <a:endParaRPr kumimoji="0" lang="en-US" sz="1800" b="0" i="0" u="none" strike="noStrike" kern="1200" cap="none" spc="0" normalizeH="0" baseline="0" noProof="0">
+              <a:ln>
+                <a:noFill/>
+              </a:ln>
+              <a:solidFill>
+                <a:prstClr val="black"/>
+              </a:solidFill>
+              <a:effectLst/>
+              <a:uLnTx/>
+              <a:uFillTx/>
+              <a:latin typeface="Calibri" panose="020F0502020204030204"/>
+              <a:ea typeface="+mn-ea"/>
+              <a:cs typeface="+mn-cs"/>
+            </a:endParaRPr>
+          </a:p>
+        </p:txBody>
+      </p:sp>
+      <p:sp>
+        <p:nvSpPr>
+          <p:cNvPr id="47" name="Text 35"/>
+          <p:cNvSpPr/>
+          <p:nvPr/>
+        </p:nvSpPr>
+        <p:spPr>
+          <a:xfrm>
+            <a:off x="3134932" y="6140196"/>
+            <a:ext cx="1216152" cy="859536"/>
+          </a:xfrm>
+          <a:prstGeom prst="rect">
+            <a:avLst/>
+          </a:prstGeom>
+          <a:noFill/>
+          <a:ln/>
+        </p:spPr>
+        <p:txBody>
+          <a:bodyPr wrap="square" lIns="25400" tIns="25400" rIns="25400" bIns="25400" rtlCol="0" anchor="ctr"/>
+          <a:lstStyle/>
+          <a:p>
+            <a:pPr marL="0" marR="0" lvl="0" indent="0" algn="l" defTabSz="914400" rtl="0" eaLnBrk="1" fontAlgn="auto" latinLnBrk="0" hangingPunct="1">
+              <a:lnSpc>
+                <a:spcPct val="90000"/>
+              </a:lnSpc>
+              <a:spcBef>
+                <a:spcPts val="0"/>
+              </a:spcBef>
+              <a:spcAft>
+                <a:spcPts val="0"/>
+              </a:spcAft>
+              <a:buClrTx/>
+              <a:buSzTx/>
+              <a:buFontTx/>
+              <a:buNone/>
+              <a:tabLst/>
+              <a:defRPr/>
+            </a:pPr>
+            <a:r>
+              <a:rPr kumimoji="0" lang="en-US" sz="1050" b="1" i="0" u="none" strike="noStrike" kern="1200" cap="none" spc="0" normalizeH="0" baseline="0" noProof="0" dirty="0">
+                <a:ln>
+                  <a:noFill/>
+                </a:ln>
+                <a:solidFill>
+                  <a:srgbClr val="EAF4FF"/>
+                </a:solidFill>
+                <a:effectLst/>
+                <a:uLnTx/>
+                <a:uFillTx/>
+                <a:latin typeface="Calibri" pitchFamily="34" charset="0"/>
+                <a:ea typeface="Calibri" pitchFamily="34" charset="-122"/>
+                <a:cs typeface="Calibri" pitchFamily="34" charset="-120"/>
+              </a:rPr>
+              <a:t>EXCEPTION AGENTS </a:t>
+            </a:r>
+            <a:r>
+              <a:rPr kumimoji="0" lang="en-US" sz="1050" b="1" i="0" u="none" strike="noStrike" kern="1200" cap="none" spc="0" normalizeH="0" baseline="0" noProof="0" dirty="0">
+                <a:ln>
+                  <a:noFill/>
+                </a:ln>
+                <a:solidFill>
+                  <a:prstClr val="white">
+                    <a:lumMod val="65000"/>
+                  </a:prstClr>
+                </a:solidFill>
+                <a:effectLst/>
+                <a:uLnTx/>
+                <a:uFillTx/>
+                <a:latin typeface="Calibri" pitchFamily="34" charset="0"/>
+                <a:ea typeface="Calibri" pitchFamily="34" charset="-122"/>
+                <a:cs typeface="Calibri" pitchFamily="34" charset="-120"/>
+              </a:rPr>
+              <a:t>(JUDGEMENT)</a:t>
+            </a:r>
+            <a:endParaRPr kumimoji="0" lang="en-US" sz="1050" b="0" i="0" u="none" strike="noStrike" kern="1200" cap="none" spc="0" normalizeH="0" baseline="0" noProof="0" dirty="0">
+              <a:ln>
+                <a:noFill/>
+              </a:ln>
+              <a:solidFill>
+                <a:prstClr val="white">
+                  <a:lumMod val="65000"/>
+                </a:prstClr>
+              </a:solidFill>
+              <a:effectLst/>
+              <a:uLnTx/>
+              <a:uFillTx/>
+              <a:latin typeface="Calibri" panose="020F0502020204030204"/>
+              <a:ea typeface="+mn-ea"/>
+              <a:cs typeface="+mn-cs"/>
+            </a:endParaRPr>
+          </a:p>
+        </p:txBody>
+      </p:sp>
+      <p:sp>
+        <p:nvSpPr>
+          <p:cNvPr id="48" name="Shape 36"/>
+          <p:cNvSpPr/>
+          <p:nvPr/>
+        </p:nvSpPr>
+        <p:spPr>
+          <a:xfrm>
+            <a:off x="3605848" y="4802124"/>
+            <a:ext cx="274320" cy="384048"/>
+          </a:xfrm>
+          <a:prstGeom prst="upArrow">
+            <a:avLst/>
+          </a:prstGeom>
+          <a:solidFill>
+            <a:srgbClr val="FFC000"/>
+          </a:solidFill>
+          <a:ln/>
+        </p:spPr>
+        <p:txBody>
+          <a:bodyPr/>
+          <a:lstStyle/>
+          <a:p>
+            <a:pPr marL="0" marR="0" lvl="0" indent="0" algn="l" defTabSz="914400" rtl="0" eaLnBrk="1" fontAlgn="auto" latinLnBrk="0" hangingPunct="1">
+              <a:lnSpc>
+                <a:spcPct val="100000"/>
+              </a:lnSpc>
+              <a:spcBef>
+                <a:spcPts val="0"/>
+              </a:spcBef>
+              <a:spcAft>
+                <a:spcPts val="0"/>
+              </a:spcAft>
+              <a:buClrTx/>
+              <a:buSzTx/>
+              <a:buFontTx/>
+              <a:buNone/>
+              <a:tabLst/>
+              <a:defRPr/>
+            </a:pPr>
+            <a:endParaRPr kumimoji="0" lang="en-US" sz="1800" b="0" i="0" u="none" strike="noStrike" kern="1200" cap="none" spc="0" normalizeH="0" baseline="0" noProof="0">
+              <a:ln>
+                <a:noFill/>
+              </a:ln>
+              <a:solidFill>
+                <a:prstClr val="black"/>
+              </a:solidFill>
+              <a:effectLst/>
+              <a:uLnTx/>
+              <a:uFillTx/>
+              <a:latin typeface="Calibri" panose="020F0502020204030204"/>
+              <a:ea typeface="+mn-ea"/>
+              <a:cs typeface="+mn-cs"/>
+            </a:endParaRPr>
+          </a:p>
+        </p:txBody>
+      </p:sp>
+      <p:sp>
+        <p:nvSpPr>
+          <p:cNvPr id="51" name="Shape 39"/>
+          <p:cNvSpPr/>
+          <p:nvPr/>
+        </p:nvSpPr>
+        <p:spPr>
+          <a:xfrm>
+            <a:off x="5471478" y="5202936"/>
+            <a:ext cx="0" cy="667512"/>
+          </a:xfrm>
+          <a:prstGeom prst="line">
+            <a:avLst/>
+          </a:prstGeom>
+          <a:noFill/>
+          <a:ln w="25400">
+            <a:solidFill>
+              <a:srgbClr val="FFC000"/>
+            </a:solidFill>
+            <a:prstDash val="solid"/>
+          </a:ln>
+        </p:spPr>
+        <p:txBody>
+          <a:bodyPr/>
+          <a:lstStyle/>
+          <a:p>
+            <a:pPr marL="0" marR="0" lvl="0" indent="0" algn="l" defTabSz="914400" rtl="0" eaLnBrk="1" fontAlgn="auto" latinLnBrk="0" hangingPunct="1">
+              <a:lnSpc>
+                <a:spcPct val="100000"/>
+              </a:lnSpc>
+              <a:spcBef>
+                <a:spcPts val="0"/>
+              </a:spcBef>
+              <a:spcAft>
+                <a:spcPts val="0"/>
+              </a:spcAft>
+              <a:buClrTx/>
+              <a:buSzTx/>
+              <a:buFontTx/>
+              <a:buNone/>
+              <a:tabLst/>
+              <a:defRPr/>
+            </a:pPr>
+            <a:endParaRPr kumimoji="0" lang="en-US" sz="1800" b="0" i="0" u="none" strike="noStrike" kern="1200" cap="none" spc="0" normalizeH="0" baseline="0" noProof="0">
+              <a:ln>
+                <a:noFill/>
+              </a:ln>
+              <a:solidFill>
+                <a:prstClr val="black"/>
+              </a:solidFill>
+              <a:effectLst/>
+              <a:uLnTx/>
+              <a:uFillTx/>
+              <a:latin typeface="Calibri" panose="020F0502020204030204"/>
+              <a:ea typeface="+mn-ea"/>
+              <a:cs typeface="+mn-cs"/>
+            </a:endParaRPr>
+          </a:p>
+        </p:txBody>
+      </p:sp>
+      <p:sp>
+        <p:nvSpPr>
+          <p:cNvPr id="52" name="Shape 40"/>
+          <p:cNvSpPr/>
+          <p:nvPr/>
+        </p:nvSpPr>
+        <p:spPr>
+          <a:xfrm>
+            <a:off x="5463350" y="5751576"/>
+            <a:ext cx="1624838" cy="237744"/>
+          </a:xfrm>
+          <a:prstGeom prst="rightArrow">
+            <a:avLst/>
+          </a:prstGeom>
+          <a:solidFill>
+            <a:srgbClr val="FFC000"/>
+          </a:solidFill>
+          <a:ln/>
+        </p:spPr>
+        <p:txBody>
+          <a:bodyPr/>
+          <a:lstStyle/>
+          <a:p>
+            <a:pPr marL="0" marR="0" lvl="0" indent="0" algn="l" defTabSz="914400" rtl="0" eaLnBrk="1" fontAlgn="auto" latinLnBrk="0" hangingPunct="1">
+              <a:lnSpc>
+                <a:spcPct val="100000"/>
+              </a:lnSpc>
+              <a:spcBef>
+                <a:spcPts val="0"/>
+              </a:spcBef>
+              <a:spcAft>
+                <a:spcPts val="0"/>
+              </a:spcAft>
+              <a:buClrTx/>
+              <a:buSzTx/>
+              <a:buFontTx/>
+              <a:buNone/>
+              <a:tabLst/>
+              <a:defRPr/>
+            </a:pPr>
+            <a:endParaRPr kumimoji="0" lang="en-US" sz="1800" b="0" i="0" u="none" strike="noStrike" kern="1200" cap="none" spc="0" normalizeH="0" baseline="0" noProof="0">
+              <a:ln>
+                <a:noFill/>
+              </a:ln>
+              <a:solidFill>
+                <a:prstClr val="black"/>
+              </a:solidFill>
+              <a:effectLst/>
+              <a:uLnTx/>
+              <a:uFillTx/>
+              <a:latin typeface="Calibri" panose="020F0502020204030204"/>
+              <a:ea typeface="+mn-ea"/>
+              <a:cs typeface="+mn-cs"/>
+            </a:endParaRPr>
+          </a:p>
+        </p:txBody>
+      </p:sp>
+      <p:sp>
+        <p:nvSpPr>
+          <p:cNvPr id="53" name="Text 41"/>
+          <p:cNvSpPr/>
+          <p:nvPr/>
+        </p:nvSpPr>
+        <p:spPr>
+          <a:xfrm>
+            <a:off x="5442268" y="5513832"/>
+            <a:ext cx="1737360" cy="457200"/>
+          </a:xfrm>
+          <a:prstGeom prst="rect">
+            <a:avLst/>
+          </a:prstGeom>
+          <a:noFill/>
+          <a:ln/>
+        </p:spPr>
+        <p:txBody>
+          <a:bodyPr wrap="square" lIns="0" tIns="0" rIns="0" bIns="0" rtlCol="0" anchor="ctr"/>
+          <a:lstStyle/>
+          <a:p>
+            <a:pPr marL="0" marR="0" lvl="0" indent="0" algn="ctr" defTabSz="914400" rtl="0" eaLnBrk="1" fontAlgn="auto" latinLnBrk="0" hangingPunct="1">
+              <a:lnSpc>
+                <a:spcPct val="90000"/>
+              </a:lnSpc>
+              <a:spcBef>
+                <a:spcPts val="0"/>
+              </a:spcBef>
+              <a:spcAft>
+                <a:spcPts val="0"/>
+              </a:spcAft>
+              <a:buClrTx/>
+              <a:buSzTx/>
+              <a:buFontTx/>
+              <a:buNone/>
+              <a:tabLst/>
+              <a:defRPr/>
+            </a:pPr>
+            <a:r>
+              <a:rPr kumimoji="0" lang="en-US" sz="900" b="1" i="0" u="none" strike="noStrike" kern="1200" cap="none" spc="0" normalizeH="0" baseline="0" noProof="0" dirty="0">
+                <a:ln>
+                  <a:noFill/>
+                </a:ln>
+                <a:solidFill>
+                  <a:srgbClr val="6FC4F2"/>
+                </a:solidFill>
+                <a:effectLst/>
+                <a:uLnTx/>
+                <a:uFillTx/>
+                <a:latin typeface="Calibri" pitchFamily="34" charset="0"/>
+                <a:ea typeface="Calibri" pitchFamily="34" charset="-122"/>
+                <a:cs typeface="Calibri" pitchFamily="34" charset="-120"/>
+              </a:rPr>
+              <a:t>Guardrail Failures</a:t>
+            </a:r>
+            <a:endParaRPr kumimoji="0" lang="en-US" sz="900" b="0" i="0" u="none" strike="noStrike" kern="1200" cap="none" spc="0" normalizeH="0" baseline="0" noProof="0" dirty="0">
+              <a:ln>
+                <a:noFill/>
+              </a:ln>
+              <a:solidFill>
+                <a:prstClr val="black"/>
+              </a:solidFill>
+              <a:effectLst/>
+              <a:uLnTx/>
+              <a:uFillTx/>
+              <a:latin typeface="Calibri" panose="020F0502020204030204"/>
+              <a:ea typeface="+mn-ea"/>
+              <a:cs typeface="+mn-cs"/>
+            </a:endParaRPr>
+          </a:p>
+        </p:txBody>
+      </p:sp>
+      <p:sp>
+        <p:nvSpPr>
+          <p:cNvPr id="54" name="Text 42"/>
+          <p:cNvSpPr/>
+          <p:nvPr/>
+        </p:nvSpPr>
+        <p:spPr>
+          <a:xfrm>
+            <a:off x="4678744" y="6115812"/>
+            <a:ext cx="2148840" cy="457200"/>
+          </a:xfrm>
+          <a:prstGeom prst="rect">
+            <a:avLst/>
+          </a:prstGeom>
+          <a:noFill/>
+          <a:ln/>
+        </p:spPr>
+        <p:txBody>
+          <a:bodyPr wrap="square" lIns="0" tIns="0" rIns="0" bIns="0" rtlCol="0" anchor="ctr"/>
+          <a:lstStyle/>
+          <a:p>
+            <a:pPr marL="0" marR="0" lvl="0" indent="0" algn="ctr" defTabSz="914400" rtl="0" eaLnBrk="1" fontAlgn="auto" latinLnBrk="0" hangingPunct="1">
+              <a:lnSpc>
+                <a:spcPct val="90000"/>
+              </a:lnSpc>
+              <a:spcBef>
+                <a:spcPts val="0"/>
+              </a:spcBef>
+              <a:spcAft>
+                <a:spcPts val="0"/>
+              </a:spcAft>
+              <a:buClrTx/>
+              <a:buSzTx/>
+              <a:buFontTx/>
+              <a:buNone/>
+              <a:tabLst/>
+              <a:defRPr/>
+            </a:pPr>
+            <a:r>
+              <a:rPr kumimoji="0" lang="en-US" sz="900" b="1" i="0" u="none" strike="noStrike" kern="1200" cap="none" spc="0" normalizeH="0" baseline="0" noProof="0" dirty="0">
+                <a:ln>
+                  <a:noFill/>
+                </a:ln>
+                <a:solidFill>
+                  <a:srgbClr val="8FBBDD"/>
+                </a:solidFill>
+                <a:effectLst/>
+                <a:uLnTx/>
+                <a:uFillTx/>
+                <a:latin typeface="Calibri" pitchFamily="34" charset="0"/>
+                <a:ea typeface="Calibri" pitchFamily="34" charset="-122"/>
+                <a:cs typeface="Calibri" pitchFamily="34" charset="-120"/>
+              </a:rPr>
+              <a:t>Complex Exceptions (w/ Research)</a:t>
+            </a:r>
+            <a:endParaRPr kumimoji="0" lang="en-US" sz="900" b="0" i="0" u="none" strike="noStrike" kern="1200" cap="none" spc="0" normalizeH="0" baseline="0" noProof="0" dirty="0">
+              <a:ln>
+                <a:noFill/>
+              </a:ln>
+              <a:solidFill>
+                <a:prstClr val="black"/>
+              </a:solidFill>
+              <a:effectLst/>
+              <a:uLnTx/>
+              <a:uFillTx/>
+              <a:latin typeface="Calibri" panose="020F0502020204030204"/>
+              <a:ea typeface="+mn-ea"/>
+              <a:cs typeface="+mn-cs"/>
+            </a:endParaRPr>
+          </a:p>
+        </p:txBody>
+      </p:sp>
+      <p:sp>
+        <p:nvSpPr>
+          <p:cNvPr id="55" name="Shape 43"/>
+          <p:cNvSpPr/>
+          <p:nvPr/>
+        </p:nvSpPr>
+        <p:spPr>
+          <a:xfrm rot="5400000">
+            <a:off x="7764844" y="4983480"/>
+            <a:ext cx="1024128" cy="2011680"/>
+          </a:xfrm>
+          <a:prstGeom prst="trapezoid">
+            <a:avLst/>
+          </a:prstGeom>
+          <a:solidFill>
+            <a:srgbClr val="0F2A4E">
+              <a:alpha val="85000"/>
+            </a:srgbClr>
+          </a:solidFill>
+          <a:ln w="19050">
+            <a:solidFill>
+              <a:srgbClr val="5BB9EE"/>
+            </a:solidFill>
+            <a:prstDash val="solid"/>
+          </a:ln>
+          <a:effectLst>
+            <a:outerShdw blurRad="114300" dist="50800" dir="16200000" algn="bl" rotWithShape="0">
+              <a:srgbClr val="2E86C8">
+                <a:alpha val="55000"/>
+              </a:srgbClr>
+            </a:outerShdw>
+          </a:effectLst>
+        </p:spPr>
+        <p:txBody>
+          <a:bodyPr/>
+          <a:lstStyle/>
+          <a:p>
+            <a:pPr marL="0" marR="0" lvl="0" indent="0" algn="l" defTabSz="914400" rtl="0" eaLnBrk="1" fontAlgn="auto" latinLnBrk="0" hangingPunct="1">
+              <a:lnSpc>
+                <a:spcPct val="100000"/>
+              </a:lnSpc>
+              <a:spcBef>
+                <a:spcPts val="0"/>
+              </a:spcBef>
+              <a:spcAft>
+                <a:spcPts val="0"/>
+              </a:spcAft>
+              <a:buClrTx/>
+              <a:buSzTx/>
+              <a:buFontTx/>
+              <a:buNone/>
+              <a:tabLst/>
+              <a:defRPr/>
+            </a:pPr>
+            <a:endParaRPr kumimoji="0" lang="en-US" sz="1800" b="0" i="0" u="none" strike="noStrike" kern="1200" cap="none" spc="0" normalizeH="0" baseline="0" noProof="0">
+              <a:ln>
+                <a:noFill/>
+              </a:ln>
+              <a:solidFill>
+                <a:prstClr val="black"/>
+              </a:solidFill>
+              <a:effectLst/>
+              <a:uLnTx/>
+              <a:uFillTx/>
+              <a:latin typeface="Calibri" panose="020F0502020204030204"/>
+              <a:ea typeface="+mn-ea"/>
+              <a:cs typeface="+mn-cs"/>
+            </a:endParaRPr>
+          </a:p>
+        </p:txBody>
+      </p:sp>
+      <p:pic>
+        <p:nvPicPr>
+          <p:cNvPr id="56" name="Image 10" descr="/home/claude/icon_users.png"/>
+          <p:cNvPicPr>
+            <a:picLocks noChangeAspect="1"/>
+          </p:cNvPicPr>
+          <p:nvPr/>
+        </p:nvPicPr>
+        <p:blipFill>
+          <a:blip r:embed="rId6"/>
+          <a:stretch>
+            <a:fillRect/>
+          </a:stretch>
+        </p:blipFill>
+        <p:spPr>
+          <a:xfrm>
+            <a:off x="7499668" y="5806440"/>
+            <a:ext cx="365760" cy="365760"/>
+          </a:xfrm>
+          <a:prstGeom prst="rect">
+            <a:avLst/>
+          </a:prstGeom>
+        </p:spPr>
+      </p:pic>
+      <p:sp>
+        <p:nvSpPr>
+          <p:cNvPr id="57" name="Text 44"/>
+          <p:cNvSpPr/>
+          <p:nvPr/>
+        </p:nvSpPr>
+        <p:spPr>
+          <a:xfrm>
+            <a:off x="7883716" y="5532120"/>
+            <a:ext cx="1417320" cy="914400"/>
+          </a:xfrm>
+          <a:prstGeom prst="rect">
+            <a:avLst/>
+          </a:prstGeom>
+          <a:noFill/>
+          <a:ln/>
+        </p:spPr>
+        <p:txBody>
+          <a:bodyPr wrap="square" lIns="0" tIns="0" rIns="0" bIns="0" rtlCol="0" anchor="ctr"/>
+          <a:lstStyle/>
+          <a:p>
+            <a:pPr marL="0" marR="0" lvl="0" indent="0" algn="l" defTabSz="914400" rtl="0" eaLnBrk="1" fontAlgn="auto" latinLnBrk="0" hangingPunct="1">
+              <a:lnSpc>
+                <a:spcPct val="90000"/>
+              </a:lnSpc>
+              <a:spcBef>
+                <a:spcPts val="0"/>
+              </a:spcBef>
+              <a:spcAft>
+                <a:spcPts val="0"/>
+              </a:spcAft>
+              <a:buClrTx/>
+              <a:buSzTx/>
+              <a:buFontTx/>
+              <a:buNone/>
+              <a:tabLst/>
+              <a:defRPr/>
+            </a:pPr>
+            <a:r>
+              <a:rPr kumimoji="0" lang="en-US" sz="900" b="1" i="0" u="none" strike="noStrike" kern="1200" cap="none" spc="0" normalizeH="0" baseline="0" noProof="0" dirty="0">
+                <a:ln>
+                  <a:noFill/>
+                </a:ln>
+                <a:solidFill>
+                  <a:srgbClr val="EAF4FF"/>
+                </a:solidFill>
+                <a:effectLst/>
+                <a:uLnTx/>
+                <a:uFillTx/>
+                <a:latin typeface="Calibri" pitchFamily="34" charset="0"/>
+                <a:ea typeface="Calibri" pitchFamily="34" charset="-122"/>
+                <a:cs typeface="Calibri" pitchFamily="34" charset="-120"/>
+              </a:rPr>
+              <a:t>HUMAN EXCEPTION</a:t>
+            </a:r>
+            <a:endParaRPr kumimoji="0" lang="en-US" sz="900" b="0" i="0" u="none" strike="noStrike" kern="1200" cap="none" spc="0" normalizeH="0" baseline="0" noProof="0" dirty="0">
+              <a:ln>
+                <a:noFill/>
+              </a:ln>
+              <a:solidFill>
+                <a:prstClr val="black"/>
+              </a:solidFill>
+              <a:effectLst/>
+              <a:uLnTx/>
+              <a:uFillTx/>
+              <a:latin typeface="Calibri" panose="020F0502020204030204"/>
+              <a:ea typeface="+mn-ea"/>
+              <a:cs typeface="+mn-cs"/>
+            </a:endParaRPr>
+          </a:p>
+          <a:p>
+            <a:pPr marL="0" marR="0" lvl="0" indent="0" algn="l" defTabSz="914400" rtl="0" eaLnBrk="1" fontAlgn="auto" latinLnBrk="0" hangingPunct="1">
+              <a:lnSpc>
+                <a:spcPct val="90000"/>
+              </a:lnSpc>
+              <a:spcBef>
+                <a:spcPts val="0"/>
+              </a:spcBef>
+              <a:spcAft>
+                <a:spcPts val="0"/>
+              </a:spcAft>
+              <a:buClrTx/>
+              <a:buSzTx/>
+              <a:buFontTx/>
+              <a:buNone/>
+              <a:tabLst/>
+              <a:defRPr/>
+            </a:pPr>
+            <a:r>
+              <a:rPr kumimoji="0" lang="en-US" sz="900" b="1" i="0" u="none" strike="noStrike" kern="1200" cap="none" spc="0" normalizeH="0" baseline="0" noProof="0" dirty="0">
+                <a:ln>
+                  <a:noFill/>
+                </a:ln>
+                <a:solidFill>
+                  <a:srgbClr val="EAF4FF"/>
+                </a:solidFill>
+                <a:effectLst/>
+                <a:uLnTx/>
+                <a:uFillTx/>
+                <a:latin typeface="Calibri" pitchFamily="34" charset="0"/>
+                <a:ea typeface="Calibri" pitchFamily="34" charset="-122"/>
+                <a:cs typeface="Calibri" pitchFamily="34" charset="-120"/>
+              </a:rPr>
+              <a:t>QUEUE</a:t>
+            </a:r>
+            <a:endParaRPr kumimoji="0" lang="en-US" sz="900" b="0" i="0" u="none" strike="noStrike" kern="1200" cap="none" spc="0" normalizeH="0" baseline="0" noProof="0" dirty="0">
+              <a:ln>
+                <a:noFill/>
+              </a:ln>
+              <a:solidFill>
+                <a:prstClr val="black"/>
+              </a:solidFill>
+              <a:effectLst/>
+              <a:uLnTx/>
+              <a:uFillTx/>
+              <a:latin typeface="Calibri" panose="020F0502020204030204"/>
+              <a:ea typeface="+mn-ea"/>
+              <a:cs typeface="+mn-cs"/>
+            </a:endParaRPr>
+          </a:p>
+        </p:txBody>
+      </p:sp>
+      <p:sp>
+        <p:nvSpPr>
+          <p:cNvPr id="58" name="Shape 45"/>
+          <p:cNvSpPr/>
+          <p:nvPr/>
+        </p:nvSpPr>
+        <p:spPr>
+          <a:xfrm>
+            <a:off x="9282748" y="5870448"/>
+            <a:ext cx="292608" cy="237744"/>
+          </a:xfrm>
+          <a:prstGeom prst="rightArrow">
+            <a:avLst/>
+          </a:prstGeom>
+          <a:solidFill>
+            <a:srgbClr val="4FA8E0"/>
+          </a:solidFill>
+          <a:ln/>
+        </p:spPr>
+        <p:txBody>
+          <a:bodyPr/>
+          <a:lstStyle/>
+          <a:p>
+            <a:pPr marL="0" marR="0" lvl="0" indent="0" algn="l" defTabSz="914400" rtl="0" eaLnBrk="1" fontAlgn="auto" latinLnBrk="0" hangingPunct="1">
+              <a:lnSpc>
+                <a:spcPct val="100000"/>
+              </a:lnSpc>
+              <a:spcBef>
+                <a:spcPts val="0"/>
+              </a:spcBef>
+              <a:spcAft>
+                <a:spcPts val="0"/>
+              </a:spcAft>
+              <a:buClrTx/>
+              <a:buSzTx/>
+              <a:buFontTx/>
+              <a:buNone/>
+              <a:tabLst/>
+              <a:defRPr/>
+            </a:pPr>
+            <a:endParaRPr kumimoji="0" lang="en-US" sz="1800" b="0" i="0" u="none" strike="noStrike" kern="1200" cap="none" spc="0" normalizeH="0" baseline="0" noProof="0">
+              <a:ln>
+                <a:noFill/>
+              </a:ln>
+              <a:solidFill>
+                <a:prstClr val="black"/>
+              </a:solidFill>
+              <a:effectLst/>
+              <a:uLnTx/>
+              <a:uFillTx/>
+              <a:latin typeface="Calibri" panose="020F0502020204030204"/>
+              <a:ea typeface="+mn-ea"/>
+              <a:cs typeface="+mn-cs"/>
+            </a:endParaRPr>
+          </a:p>
+        </p:txBody>
+      </p:sp>
+      <p:sp>
+        <p:nvSpPr>
+          <p:cNvPr id="59" name="Shape 46"/>
+          <p:cNvSpPr/>
+          <p:nvPr/>
+        </p:nvSpPr>
+        <p:spPr>
+          <a:xfrm>
+            <a:off x="9602788" y="5559552"/>
+            <a:ext cx="2194560" cy="859536"/>
+          </a:xfrm>
+          <a:prstGeom prst="roundRect">
+            <a:avLst>
+              <a:gd name="adj" fmla="val 7447"/>
+            </a:avLst>
+          </a:prstGeom>
+          <a:solidFill>
+            <a:srgbClr val="0F2A4E"/>
+          </a:solidFill>
+          <a:ln w="19050">
+            <a:solidFill>
+              <a:srgbClr val="5BB9EE"/>
+            </a:solidFill>
+            <a:prstDash val="solid"/>
+          </a:ln>
+          <a:effectLst>
+            <a:outerShdw blurRad="114300" dist="50800" dir="16200000" algn="bl" rotWithShape="0">
+              <a:srgbClr val="2E86C8">
+                <a:alpha val="55000"/>
+              </a:srgbClr>
+            </a:outerShdw>
+          </a:effectLst>
+        </p:spPr>
+        <p:txBody>
+          <a:bodyPr/>
+          <a:lstStyle/>
+          <a:p>
+            <a:pPr marL="0" marR="0" lvl="0" indent="0" algn="l" defTabSz="914400" rtl="0" eaLnBrk="1" fontAlgn="auto" latinLnBrk="0" hangingPunct="1">
+              <a:lnSpc>
+                <a:spcPct val="100000"/>
+              </a:lnSpc>
+              <a:spcBef>
+                <a:spcPts val="0"/>
+              </a:spcBef>
+              <a:spcAft>
+                <a:spcPts val="0"/>
+              </a:spcAft>
+              <a:buClrTx/>
+              <a:buSzTx/>
+              <a:buFontTx/>
+              <a:buNone/>
+              <a:tabLst/>
+              <a:defRPr/>
+            </a:pPr>
+            <a:endParaRPr kumimoji="0" lang="en-US" sz="1800" b="0" i="0" u="none" strike="noStrike" kern="1200" cap="none" spc="0" normalizeH="0" baseline="0" noProof="0">
+              <a:ln>
+                <a:noFill/>
+              </a:ln>
+              <a:solidFill>
+                <a:prstClr val="black"/>
+              </a:solidFill>
+              <a:effectLst/>
+              <a:uLnTx/>
+              <a:uFillTx/>
+              <a:latin typeface="Calibri" panose="020F0502020204030204"/>
+              <a:ea typeface="+mn-ea"/>
+              <a:cs typeface="+mn-cs"/>
+            </a:endParaRPr>
+          </a:p>
+        </p:txBody>
+      </p:sp>
+      <p:pic>
+        <p:nvPicPr>
+          <p:cNvPr id="60" name="Image 11" descr="/home/claude/icon_strat.png"/>
+          <p:cNvPicPr>
+            <a:picLocks noChangeAspect="1"/>
+          </p:cNvPicPr>
+          <p:nvPr/>
+        </p:nvPicPr>
+        <p:blipFill>
+          <a:blip r:embed="rId10"/>
+          <a:stretch>
+            <a:fillRect/>
+          </a:stretch>
+        </p:blipFill>
+        <p:spPr>
+          <a:xfrm>
+            <a:off x="9721660" y="5760720"/>
+            <a:ext cx="457200" cy="457200"/>
+          </a:xfrm>
+          <a:prstGeom prst="rect">
+            <a:avLst/>
+          </a:prstGeom>
+        </p:spPr>
+      </p:pic>
+      <p:sp>
+        <p:nvSpPr>
+          <p:cNvPr id="61" name="Text 47"/>
+          <p:cNvSpPr/>
+          <p:nvPr/>
+        </p:nvSpPr>
+        <p:spPr>
+          <a:xfrm>
+            <a:off x="10224580" y="5559552"/>
+            <a:ext cx="1536192" cy="859536"/>
+          </a:xfrm>
+          <a:prstGeom prst="rect">
+            <a:avLst/>
+          </a:prstGeom>
+          <a:noFill/>
+          <a:ln/>
+        </p:spPr>
+        <p:txBody>
+          <a:bodyPr wrap="square" lIns="25400" tIns="25400" rIns="25400" bIns="25400" rtlCol="0" anchor="ctr"/>
+          <a:lstStyle/>
+          <a:p>
+            <a:pPr marL="0" marR="0" lvl="0" indent="0" algn="l" defTabSz="914400" rtl="0" eaLnBrk="1" fontAlgn="auto" latinLnBrk="0" hangingPunct="1">
+              <a:lnSpc>
+                <a:spcPct val="90000"/>
+              </a:lnSpc>
+              <a:spcBef>
+                <a:spcPts val="0"/>
+              </a:spcBef>
+              <a:spcAft>
+                <a:spcPts val="0"/>
+              </a:spcAft>
+              <a:buClrTx/>
+              <a:buSzTx/>
+              <a:buFontTx/>
+              <a:buNone/>
+              <a:tabLst/>
+              <a:defRPr/>
+            </a:pPr>
+            <a:r>
+              <a:rPr kumimoji="0" lang="en-US" sz="1000" b="1" i="0" u="none" strike="noStrike" kern="1200" cap="none" spc="0" normalizeH="0" baseline="0" noProof="0" dirty="0">
+                <a:ln>
+                  <a:noFill/>
+                </a:ln>
+                <a:solidFill>
+                  <a:srgbClr val="EAF4FF"/>
+                </a:solidFill>
+                <a:effectLst/>
+                <a:uLnTx/>
+                <a:uFillTx/>
+                <a:latin typeface="Calibri" pitchFamily="34" charset="0"/>
+                <a:ea typeface="Calibri" pitchFamily="34" charset="-122"/>
+                <a:cs typeface="Calibri" pitchFamily="34" charset="-120"/>
+              </a:rPr>
+              <a:t>STRATEGIC HUMAN INTERVENTION</a:t>
+            </a:r>
+            <a:endParaRPr kumimoji="0" lang="en-US" sz="1000" b="0" i="0" u="none" strike="noStrike" kern="1200" cap="none" spc="0" normalizeH="0" baseline="0" noProof="0" dirty="0">
+              <a:ln>
+                <a:noFill/>
+              </a:ln>
+              <a:solidFill>
+                <a:prstClr val="black"/>
+              </a:solidFill>
+              <a:effectLst/>
+              <a:uLnTx/>
+              <a:uFillTx/>
+              <a:latin typeface="Calibri" panose="020F0502020204030204"/>
+              <a:ea typeface="+mn-ea"/>
+              <a:cs typeface="+mn-cs"/>
+            </a:endParaRPr>
+          </a:p>
+        </p:txBody>
+      </p:sp>
+      <p:sp>
+        <p:nvSpPr>
+          <p:cNvPr id="65" name="Shape 40">
+            <a:extLst>
+              <a:ext uri="{FF2B5EF4-FFF2-40B4-BE49-F238E27FC236}">
+                <a16:creationId xmlns:a16="http://schemas.microsoft.com/office/drawing/2014/main" id="{243C1199-23D0-E1EC-B322-941E9D18E269}"/>
+              </a:ext>
+            </a:extLst>
+          </p:cNvPr>
+          <p:cNvSpPr/>
+          <p:nvPr/>
+        </p:nvSpPr>
+        <p:spPr>
+          <a:xfrm>
+            <a:off x="4488244" y="6022848"/>
+            <a:ext cx="2593086" cy="237744"/>
+          </a:xfrm>
+          <a:prstGeom prst="rightArrow">
+            <a:avLst/>
+          </a:prstGeom>
+          <a:solidFill>
+            <a:srgbClr val="FFC000"/>
+          </a:solidFill>
+          <a:ln/>
+        </p:spPr>
+        <p:txBody>
+          <a:bodyPr/>
+          <a:lstStyle/>
+          <a:p>
+            <a:pPr marL="0" marR="0" lvl="0" indent="0" algn="l" defTabSz="914400" rtl="0" eaLnBrk="1" fontAlgn="auto" latinLnBrk="0" hangingPunct="1">
+              <a:lnSpc>
+                <a:spcPct val="100000"/>
+              </a:lnSpc>
+              <a:spcBef>
+                <a:spcPts val="0"/>
+              </a:spcBef>
+              <a:spcAft>
+                <a:spcPts val="0"/>
+              </a:spcAft>
+              <a:buClrTx/>
+              <a:buSzTx/>
+              <a:buFontTx/>
+              <a:buNone/>
+              <a:tabLst/>
+              <a:defRPr/>
+            </a:pPr>
+            <a:endParaRPr kumimoji="0" lang="en-US" sz="1800" b="0" i="0" u="none" strike="noStrike" kern="1200" cap="none" spc="0" normalizeH="0" baseline="0" noProof="0">
+              <a:ln>
+                <a:noFill/>
+              </a:ln>
+              <a:solidFill>
+                <a:prstClr val="black"/>
+              </a:solidFill>
+              <a:effectLst/>
+              <a:uLnTx/>
+              <a:uFillTx/>
+              <a:latin typeface="Calibri" panose="020F0502020204030204"/>
+              <a:ea typeface="+mn-ea"/>
+              <a:cs typeface="+mn-cs"/>
+            </a:endParaRPr>
+          </a:p>
+        </p:txBody>
+      </p:sp>
+      <p:sp>
+        <p:nvSpPr>
+          <p:cNvPr id="67" name="Shape 39">
+            <a:extLst>
+              <a:ext uri="{FF2B5EF4-FFF2-40B4-BE49-F238E27FC236}">
+                <a16:creationId xmlns:a16="http://schemas.microsoft.com/office/drawing/2014/main" id="{65B486F1-4376-A708-8110-13F051DF9B1A}"/>
+              </a:ext>
+            </a:extLst>
+          </p:cNvPr>
+          <p:cNvSpPr/>
+          <p:nvPr/>
+        </p:nvSpPr>
+        <p:spPr>
+          <a:xfrm>
+            <a:off x="2303717" y="5190744"/>
+            <a:ext cx="0" cy="667512"/>
+          </a:xfrm>
+          <a:prstGeom prst="line">
+            <a:avLst/>
+          </a:prstGeom>
+          <a:noFill/>
+          <a:ln w="25400">
+            <a:solidFill>
+              <a:srgbClr val="FFC000"/>
+            </a:solidFill>
+            <a:prstDash val="solid"/>
+          </a:ln>
+        </p:spPr>
+        <p:txBody>
+          <a:bodyPr/>
+          <a:lstStyle/>
+          <a:p>
+            <a:pPr marL="0" marR="0" lvl="0" indent="0" algn="l" defTabSz="914400" rtl="0" eaLnBrk="1" fontAlgn="auto" latinLnBrk="0" hangingPunct="1">
+              <a:lnSpc>
+                <a:spcPct val="100000"/>
+              </a:lnSpc>
+              <a:spcBef>
+                <a:spcPts val="0"/>
+              </a:spcBef>
+              <a:spcAft>
+                <a:spcPts val="0"/>
+              </a:spcAft>
+              <a:buClrTx/>
+              <a:buSzTx/>
+              <a:buFontTx/>
+              <a:buNone/>
+              <a:tabLst/>
+              <a:defRPr/>
+            </a:pPr>
+            <a:endParaRPr kumimoji="0" lang="en-US" sz="1800" b="0" i="0" u="none" strike="noStrike" kern="1200" cap="none" spc="0" normalizeH="0" baseline="0" noProof="0">
+              <a:ln>
+                <a:noFill/>
+              </a:ln>
+              <a:solidFill>
+                <a:prstClr val="black"/>
+              </a:solidFill>
+              <a:effectLst/>
+              <a:uLnTx/>
+              <a:uFillTx/>
+              <a:latin typeface="Calibri" panose="020F0502020204030204"/>
+              <a:ea typeface="+mn-ea"/>
+              <a:cs typeface="+mn-cs"/>
+            </a:endParaRPr>
+          </a:p>
+        </p:txBody>
+      </p:sp>
+      <p:sp>
+        <p:nvSpPr>
+          <p:cNvPr id="69" name="Shape 40">
+            <a:extLst>
+              <a:ext uri="{FF2B5EF4-FFF2-40B4-BE49-F238E27FC236}">
+                <a16:creationId xmlns:a16="http://schemas.microsoft.com/office/drawing/2014/main" id="{941D0095-2D6A-C8F5-6DFB-F38AE841A191}"/>
+              </a:ext>
+            </a:extLst>
+          </p:cNvPr>
+          <p:cNvSpPr/>
+          <p:nvPr/>
+        </p:nvSpPr>
+        <p:spPr>
+          <a:xfrm>
+            <a:off x="2292670" y="5687568"/>
+            <a:ext cx="641350" cy="237744"/>
+          </a:xfrm>
+          <a:prstGeom prst="rightArrow">
+            <a:avLst/>
+          </a:prstGeom>
+          <a:solidFill>
+            <a:srgbClr val="FFC000"/>
+          </a:solidFill>
+          <a:ln/>
+        </p:spPr>
+        <p:txBody>
+          <a:bodyPr/>
+          <a:lstStyle/>
+          <a:p>
+            <a:pPr marL="0" marR="0" lvl="0" indent="0" algn="l" defTabSz="914400" rtl="0" eaLnBrk="1" fontAlgn="auto" latinLnBrk="0" hangingPunct="1">
+              <a:lnSpc>
+                <a:spcPct val="100000"/>
+              </a:lnSpc>
+              <a:spcBef>
+                <a:spcPts val="0"/>
+              </a:spcBef>
+              <a:spcAft>
+                <a:spcPts val="0"/>
+              </a:spcAft>
+              <a:buClrTx/>
+              <a:buSzTx/>
+              <a:buFontTx/>
+              <a:buNone/>
+              <a:tabLst/>
+              <a:defRPr/>
+            </a:pPr>
+            <a:endParaRPr kumimoji="0" lang="en-US" sz="1800" b="0" i="0" u="none" strike="noStrike" kern="1200" cap="none" spc="0" normalizeH="0" baseline="0" noProof="0">
+              <a:ln>
+                <a:noFill/>
+              </a:ln>
+              <a:solidFill>
+                <a:prstClr val="black"/>
+              </a:solidFill>
+              <a:effectLst/>
+              <a:uLnTx/>
+              <a:uFillTx/>
+              <a:latin typeface="Calibri" panose="020F0502020204030204"/>
+              <a:ea typeface="+mn-ea"/>
+              <a:cs typeface="+mn-cs"/>
+            </a:endParaRPr>
+          </a:p>
+        </p:txBody>
+      </p:sp>
+      <p:sp>
+        <p:nvSpPr>
+          <p:cNvPr id="15" name="Shape 32">
+            <a:extLst>
+              <a:ext uri="{FF2B5EF4-FFF2-40B4-BE49-F238E27FC236}">
+                <a16:creationId xmlns:a16="http://schemas.microsoft.com/office/drawing/2014/main" id="{D706166F-BA69-E7A6-3709-769ED570AC53}"/>
+              </a:ext>
+            </a:extLst>
+          </p:cNvPr>
+          <p:cNvSpPr/>
+          <p:nvPr/>
+        </p:nvSpPr>
+        <p:spPr>
+          <a:xfrm>
+            <a:off x="2518707" y="3045350"/>
+            <a:ext cx="9004321" cy="536050"/>
+          </a:xfrm>
+          <a:prstGeom prst="rightArrow">
+            <a:avLst/>
+          </a:prstGeom>
+          <a:solidFill>
+            <a:srgbClr val="10375F">
+              <a:alpha val="92000"/>
+            </a:srgbClr>
+          </a:solidFill>
+          <a:ln w="19050">
+            <a:solidFill>
+              <a:srgbClr val="5BB9EE"/>
+            </a:solidFill>
+            <a:prstDash val="solid"/>
+          </a:ln>
+          <a:effectLst>
+            <a:outerShdw blurRad="139700" dist="50800" dir="16200000" algn="bl" rotWithShape="0">
+              <a:srgbClr val="2E86C8">
+                <a:alpha val="55000"/>
+              </a:srgbClr>
+            </a:outerShdw>
+          </a:effectLst>
+        </p:spPr>
+        <p:txBody>
+          <a:bodyPr/>
+          <a:lstStyle/>
+          <a:p>
+            <a:pPr marL="0" marR="0" lvl="0" indent="0" algn="l" defTabSz="914400" rtl="0" eaLnBrk="1" fontAlgn="auto" latinLnBrk="0" hangingPunct="1">
+              <a:lnSpc>
+                <a:spcPct val="100000"/>
+              </a:lnSpc>
+              <a:spcBef>
+                <a:spcPts val="0"/>
+              </a:spcBef>
+              <a:spcAft>
+                <a:spcPts val="0"/>
+              </a:spcAft>
+              <a:buClrTx/>
+              <a:buSzTx/>
+              <a:buFontTx/>
+              <a:buNone/>
+              <a:tabLst/>
+              <a:defRPr/>
+            </a:pPr>
+            <a:endParaRPr kumimoji="0" lang="en-US" sz="1800" b="0" i="0" u="none" strike="noStrike" kern="1200" cap="none" spc="0" normalizeH="0" baseline="0" noProof="0">
+              <a:ln>
+                <a:noFill/>
+              </a:ln>
+              <a:solidFill>
+                <a:prstClr val="black"/>
+              </a:solidFill>
+              <a:effectLst/>
+              <a:uLnTx/>
+              <a:uFillTx/>
+              <a:latin typeface="Calibri" panose="020F0502020204030204"/>
+              <a:ea typeface="+mn-ea"/>
+              <a:cs typeface="+mn-cs"/>
+            </a:endParaRPr>
+          </a:p>
+        </p:txBody>
+      </p:sp>
+      <p:sp>
+        <p:nvSpPr>
+          <p:cNvPr id="63" name="TextBox 62">
+            <a:extLst>
+              <a:ext uri="{FF2B5EF4-FFF2-40B4-BE49-F238E27FC236}">
+                <a16:creationId xmlns:a16="http://schemas.microsoft.com/office/drawing/2014/main" id="{76DB04D2-3C74-E019-B32E-FBE632350A12}"/>
+              </a:ext>
+            </a:extLst>
+          </p:cNvPr>
           <p:cNvSpPr txBox="1"/>
           <p:nvPr/>
         </p:nvSpPr>
         <p:spPr>
           <a:xfrm>
-            <a:off x="822960" y="685800"/>
-            <a:ext cx="10515600" cy="292608"/>
+            <a:off x="6581157" y="3200400"/>
+            <a:ext cx="2120347" cy="230832"/>
           </a:xfrm>
           <a:prstGeom prst="rect">
             <a:avLst/>
@@ -6326,501 +10493,273 @@
           </a:bodyPr>
           <a:lstStyle/>
           <a:p>
-            <a:pPr algn="l">
+            <a:pPr marL="0" marR="0" lvl="0" indent="0" algn="l" defTabSz="914400" rtl="0" eaLnBrk="1" fontAlgn="auto" latinLnBrk="0" hangingPunct="1">
+              <a:lnSpc>
+                <a:spcPct val="90000"/>
+              </a:lnSpc>
               <a:spcBef>
                 <a:spcPts val="0"/>
               </a:spcBef>
               <a:spcAft>
                 <a:spcPts val="0"/>
               </a:spcAft>
+              <a:buClrTx/>
+              <a:buSzTx/>
+              <a:buFontTx/>
+              <a:buNone/>
+              <a:tabLst/>
+              <a:defRPr/>
             </a:pPr>
             <a:r>
-              <a:rPr sz="1200" b="1" i="0">
-                <a:solidFill>
-                  <a:srgbClr val="00785A"/>
-                </a:solidFill>
-                <a:latin typeface="Segoe UI"/>
-              </a:rPr>
-              <a:t>AGENT MESH</a:t>
-            </a:r>
-          </a:p>
-        </p:txBody>
-      </p:sp>
-      <p:sp>
-        <p:nvSpPr>
-          <p:cNvPr id="3" name="TextBox 2"/>
-          <p:cNvSpPr txBox="1"/>
-          <p:nvPr/>
-        </p:nvSpPr>
-        <p:spPr>
-          <a:xfrm>
-            <a:off x="822960" y="996696"/>
-            <a:ext cx="10515600" cy="658368"/>
+              <a:rPr kumimoji="0" lang="en-US" sz="1000" b="1" i="0" u="none" strike="noStrike" kern="1200" cap="none" spc="0" normalizeH="0" baseline="0" noProof="0" dirty="0">
+                <a:ln>
+                  <a:noFill/>
+                </a:ln>
+                <a:solidFill>
+                  <a:srgbClr val="EAF4FF"/>
+                </a:solidFill>
+                <a:effectLst/>
+                <a:uLnTx/>
+                <a:uFillTx/>
+                <a:latin typeface="Calibri" pitchFamily="34" charset="0"/>
+                <a:ea typeface="Calibri" pitchFamily="34" charset="-122"/>
+                <a:cs typeface="Calibri" pitchFamily="34" charset="-120"/>
+              </a:rPr>
+              <a:t>AUTO-EXECUTED  </a:t>
+            </a:r>
+            <a:r>
+              <a:rPr kumimoji="0" lang="en-US" sz="1000" b="0" i="0" u="none" strike="noStrike" kern="1200" cap="none" spc="0" normalizeH="0" baseline="0" noProof="0" dirty="0">
+                <a:ln>
+                  <a:noFill/>
+                </a:ln>
+                <a:solidFill>
+                  <a:srgbClr val="6FC4F2"/>
+                </a:solidFill>
+                <a:effectLst/>
+                <a:uLnTx/>
+                <a:uFillTx/>
+                <a:latin typeface="Calibri" pitchFamily="34" charset="0"/>
+                <a:ea typeface="Calibri" pitchFamily="34" charset="-122"/>
+                <a:cs typeface="Calibri" pitchFamily="34" charset="-120"/>
+              </a:rPr>
+              <a:t>(Example: ~50%)</a:t>
+            </a:r>
+            <a:endParaRPr kumimoji="0" lang="en-US" sz="1000" b="0" i="0" u="none" strike="noStrike" kern="1200" cap="none" spc="0" normalizeH="0" baseline="0" noProof="0" dirty="0">
+              <a:ln>
+                <a:noFill/>
+              </a:ln>
+              <a:solidFill>
+                <a:srgbClr val="6FC4F2"/>
+              </a:solidFill>
+              <a:effectLst/>
+              <a:uLnTx/>
+              <a:uFillTx/>
+              <a:latin typeface="Calibri" panose="020F0502020204030204"/>
+              <a:ea typeface="+mn-ea"/>
+              <a:cs typeface="+mn-cs"/>
+            </a:endParaRPr>
+          </a:p>
+        </p:txBody>
+      </p:sp>
+      <p:sp>
+        <p:nvSpPr>
+          <p:cNvPr id="27" name="Shape 18">
+            <a:extLst>
+              <a:ext uri="{FF2B5EF4-FFF2-40B4-BE49-F238E27FC236}">
+                <a16:creationId xmlns:a16="http://schemas.microsoft.com/office/drawing/2014/main" id="{B070FF0D-59FB-DB52-A761-C7CC12BB6096}"/>
+              </a:ext>
+            </a:extLst>
+          </p:cNvPr>
+          <p:cNvSpPr/>
+          <p:nvPr/>
+        </p:nvSpPr>
+        <p:spPr>
+          <a:xfrm rot="5400000">
+            <a:off x="6507544" y="4133088"/>
+            <a:ext cx="0" cy="640080"/>
+          </a:xfrm>
+          <a:prstGeom prst="line">
+            <a:avLst/>
+          </a:prstGeom>
+          <a:noFill/>
+          <a:ln w="19050">
+            <a:solidFill>
+              <a:srgbClr val="4FA8E0"/>
+            </a:solidFill>
+            <a:prstDash val="solid"/>
+          </a:ln>
+        </p:spPr>
+        <p:txBody>
+          <a:bodyPr/>
+          <a:lstStyle/>
+          <a:p>
+            <a:pPr marL="0" marR="0" lvl="0" indent="0" algn="l" defTabSz="914400" rtl="0" eaLnBrk="1" fontAlgn="auto" latinLnBrk="0" hangingPunct="1">
+              <a:lnSpc>
+                <a:spcPct val="100000"/>
+              </a:lnSpc>
+              <a:spcBef>
+                <a:spcPts val="0"/>
+              </a:spcBef>
+              <a:spcAft>
+                <a:spcPts val="0"/>
+              </a:spcAft>
+              <a:buClrTx/>
+              <a:buSzTx/>
+              <a:buFontTx/>
+              <a:buNone/>
+              <a:tabLst/>
+              <a:defRPr/>
+            </a:pPr>
+            <a:endParaRPr kumimoji="0" lang="en-US" sz="1800" b="0" i="0" u="none" strike="noStrike" kern="1200" cap="none" spc="0" normalizeH="0" baseline="0" noProof="0">
+              <a:ln>
+                <a:noFill/>
+              </a:ln>
+              <a:solidFill>
+                <a:prstClr val="black"/>
+              </a:solidFill>
+              <a:effectLst/>
+              <a:uLnTx/>
+              <a:uFillTx/>
+              <a:latin typeface="Calibri" panose="020F0502020204030204"/>
+              <a:ea typeface="+mn-ea"/>
+              <a:cs typeface="+mn-cs"/>
+            </a:endParaRPr>
+          </a:p>
+        </p:txBody>
+      </p:sp>
+      <p:pic>
+        <p:nvPicPr>
+          <p:cNvPr id="49" name="Image 9" descr="/home/claude/icon_brain.png">
+            <a:extLst>
+              <a:ext uri="{FF2B5EF4-FFF2-40B4-BE49-F238E27FC236}">
+                <a16:creationId xmlns:a16="http://schemas.microsoft.com/office/drawing/2014/main" id="{38CD5D56-51CC-3D54-0B7A-E56DA29C0293}"/>
+              </a:ext>
+            </a:extLst>
+          </p:cNvPr>
+          <p:cNvPicPr>
+            <a:picLocks noChangeAspect="1"/>
+          </p:cNvPicPr>
+          <p:nvPr/>
+        </p:nvPicPr>
+        <p:blipFill>
+          <a:blip r:embed="rId11"/>
+          <a:stretch>
+            <a:fillRect/>
+          </a:stretch>
+        </p:blipFill>
+        <p:spPr>
+          <a:xfrm>
+            <a:off x="3076661" y="5514340"/>
+            <a:ext cx="300471" cy="329184"/>
           </a:xfrm>
           <a:prstGeom prst="rect">
             <a:avLst/>
           </a:prstGeom>
+        </p:spPr>
+      </p:pic>
+      <p:sp>
+        <p:nvSpPr>
+          <p:cNvPr id="50" name="TextBox 49">
+            <a:extLst>
+              <a:ext uri="{FF2B5EF4-FFF2-40B4-BE49-F238E27FC236}">
+                <a16:creationId xmlns:a16="http://schemas.microsoft.com/office/drawing/2014/main" id="{0DCA7C0D-D61A-63A1-A946-F26AFCDDCCFA}"/>
+              </a:ext>
+            </a:extLst>
+          </p:cNvPr>
+          <p:cNvSpPr txBox="1"/>
+          <p:nvPr/>
+        </p:nvSpPr>
+        <p:spPr>
+          <a:xfrm>
+            <a:off x="10928668" y="-176201"/>
+            <a:ext cx="984757" cy="1200329"/>
+          </a:xfrm>
+          <a:prstGeom prst="rect">
+            <a:avLst/>
+          </a:prstGeom>
           <a:noFill/>
         </p:spPr>
         <p:txBody>
-          <a:bodyPr wrap="square">
+          <a:bodyPr wrap="square" rtlCol="0">
             <a:spAutoFit/>
           </a:bodyPr>
           <a:lstStyle/>
           <a:p>
-            <a:pPr algn="l">
-              <a:spcBef>
-                <a:spcPts val="0"/>
-              </a:spcBef>
-              <a:spcAft>
-                <a:spcPts val="0"/>
-              </a:spcAft>
-            </a:pPr>
-            <a:r>
-              <a:rPr sz="3200" b="1" i="0">
-                <a:solidFill>
-                  <a:srgbClr val="093B5F"/>
-                </a:solidFill>
-                <a:latin typeface="Segoe UI"/>
-              </a:rPr>
-              <a:t>The last mile</a:t>
-            </a:r>
-          </a:p>
-        </p:txBody>
-      </p:sp>
-      <p:sp>
-        <p:nvSpPr>
-          <p:cNvPr id="4" name="Rectangle 3"/>
-          <p:cNvSpPr/>
-          <p:nvPr/>
-        </p:nvSpPr>
-        <p:spPr>
-          <a:xfrm>
-            <a:off x="822960" y="1709928"/>
-            <a:ext cx="10515600" cy="9525"/>
+            <a:r>
+              <a:rPr lang="en-US" sz="7200" dirty="0">
+                <a:solidFill>
+                  <a:srgbClr val="8AD6FF"/>
+                </a:solidFill>
+              </a:rPr>
+              <a:t>∞</a:t>
+            </a:r>
+          </a:p>
+        </p:txBody>
+      </p:sp>
+      <p:pic>
+        <p:nvPicPr>
+          <p:cNvPr id="64" name="Image 9" descr="/home/claude/icon_brain.png">
+            <a:extLst>
+              <a:ext uri="{FF2B5EF4-FFF2-40B4-BE49-F238E27FC236}">
+                <a16:creationId xmlns:a16="http://schemas.microsoft.com/office/drawing/2014/main" id="{A4D94555-7BB3-7A47-9A28-0E1D748AB778}"/>
+              </a:ext>
+            </a:extLst>
+          </p:cNvPr>
+          <p:cNvPicPr>
+            <a:picLocks noChangeAspect="1"/>
+          </p:cNvPicPr>
+          <p:nvPr/>
+        </p:nvPicPr>
+        <p:blipFill>
+          <a:blip r:embed="rId11"/>
+          <a:stretch>
+            <a:fillRect/>
+          </a:stretch>
+        </p:blipFill>
+        <p:spPr>
+          <a:xfrm>
+            <a:off x="3509087" y="5701538"/>
+            <a:ext cx="300471" cy="329184"/>
           </a:xfrm>
           <a:prstGeom prst="rect">
             <a:avLst/>
           </a:prstGeom>
-          <a:solidFill>
-            <a:srgbClr val="D8E1E8"/>
-          </a:solidFill>
-          <a:ln>
-            <a:noFill/>
-          </a:ln>
-          <a:effectLst/>
-        </p:spPr>
-        <p:style>
-          <a:lnRef idx="1">
-            <a:schemeClr val="accent1"/>
-          </a:lnRef>
-          <a:fillRef idx="3">
-            <a:schemeClr val="accent1"/>
-          </a:fillRef>
-          <a:effectRef idx="2">
-            <a:schemeClr val="accent1"/>
-          </a:effectRef>
-          <a:fontRef idx="minor">
-            <a:schemeClr val="lt1"/>
-          </a:fontRef>
-        </p:style>
-        <p:txBody>
-          <a:bodyPr rtlCol="0" anchor="ctr"/>
-          <a:lstStyle/>
-          <a:p>
-            <a:pPr algn="ctr"/>
-            <a:endParaRPr/>
-          </a:p>
-        </p:txBody>
-      </p:sp>
-      <p:sp>
-        <p:nvSpPr>
-          <p:cNvPr id="5" name="Rounded Rectangle 4"/>
-          <p:cNvSpPr/>
-          <p:nvPr/>
-        </p:nvSpPr>
-        <p:spPr>
-          <a:xfrm>
-            <a:off x="822960" y="1856232"/>
-            <a:ext cx="566928" cy="274320"/>
-          </a:xfrm>
-          <a:prstGeom prst="roundRect">
-            <a:avLst/>
-          </a:prstGeom>
-          <a:solidFill>
-            <a:srgbClr val="E4F7F0"/>
-          </a:solidFill>
-          <a:ln w="9525">
-            <a:solidFill>
-              <a:srgbClr val="00785A"/>
-            </a:solidFill>
-          </a:ln>
-          <a:effectLst/>
-        </p:spPr>
-        <p:style>
-          <a:lnRef idx="1">
-            <a:schemeClr val="accent1"/>
-          </a:lnRef>
-          <a:fillRef idx="3">
-            <a:schemeClr val="accent1"/>
-          </a:fillRef>
-          <a:effectRef idx="2">
-            <a:schemeClr val="accent1"/>
-          </a:effectRef>
-          <a:fontRef idx="minor">
-            <a:schemeClr val="lt1"/>
-          </a:fontRef>
-        </p:style>
-        <p:txBody>
-          <a:bodyPr wrap="none" lIns="0" rIns="0" rtlCol="0" anchor="ctr"/>
-          <a:lstStyle/>
-          <a:p>
-            <a:pPr algn="ctr"/>
-            <a:r>
-              <a:rPr sz="1100" b="1">
-                <a:solidFill>
-                  <a:srgbClr val="00785A"/>
-                </a:solidFill>
-                <a:latin typeface="Segoe UI"/>
-              </a:rPr>
-              <a:t>R5</a:t>
-            </a:r>
-          </a:p>
-        </p:txBody>
-      </p:sp>
-      <p:sp>
-        <p:nvSpPr>
-          <p:cNvPr id="6" name="TextBox 5"/>
-          <p:cNvSpPr txBox="1"/>
-          <p:nvPr/>
-        </p:nvSpPr>
-        <p:spPr>
-          <a:xfrm>
-            <a:off x="822960" y="2505456"/>
-            <a:ext cx="10515600" cy="406400"/>
+        </p:spPr>
+      </p:pic>
+      <p:pic>
+        <p:nvPicPr>
+          <p:cNvPr id="68" name="Image 9" descr="/home/claude/icon_brain.png">
+            <a:extLst>
+              <a:ext uri="{FF2B5EF4-FFF2-40B4-BE49-F238E27FC236}">
+                <a16:creationId xmlns:a16="http://schemas.microsoft.com/office/drawing/2014/main" id="{AD56B588-4E4E-64C1-4A6D-ADCB3B4E74FF}"/>
+              </a:ext>
+            </a:extLst>
+          </p:cNvPr>
+          <p:cNvPicPr>
+            <a:picLocks noChangeAspect="1"/>
+          </p:cNvPicPr>
+          <p:nvPr/>
+        </p:nvPicPr>
+        <p:blipFill>
+          <a:blip r:embed="rId11"/>
+          <a:stretch>
+            <a:fillRect/>
+          </a:stretch>
+        </p:blipFill>
+        <p:spPr>
+          <a:xfrm>
+            <a:off x="3941513" y="5888736"/>
+            <a:ext cx="300471" cy="329184"/>
           </a:xfrm>
           <a:prstGeom prst="rect">
             <a:avLst/>
           </a:prstGeom>
-          <a:noFill/>
-        </p:spPr>
-        <p:txBody>
-          <a:bodyPr wrap="square">
-            <a:spAutoFit/>
-          </a:bodyPr>
-          <a:lstStyle/>
-          <a:p>
-            <a:pPr algn="l">
-              <a:spcBef>
-                <a:spcPts val="0"/>
-              </a:spcBef>
-              <a:spcAft>
-                <a:spcPts val="0"/>
-              </a:spcAft>
-            </a:pPr>
-            <a:r>
-              <a:rPr sz="1900" b="0" i="1">
-                <a:solidFill>
-                  <a:srgbClr val="4C5F70"/>
-                </a:solidFill>
-                <a:latin typeface="Segoe UI"/>
-              </a:rPr>
-              <a:t>R5:  human escalation must be deliberate, and arrive with the work gathered</a:t>
-            </a:r>
-          </a:p>
-        </p:txBody>
-      </p:sp>
-      <p:sp>
-        <p:nvSpPr>
-          <p:cNvPr id="8" name="Rectangle 7"/>
-          <p:cNvSpPr/>
-          <p:nvPr/>
-        </p:nvSpPr>
-        <p:spPr>
-          <a:xfrm>
-            <a:off x="825500" y="4978400"/>
-            <a:ext cx="38100" cy="914400"/>
-          </a:xfrm>
-          <a:prstGeom prst="rect">
-            <a:avLst/>
-          </a:prstGeom>
-          <a:solidFill>
-            <a:srgbClr val="E07B2C"/>
-          </a:solidFill>
-          <a:ln>
-            <a:noFill/>
-          </a:ln>
-          <a:effectLst/>
-        </p:spPr>
-        <p:style>
-          <a:lnRef idx="1">
-            <a:schemeClr val="accent1"/>
-          </a:lnRef>
-          <a:fillRef idx="3">
-            <a:schemeClr val="accent1"/>
-          </a:fillRef>
-          <a:effectRef idx="2">
-            <a:schemeClr val="accent1"/>
-          </a:effectRef>
-          <a:fontRef idx="minor">
-            <a:schemeClr val="lt1"/>
-          </a:fontRef>
-        </p:style>
-        <p:txBody>
-          <a:bodyPr rtlCol="0" anchor="ctr"/>
-          <a:lstStyle/>
-          <a:p>
-            <a:pPr algn="ctr"/>
-            <a:endParaRPr/>
-          </a:p>
-        </p:txBody>
-      </p:sp>
-      <p:sp>
-        <p:nvSpPr>
-          <p:cNvPr id="9" name="TextBox 8"/>
-          <p:cNvSpPr txBox="1"/>
-          <p:nvPr/>
-        </p:nvSpPr>
-        <p:spPr>
-          <a:xfrm>
-            <a:off x="1028700" y="4940300"/>
-            <a:ext cx="10241280" cy="914400"/>
-          </a:xfrm>
-          <a:prstGeom prst="rect">
-            <a:avLst/>
-          </a:prstGeom>
-          <a:noFill/>
-        </p:spPr>
-        <p:txBody>
-          <a:bodyPr wrap="square" anchor="ctr">
-            <a:spAutoFit/>
-          </a:bodyPr>
-          <a:lstStyle/>
-          <a:p>
-            <a:pPr algn="l">
-              <a:spcBef>
-                <a:spcPts val="0"/>
-              </a:spcBef>
-              <a:spcAft>
-                <a:spcPts val="0"/>
-              </a:spcAft>
-            </a:pPr>
-            <a:r>
-              <a:rPr sz="2000" b="1" i="0">
-                <a:solidFill>
-                  <a:srgbClr val="093B5F"/>
-                </a:solidFill>
-                <a:latin typeface="Segoe UI"/>
-              </a:rPr>
-              <a:t>Kill an agent mid-workflow: one version replays and finishes. The other loses the request.</a:t>
-            </a:r>
-          </a:p>
-        </p:txBody>
-      </p:sp>
-      <p:sp>
-        <p:nvSpPr>
-          <p:cNvPr id="200" name="Card201"/>
-          <p:cNvSpPr/>
-          <p:nvPr/>
-        </p:nvSpPr>
-        <p:spPr>
-          <a:xfrm>
-            <a:off x="825500" y="3073400"/>
-            <a:ext cx="5156200" cy="1574800"/>
-          </a:xfrm>
-          <a:prstGeom prst="roundRect">
-            <a:avLst>
-              <a:gd name="adj" fmla="val 6000"/>
-            </a:avLst>
-          </a:prstGeom>
-          <a:solidFill>
-            <a:srgbClr val="F1F5F8"/>
-          </a:solidFill>
-          <a:ln>
-            <a:noFill/>
-          </a:ln>
-        </p:spPr>
-        <p:style>
-          <a:lnRef idx="1">
-            <a:schemeClr val="accent1"/>
-          </a:lnRef>
-          <a:fillRef idx="3">
-            <a:schemeClr val="accent1"/>
-          </a:fillRef>
-          <a:effectRef idx="2">
-            <a:schemeClr val="accent1"/>
-          </a:effectRef>
-          <a:fontRef idx="minor">
-            <a:schemeClr val="lt1"/>
-          </a:fontRef>
-        </p:style>
-        <p:txBody>
-          <a:bodyPr/>
-          <a:lstStyle/>
-          <a:p>
-            <a:endParaRPr/>
-          </a:p>
-        </p:txBody>
-      </p:sp>
-      <p:sp>
-        <p:nvSpPr>
-          <p:cNvPr id="201" name="T202"/>
-          <p:cNvSpPr txBox="1"/>
-          <p:nvPr/>
-        </p:nvSpPr>
-        <p:spPr>
-          <a:xfrm>
-            <a:off x="1079500" y="3302000"/>
-            <a:ext cx="4648200" cy="1193800"/>
-          </a:xfrm>
-          <a:prstGeom prst="rect">
-            <a:avLst/>
-          </a:prstGeom>
-          <a:noFill/>
-        </p:spPr>
-        <p:txBody>
-          <a:bodyPr wrap="square" lIns="0" tIns="0" rIns="0" bIns="0">
-            <a:noAutofit/>
-          </a:bodyPr>
-          <a:lstStyle/>
-          <a:p>
-            <a:pPr algn="l">
-              <a:spcAft>
-                <a:spcPts val="400"/>
-              </a:spcAft>
-            </a:pPr>
-            <a:r>
-              <a:rPr lang="en-US" sz="1700" b="1" i="0" dirty="0">
-                <a:solidFill>
-                  <a:srgbClr val="093B5F"/>
-                </a:solidFill>
-                <a:latin typeface="Segoe UI"/>
-              </a:rPr>
-              <a:t>Triage, lookup and resolution become agents</a:t>
-            </a:r>
-          </a:p>
-          <a:p>
-            <a:pPr algn="l">
-              <a:spcAft>
-                <a:spcPts val="0"/>
-              </a:spcAft>
-            </a:pPr>
-            <a:r>
-              <a:rPr lang="en-US" sz="1400" b="0" i="0" dirty="0">
-                <a:solidFill>
-                  <a:srgbClr val="4C5F70"/>
-                </a:solidFill>
-                <a:latin typeface="Segoe UI"/>
-              </a:rPr>
-              <a:t>The deterministic cases resolve themselves. Judgment calls escalate with context attached</a:t>
-            </a:r>
-          </a:p>
-        </p:txBody>
-      </p:sp>
-      <p:sp>
-        <p:nvSpPr>
-          <p:cNvPr id="202" name="Card203"/>
-          <p:cNvSpPr/>
-          <p:nvPr/>
-        </p:nvSpPr>
-        <p:spPr>
-          <a:xfrm>
-            <a:off x="6184900" y="3073400"/>
-            <a:ext cx="5156200" cy="1574800"/>
-          </a:xfrm>
-          <a:prstGeom prst="roundRect">
-            <a:avLst>
-              <a:gd name="adj" fmla="val 6000"/>
-            </a:avLst>
-          </a:prstGeom>
-          <a:solidFill>
-            <a:srgbClr val="F1F5F8"/>
-          </a:solidFill>
-          <a:ln>
-            <a:noFill/>
-          </a:ln>
-        </p:spPr>
-        <p:style>
-          <a:lnRef idx="1">
-            <a:schemeClr val="accent1"/>
-          </a:lnRef>
-          <a:fillRef idx="3">
-            <a:schemeClr val="accent1"/>
-          </a:fillRef>
-          <a:effectRef idx="2">
-            <a:schemeClr val="accent1"/>
-          </a:effectRef>
-          <a:fontRef idx="minor">
-            <a:schemeClr val="lt1"/>
-          </a:fontRef>
-        </p:style>
-        <p:txBody>
-          <a:bodyPr/>
-          <a:lstStyle/>
-          <a:p>
-            <a:endParaRPr/>
-          </a:p>
-        </p:txBody>
-      </p:sp>
-      <p:sp>
-        <p:nvSpPr>
-          <p:cNvPr id="203" name="T204"/>
-          <p:cNvSpPr txBox="1"/>
-          <p:nvPr/>
-        </p:nvSpPr>
-        <p:spPr>
-          <a:xfrm>
-            <a:off x="6438900" y="3302000"/>
-            <a:ext cx="4648200" cy="1193800"/>
-          </a:xfrm>
-          <a:prstGeom prst="rect">
-            <a:avLst/>
-          </a:prstGeom>
-          <a:noFill/>
-        </p:spPr>
-        <p:txBody>
-          <a:bodyPr wrap="square" lIns="0" tIns="0" rIns="0" bIns="0">
-            <a:noAutofit/>
-          </a:bodyPr>
-          <a:lstStyle/>
-          <a:p>
-            <a:pPr algn="l">
-              <a:spcAft>
-                <a:spcPts val="400"/>
-              </a:spcAft>
-            </a:pPr>
-            <a:r>
-              <a:rPr lang="en-US" sz="1700" b="1" i="0" dirty="0">
-                <a:solidFill>
-                  <a:srgbClr val="093B5F"/>
-                </a:solidFill>
-                <a:latin typeface="Segoe UI"/>
-              </a:rPr>
-              <a:t>The agents talk over the broker, not over HTTP</a:t>
-            </a:r>
-          </a:p>
-          <a:p>
-            <a:pPr algn="l">
-              <a:spcAft>
-                <a:spcPts val="0"/>
-              </a:spcAft>
-            </a:pPr>
-            <a:r>
-              <a:rPr lang="en-US" sz="1400" b="0" i="0" dirty="0">
-                <a:solidFill>
-                  <a:srgbClr val="4C5F70"/>
-                </a:solidFill>
-                <a:latin typeface="Segoe UI"/>
-              </a:rPr>
-              <a:t>A2A carried on PubSub+ instead of synchronous point-to-point tool calls</a:t>
-            </a:r>
-          </a:p>
-        </p:txBody>
-      </p:sp>
+        </p:spPr>
+      </p:pic>
     </p:spTree>
     <p:extLst>
       <p:ext uri="{BB962C8B-B14F-4D97-AF65-F5344CB8AC3E}">
-        <p14:creationId xmlns:p14="http://schemas.microsoft.com/office/powerpoint/2010/main" val="1453052294"/>
+        <p14:creationId xmlns:p14="http://schemas.microsoft.com/office/powerpoint/2010/main" val="3530555159"/>
       </p:ext>
     </p:extLst>
   </p:cSld>
@@ -7039,8 +10978,8 @@
         </p:nvSpPr>
         <p:spPr>
           <a:xfrm>
-            <a:off x="822960" y="2505456"/>
-            <a:ext cx="10515600" cy="406400"/>
+            <a:off x="1830040" y="2269295"/>
+            <a:ext cx="7603893" cy="1918474"/>
           </a:xfrm>
           <a:prstGeom prst="rect">
             <a:avLst/>
@@ -7058,17 +10997,144 @@
                 <a:spcPts val="0"/>
               </a:spcBef>
               <a:spcAft>
-                <a:spcPts val="0"/>
+                <a:spcPts val="200"/>
               </a:spcAft>
             </a:pPr>
             <a:r>
-              <a:rPr sz="1900" b="0" i="1">
+              <a:rPr sz="2400" b="1" i="0" dirty="0">
+                <a:solidFill>
+                  <a:srgbClr val="093B5F"/>
+                </a:solidFill>
+                <a:latin typeface="Segoe UI"/>
+              </a:rPr>
+              <a:t>Google A2A makes agents interoperable </a:t>
+            </a:r>
+            <a:endParaRPr lang="en-US" sz="2400" b="1" i="0" dirty="0">
+              <a:solidFill>
+                <a:srgbClr val="093B5F"/>
+              </a:solidFill>
+              <a:latin typeface="Segoe UI"/>
+            </a:endParaRPr>
+          </a:p>
+          <a:p>
+            <a:pPr algn="l">
+              <a:spcBef>
+                <a:spcPts val="0"/>
+              </a:spcBef>
+              <a:spcAft>
+                <a:spcPts val="200"/>
+              </a:spcAft>
+            </a:pPr>
+            <a:r>
+              <a:rPr lang="en-US" sz="2000" b="1" i="0" dirty="0">
+                <a:solidFill>
+                  <a:srgbClr val="093B5F"/>
+                </a:solidFill>
+                <a:latin typeface="Segoe UI"/>
+              </a:rPr>
+              <a:t>-</a:t>
+            </a:r>
+            <a:r>
+              <a:rPr sz="2000" b="1" i="0" dirty="0">
+                <a:solidFill>
+                  <a:srgbClr val="093B5F"/>
+                </a:solidFill>
+                <a:latin typeface="Segoe UI"/>
+              </a:rPr>
+              <a:t> </a:t>
+            </a:r>
+            <a:r>
+              <a:rPr sz="2000" b="0" i="0" dirty="0">
                 <a:solidFill>
                   <a:srgbClr val="4C5F70"/>
                 </a:solidFill>
                 <a:latin typeface="Segoe UI"/>
               </a:rPr>
-              <a:t>Same broker as Act 2. A second topic architecture alongside the business one.</a:t>
+              <a:t>publish a card, discover, call across frameworks.</a:t>
+            </a:r>
+            <a:endParaRPr lang="en-US" sz="2000" b="0" i="0" dirty="0">
+              <a:solidFill>
+                <a:srgbClr val="4C5F70"/>
+              </a:solidFill>
+              <a:latin typeface="Segoe UI"/>
+            </a:endParaRPr>
+          </a:p>
+          <a:p>
+            <a:pPr algn="l">
+              <a:spcBef>
+                <a:spcPts val="0"/>
+              </a:spcBef>
+              <a:spcAft>
+                <a:spcPts val="200"/>
+              </a:spcAft>
+            </a:pPr>
+            <a:endParaRPr sz="2400" b="0" i="0" dirty="0">
+              <a:solidFill>
+                <a:srgbClr val="4C5F70"/>
+              </a:solidFill>
+              <a:latin typeface="Segoe UI"/>
+            </a:endParaRPr>
+          </a:p>
+          <a:p>
+            <a:pPr algn="l">
+              <a:spcBef>
+                <a:spcPts val="0"/>
+              </a:spcBef>
+              <a:spcAft>
+                <a:spcPts val="200"/>
+              </a:spcAft>
+            </a:pPr>
+            <a:r>
+              <a:rPr sz="2400" b="1" i="0" dirty="0">
+                <a:solidFill>
+                  <a:srgbClr val="093B5F"/>
+                </a:solidFill>
+                <a:latin typeface="Segoe UI"/>
+              </a:rPr>
+              <a:t>Solace makes that traffic reliable and scalable </a:t>
+            </a:r>
+            <a:endParaRPr lang="en-US" sz="2400" b="1" i="0" dirty="0">
+              <a:solidFill>
+                <a:srgbClr val="093B5F"/>
+              </a:solidFill>
+              <a:latin typeface="Segoe UI"/>
+            </a:endParaRPr>
+          </a:p>
+          <a:p>
+            <a:pPr algn="l">
+              <a:spcBef>
+                <a:spcPts val="0"/>
+              </a:spcBef>
+              <a:spcAft>
+                <a:spcPts val="200"/>
+              </a:spcAft>
+            </a:pPr>
+            <a:r>
+              <a:rPr lang="en-US" sz="2000" b="1" i="0" dirty="0">
+                <a:solidFill>
+                  <a:srgbClr val="093B5F"/>
+                </a:solidFill>
+                <a:latin typeface="Segoe UI"/>
+              </a:rPr>
+              <a:t>-</a:t>
+            </a:r>
+            <a:r>
+              <a:rPr sz="2000" b="1" i="0" dirty="0">
+                <a:solidFill>
+                  <a:srgbClr val="093B5F"/>
+                </a:solidFill>
+                <a:latin typeface="Segoe UI"/>
+              </a:rPr>
+              <a:t> </a:t>
+            </a:r>
+            <a:r>
+              <a:rPr sz="2000" b="0" i="0" dirty="0">
+                <a:solidFill>
+                  <a:srgbClr val="4C5F70"/>
+                </a:solidFill>
+                <a:latin typeface="Segoe UI"/>
+              </a:rPr>
+              <a:t>queues, fan-out, guaranteed delivery.</a:t>
             </a:r>
           </a:p>
         </p:txBody>
@@ -7081,8 +11147,8 @@
         </p:nvSpPr>
         <p:spPr>
           <a:xfrm>
-            <a:off x="825500" y="5257800"/>
-            <a:ext cx="38100" cy="914400"/>
+            <a:off x="817879" y="6172200"/>
+            <a:ext cx="45719" cy="406238"/>
           </a:xfrm>
           <a:prstGeom prst="rect">
             <a:avLst/>
@@ -7126,8 +11192,8 @@
         </p:nvSpPr>
         <p:spPr>
           <a:xfrm>
-            <a:off x="1028700" y="5219700"/>
-            <a:ext cx="10241280" cy="914400"/>
+            <a:off x="939800" y="6150341"/>
+            <a:ext cx="10241280" cy="523220"/>
           </a:xfrm>
           <a:prstGeom prst="rect">
             <a:avLst/>
@@ -7149,13 +11215,13 @@
               </a:spcAft>
             </a:pPr>
             <a:r>
-              <a:rPr sz="2000" b="1" i="0">
+              <a:rPr sz="1400" b="1" i="0" dirty="0">
                 <a:solidFill>
                   <a:srgbClr val="093B5F"/>
                 </a:solidFill>
                 <a:latin typeface="Segoe UI"/>
               </a:rPr>
-              <a:t>Both arms run identical tools and thresholds. The only variable is the transport.</a:t>
+              <a:t>A2A defines how agents talk; the broker decides whether the conversation survives. Same tools, same thresholds, different transport.</a:t>
             </a:r>
           </a:p>
         </p:txBody>
@@ -7168,8 +11234,8 @@
         </p:nvSpPr>
         <p:spPr>
           <a:xfrm>
-            <a:off x="825500" y="3073400"/>
-            <a:ext cx="5156200" cy="1905000"/>
+            <a:off x="812800" y="4495005"/>
+            <a:ext cx="5156200" cy="1287086"/>
           </a:xfrm>
           <a:prstGeom prst="roundRect">
             <a:avLst>
@@ -7201,7 +11267,13 @@
           <a:bodyPr/>
           <a:lstStyle/>
           <a:p>
-            <a:endParaRPr/>
+            <a:endParaRPr>
+              <a:solidFill>
+                <a:schemeClr val="bg1">
+                  <a:lumMod val="50000"/>
+                </a:schemeClr>
+              </a:solidFill>
+            </a:endParaRPr>
           </a:p>
         </p:txBody>
       </p:sp>
@@ -7213,8 +11285,8 @@
         </p:nvSpPr>
         <p:spPr>
           <a:xfrm>
-            <a:off x="1079500" y="3302000"/>
-            <a:ext cx="4648200" cy="1524000"/>
+            <a:off x="1066800" y="4647404"/>
+            <a:ext cx="4648200" cy="1060344"/>
           </a:xfrm>
           <a:prstGeom prst="rect">
             <a:avLst/>
@@ -7233,9 +11305,11 @@
               </a:spcAft>
             </a:pPr>
             <a:r>
-              <a:rPr lang="en-US" sz="1700" b="1" i="0" dirty="0">
-                <a:solidFill>
-                  <a:srgbClr val="093B5F"/>
+              <a:rPr lang="en-US" sz="1600" b="1" i="0" dirty="0">
+                <a:solidFill>
+                  <a:schemeClr val="bg1">
+                    <a:lumMod val="50000"/>
+                  </a:schemeClr>
                 </a:solidFill>
                 <a:latin typeface="Segoe UI"/>
               </a:rPr>
@@ -7249,9 +11323,11 @@
               </a:spcAft>
             </a:pPr>
             <a:r>
-              <a:rPr lang="en-US" sz="1400" b="0" i="0" dirty="0">
-                <a:solidFill>
-                  <a:srgbClr val="4C5F70"/>
+              <a:rPr lang="en-US" sz="1200" b="0" i="0" dirty="0">
+                <a:solidFill>
+                  <a:schemeClr val="bg1">
+                    <a:lumMod val="50000"/>
+                  </a:schemeClr>
                 </a:solidFill>
                 <a:latin typeface="Segoe UI"/>
               </a:rPr>
@@ -7268,8 +11344,8 @@
         </p:nvSpPr>
         <p:spPr>
           <a:xfrm>
-            <a:off x="6184900" y="3073400"/>
-            <a:ext cx="5156200" cy="1905000"/>
+            <a:off x="6172200" y="4495005"/>
+            <a:ext cx="5156200" cy="1287086"/>
           </a:xfrm>
           <a:prstGeom prst="roundRect">
             <a:avLst>
@@ -7301,7 +11377,13 @@
           <a:bodyPr/>
           <a:lstStyle/>
           <a:p>
-            <a:endParaRPr/>
+            <a:endParaRPr>
+              <a:solidFill>
+                <a:schemeClr val="bg1">
+                  <a:lumMod val="50000"/>
+                </a:schemeClr>
+              </a:solidFill>
+            </a:endParaRPr>
           </a:p>
         </p:txBody>
       </p:sp>
@@ -7313,8 +11395,8 @@
         </p:nvSpPr>
         <p:spPr>
           <a:xfrm>
-            <a:off x="6438900" y="3302000"/>
-            <a:ext cx="4648200" cy="1524000"/>
+            <a:off x="6426200" y="4647404"/>
+            <a:ext cx="4648200" cy="1060344"/>
           </a:xfrm>
           <a:prstGeom prst="rect">
             <a:avLst/>
@@ -7333,9 +11415,11 @@
               </a:spcAft>
             </a:pPr>
             <a:r>
-              <a:rPr lang="en-US" sz="1700" b="1" i="0" dirty="0">
-                <a:solidFill>
-                  <a:srgbClr val="093B5F"/>
+              <a:rPr lang="en-US" sz="1600" b="1" i="0" dirty="0">
+                <a:solidFill>
+                  <a:schemeClr val="bg1">
+                    <a:lumMod val="50000"/>
+                  </a:schemeClr>
                 </a:solidFill>
                 <a:latin typeface="Segoe UI"/>
               </a:rPr>
@@ -7349,13 +11433,99 @@
               </a:spcAft>
             </a:pPr>
             <a:r>
-              <a:rPr lang="en-US" sz="1400" b="0" i="0" dirty="0">
-                <a:solidFill>
-                  <a:srgbClr val="4C5F70"/>
+              <a:rPr lang="en-US" sz="1200" b="0" i="0" dirty="0">
+                <a:solidFill>
+                  <a:schemeClr val="bg1">
+                    <a:lumMod val="50000"/>
+                  </a:schemeClr>
                 </a:solidFill>
                 <a:latin typeface="Segoe UI"/>
               </a:rPr>
               <a:t>The synchronous arm loses the request outright — no queue, no retry target, and client retries have nothing to retry against</a:t>
+            </a:r>
+          </a:p>
+        </p:txBody>
+      </p:sp>
+      <p:sp>
+        <p:nvSpPr>
+          <p:cNvPr id="10" name="TextBox 9">
+            <a:extLst>
+              <a:ext uri="{FF2B5EF4-FFF2-40B4-BE49-F238E27FC236}">
+                <a16:creationId xmlns:a16="http://schemas.microsoft.com/office/drawing/2014/main" id="{DE676705-2D4C-318E-49C9-5548E3207ADA}"/>
+              </a:ext>
+            </a:extLst>
+          </p:cNvPr>
+          <p:cNvSpPr txBox="1"/>
+          <p:nvPr/>
+        </p:nvSpPr>
+        <p:spPr>
+          <a:xfrm>
+            <a:off x="1464527" y="1806169"/>
+            <a:ext cx="6096000" cy="353943"/>
+          </a:xfrm>
+          <a:prstGeom prst="rect">
+            <a:avLst/>
+          </a:prstGeom>
+          <a:noFill/>
+        </p:spPr>
+        <p:txBody>
+          <a:bodyPr wrap="square">
+            <a:spAutoFit/>
+          </a:bodyPr>
+          <a:lstStyle/>
+          <a:p>
+            <a:r>
+              <a:rPr lang="en-US" sz="1700" i="0" dirty="0">
+                <a:solidFill>
+                  <a:schemeClr val="bg1">
+                    <a:lumMod val="50000"/>
+                  </a:schemeClr>
+                </a:solidFill>
+                <a:latin typeface="Segoe UI"/>
+              </a:rPr>
+              <a:t>Human escalation is deliberate</a:t>
+            </a:r>
+            <a:endParaRPr lang="en-US" dirty="0">
+              <a:solidFill>
+                <a:schemeClr val="bg1">
+                  <a:lumMod val="50000"/>
+                </a:schemeClr>
+              </a:solidFill>
+            </a:endParaRPr>
+          </a:p>
+        </p:txBody>
+      </p:sp>
+      <p:sp>
+        <p:nvSpPr>
+          <p:cNvPr id="11" name="TextBox 10">
+            <a:extLst>
+              <a:ext uri="{FF2B5EF4-FFF2-40B4-BE49-F238E27FC236}">
+                <a16:creationId xmlns:a16="http://schemas.microsoft.com/office/drawing/2014/main" id="{75E40F59-0269-84C2-8106-7D5906A7E39F}"/>
+              </a:ext>
+            </a:extLst>
+          </p:cNvPr>
+          <p:cNvSpPr txBox="1"/>
+          <p:nvPr/>
+        </p:nvSpPr>
+        <p:spPr>
+          <a:xfrm>
+            <a:off x="4512527" y="2777577"/>
+            <a:ext cx="639336" cy="830997"/>
+          </a:xfrm>
+          <a:prstGeom prst="rect">
+            <a:avLst/>
+          </a:prstGeom>
+          <a:noFill/>
+        </p:spPr>
+        <p:txBody>
+          <a:bodyPr wrap="square" rtlCol="0">
+            <a:spAutoFit/>
+          </a:bodyPr>
+          <a:lstStyle/>
+          <a:p>
+            <a:r>
+              <a:rPr lang="en-US" sz="4800" dirty="0"/>
+              <a:t>+</a:t>
             </a:r>
           </a:p>
         </p:txBody>
@@ -7363,7 +11533,7 @@
     </p:spTree>
     <p:extLst>
       <p:ext uri="{BB962C8B-B14F-4D97-AF65-F5344CB8AC3E}">
-        <p14:creationId xmlns:p14="http://schemas.microsoft.com/office/powerpoint/2010/main" val="2392921007"/>
+        <p14:creationId xmlns:p14="http://schemas.microsoft.com/office/powerpoint/2010/main" val="2837592851"/>
       </p:ext>
     </p:extLst>
   </p:cSld>
@@ -11272,14 +15442,29 @@
           <a:p>
             <a:pPr algn="l"/>
             <a:r>
-              <a:rPr lang="en-US" sz="1400" b="0" i="0" dirty="0">
+              <a:rPr lang="en-US" sz="1400" dirty="0">
                 <a:solidFill>
                   <a:srgbClr val="4C5F70"/>
                 </a:solidFill>
                 <a:latin typeface="Segoe UI"/>
               </a:rPr>
-              <a:t>Routes the work. Does not shorten detection, and does not bring the context with it</a:t>
-            </a:r>
+              <a:t>Brittle hard-configured routes challenging to maintain at scale.  Lacks true </a:t>
+            </a:r>
+            <a:r>
+              <a:rPr lang="en-US" sz="1400">
+                <a:solidFill>
+                  <a:srgbClr val="4C5F70"/>
+                </a:solidFill>
+                <a:latin typeface="Segoe UI"/>
+              </a:rPr>
+              <a:t>broadcast support.</a:t>
+            </a:r>
+            <a:endParaRPr lang="en-US" sz="1400" b="0" i="0" dirty="0">
+              <a:solidFill>
+                <a:srgbClr val="4C5F70"/>
+              </a:solidFill>
+              <a:latin typeface="Segoe UI"/>
+            </a:endParaRPr>
           </a:p>
         </p:txBody>
       </p:sp>
@@ -12454,7 +16639,7 @@
                     <a:p>
                       <a:pPr algn="l"/>
                       <a:r>
-                        <a:rPr lang="en-US" sz="1500" b="1">
+                        <a:rPr lang="en-US" sz="1500" b="1" dirty="0">
                           <a:solidFill>
                             <a:srgbClr val="FFFFFF"/>
                           </a:solidFill>
@@ -14730,6 +18915,301 @@
 </file>
 
 <file path=ppt/theme/theme2.xml><?xml version="1.0" encoding="utf-8"?>
+<a:theme xmlns:a="http://schemas.openxmlformats.org/drawingml/2006/main" name="1_Office Theme">
+  <a:themeElements>
+    <a:clrScheme name="Office">
+      <a:dk1>
+        <a:sysClr val="windowText" lastClr="000000"/>
+      </a:dk1>
+      <a:lt1>
+        <a:sysClr val="window" lastClr="FFFFFF"/>
+      </a:lt1>
+      <a:dk2>
+        <a:srgbClr val="44546A"/>
+      </a:dk2>
+      <a:lt2>
+        <a:srgbClr val="E7E6E6"/>
+      </a:lt2>
+      <a:accent1>
+        <a:srgbClr val="4472C4"/>
+      </a:accent1>
+      <a:accent2>
+        <a:srgbClr val="ED7D31"/>
+      </a:accent2>
+      <a:accent3>
+        <a:srgbClr val="A5A5A5"/>
+      </a:accent3>
+      <a:accent4>
+        <a:srgbClr val="FFC000"/>
+      </a:accent4>
+      <a:accent5>
+        <a:srgbClr val="5B9BD5"/>
+      </a:accent5>
+      <a:accent6>
+        <a:srgbClr val="70AD47"/>
+      </a:accent6>
+      <a:hlink>
+        <a:srgbClr val="0563C1"/>
+      </a:hlink>
+      <a:folHlink>
+        <a:srgbClr val="954F72"/>
+      </a:folHlink>
+    </a:clrScheme>
+    <a:fontScheme name="Office">
+      <a:majorFont>
+        <a:latin typeface="Calibri Light" panose="020F0302020204030204"/>
+        <a:ea typeface=""/>
+        <a:cs typeface=""/>
+        <a:font script="Jpan" typeface="游ゴシック Light"/>
+        <a:font script="Hang" typeface="맑은 고딕"/>
+        <a:font script="Hans" typeface="等线 Light"/>
+        <a:font script="Hant" typeface="新細明體"/>
+        <a:font script="Arab" typeface="Times New Roman"/>
+        <a:font script="Hebr" typeface="Times New Roman"/>
+        <a:font script="Thai" typeface="Angsana New"/>
+        <a:font script="Ethi" typeface="Nyala"/>
+        <a:font script="Beng" typeface="Vrinda"/>
+        <a:font script="Gujr" typeface="Shruti"/>
+        <a:font script="Khmr" typeface="MoolBoran"/>
+        <a:font script="Knda" typeface="Tunga"/>
+        <a:font script="Guru" typeface="Raavi"/>
+        <a:font script="Cans" typeface="Euphemia"/>
+        <a:font script="Cher" typeface="Plantagenet Cherokee"/>
+        <a:font script="Yiii" typeface="Microsoft Yi Baiti"/>
+        <a:font script="Tibt" typeface="Microsoft Himalaya"/>
+        <a:font script="Thaa" typeface="MV Boli"/>
+        <a:font script="Deva" typeface="Mangal"/>
+        <a:font script="Telu" typeface="Gautami"/>
+        <a:font script="Taml" typeface="Latha"/>
+        <a:font script="Syrc" typeface="Estrangelo Edessa"/>
+        <a:font script="Orya" typeface="Kalinga"/>
+        <a:font script="Mlym" typeface="Kartika"/>
+        <a:font script="Laoo" typeface="DokChampa"/>
+        <a:font script="Sinh" typeface="Iskoola Pota"/>
+        <a:font script="Mong" typeface="Mongolian Baiti"/>
+        <a:font script="Viet" typeface="Times New Roman"/>
+        <a:font script="Uigh" typeface="Microsoft Uighur"/>
+        <a:font script="Geor" typeface="Sylfaen"/>
+        <a:font script="Armn" typeface="Arial"/>
+        <a:font script="Bugi" typeface="Leelawadee UI"/>
+        <a:font script="Bopo" typeface="Microsoft JhengHei"/>
+        <a:font script="Java" typeface="Javanese Text"/>
+        <a:font script="Lisu" typeface="Segoe UI"/>
+        <a:font script="Mymr" typeface="Myanmar Text"/>
+        <a:font script="Nkoo" typeface="Ebrima"/>
+        <a:font script="Olck" typeface="Nirmala UI"/>
+        <a:font script="Osma" typeface="Ebrima"/>
+        <a:font script="Phag" typeface="Phagspa"/>
+        <a:font script="Syrn" typeface="Estrangelo Edessa"/>
+        <a:font script="Syrj" typeface="Estrangelo Edessa"/>
+        <a:font script="Syre" typeface="Estrangelo Edessa"/>
+        <a:font script="Sora" typeface="Nirmala UI"/>
+        <a:font script="Tale" typeface="Microsoft Tai Le"/>
+        <a:font script="Talu" typeface="Microsoft New Tai Lue"/>
+        <a:font script="Tfng" typeface="Ebrima"/>
+      </a:majorFont>
+      <a:minorFont>
+        <a:latin typeface="Calibri" panose="020F0502020204030204"/>
+        <a:ea typeface=""/>
+        <a:cs typeface=""/>
+        <a:font script="Jpan" typeface="游ゴシック"/>
+        <a:font script="Hang" typeface="맑은 고딕"/>
+        <a:font script="Hans" typeface="等线"/>
+        <a:font script="Hant" typeface="新細明體"/>
+        <a:font script="Arab" typeface="Arial"/>
+        <a:font script="Hebr" typeface="Arial"/>
+        <a:font script="Thai" typeface="Cordia New"/>
+        <a:font script="Ethi" typeface="Nyala"/>
+        <a:font script="Beng" typeface="Vrinda"/>
+        <a:font script="Gujr" typeface="Shruti"/>
+        <a:font script="Khmr" typeface="DaunPenh"/>
+        <a:font script="Knda" typeface="Tunga"/>
+        <a:font script="Guru" typeface="Raavi"/>
+        <a:font script="Cans" typeface="Euphemia"/>
+        <a:font script="Cher" typeface="Plantagenet Cherokee"/>
+        <a:font script="Yiii" typeface="Microsoft Yi Baiti"/>
+        <a:font script="Tibt" typeface="Microsoft Himalaya"/>
+        <a:font script="Thaa" typeface="MV Boli"/>
+        <a:font script="Deva" typeface="Mangal"/>
+        <a:font script="Telu" typeface="Gautami"/>
+        <a:font script="Taml" typeface="Latha"/>
+        <a:font script="Syrc" typeface="Estrangelo Edessa"/>
+        <a:font script="Orya" typeface="Kalinga"/>
+        <a:font script="Mlym" typeface="Kartika"/>
+        <a:font script="Laoo" typeface="DokChampa"/>
+        <a:font script="Sinh" typeface="Iskoola Pota"/>
+        <a:font script="Mong" typeface="Mongolian Baiti"/>
+        <a:font script="Viet" typeface="Arial"/>
+        <a:font script="Uigh" typeface="Microsoft Uighur"/>
+        <a:font script="Geor" typeface="Sylfaen"/>
+        <a:font script="Armn" typeface="Arial"/>
+        <a:font script="Bugi" typeface="Leelawadee UI"/>
+        <a:font script="Bopo" typeface="Microsoft JhengHei"/>
+        <a:font script="Java" typeface="Javanese Text"/>
+        <a:font script="Lisu" typeface="Segoe UI"/>
+        <a:font script="Mymr" typeface="Myanmar Text"/>
+        <a:font script="Nkoo" typeface="Ebrima"/>
+        <a:font script="Olck" typeface="Nirmala UI"/>
+        <a:font script="Osma" typeface="Ebrima"/>
+        <a:font script="Phag" typeface="Phagspa"/>
+        <a:font script="Syrn" typeface="Estrangelo Edessa"/>
+        <a:font script="Syrj" typeface="Estrangelo Edessa"/>
+        <a:font script="Syre" typeface="Estrangelo Edessa"/>
+        <a:font script="Sora" typeface="Nirmala UI"/>
+        <a:font script="Tale" typeface="Microsoft Tai Le"/>
+        <a:font script="Talu" typeface="Microsoft New Tai Lue"/>
+        <a:font script="Tfng" typeface="Ebrima"/>
+      </a:minorFont>
+    </a:fontScheme>
+    <a:fmtScheme name="Office">
+      <a:fillStyleLst>
+        <a:solidFill>
+          <a:schemeClr val="phClr"/>
+        </a:solidFill>
+        <a:gradFill rotWithShape="1">
+          <a:gsLst>
+            <a:gs pos="0">
+              <a:schemeClr val="phClr">
+                <a:lumMod val="110000"/>
+                <a:satMod val="105000"/>
+                <a:tint val="67000"/>
+              </a:schemeClr>
+            </a:gs>
+            <a:gs pos="50000">
+              <a:schemeClr val="phClr">
+                <a:lumMod val="105000"/>
+                <a:satMod val="103000"/>
+                <a:tint val="73000"/>
+              </a:schemeClr>
+            </a:gs>
+            <a:gs pos="100000">
+              <a:schemeClr val="phClr">
+                <a:lumMod val="105000"/>
+                <a:satMod val="109000"/>
+                <a:tint val="81000"/>
+              </a:schemeClr>
+            </a:gs>
+          </a:gsLst>
+          <a:lin ang="5400000" scaled="0"/>
+        </a:gradFill>
+        <a:gradFill rotWithShape="1">
+          <a:gsLst>
+            <a:gs pos="0">
+              <a:schemeClr val="phClr">
+                <a:satMod val="103000"/>
+                <a:lumMod val="102000"/>
+                <a:tint val="94000"/>
+              </a:schemeClr>
+            </a:gs>
+            <a:gs pos="50000">
+              <a:schemeClr val="phClr">
+                <a:satMod val="110000"/>
+                <a:lumMod val="100000"/>
+                <a:shade val="100000"/>
+              </a:schemeClr>
+            </a:gs>
+            <a:gs pos="100000">
+              <a:schemeClr val="phClr">
+                <a:lumMod val="99000"/>
+                <a:satMod val="120000"/>
+                <a:shade val="78000"/>
+              </a:schemeClr>
+            </a:gs>
+          </a:gsLst>
+          <a:lin ang="5400000" scaled="0"/>
+        </a:gradFill>
+      </a:fillStyleLst>
+      <a:lnStyleLst>
+        <a:ln w="6350" cap="flat" cmpd="sng" algn="ctr">
+          <a:solidFill>
+            <a:schemeClr val="phClr"/>
+          </a:solidFill>
+          <a:prstDash val="solid"/>
+          <a:miter lim="800000"/>
+        </a:ln>
+        <a:ln w="12700" cap="flat" cmpd="sng" algn="ctr">
+          <a:solidFill>
+            <a:schemeClr val="phClr"/>
+          </a:solidFill>
+          <a:prstDash val="solid"/>
+          <a:miter lim="800000"/>
+        </a:ln>
+        <a:ln w="19050" cap="flat" cmpd="sng" algn="ctr">
+          <a:solidFill>
+            <a:schemeClr val="phClr"/>
+          </a:solidFill>
+          <a:prstDash val="solid"/>
+          <a:miter lim="800000"/>
+        </a:ln>
+      </a:lnStyleLst>
+      <a:effectStyleLst>
+        <a:effectStyle>
+          <a:effectLst/>
+        </a:effectStyle>
+        <a:effectStyle>
+          <a:effectLst/>
+        </a:effectStyle>
+        <a:effectStyle>
+          <a:effectLst>
+            <a:outerShdw blurRad="57150" dist="19050" dir="5400000" algn="ctr" rotWithShape="0">
+              <a:srgbClr val="000000">
+                <a:alpha val="63000"/>
+              </a:srgbClr>
+            </a:outerShdw>
+          </a:effectLst>
+        </a:effectStyle>
+      </a:effectStyleLst>
+      <a:bgFillStyleLst>
+        <a:solidFill>
+          <a:schemeClr val="phClr"/>
+        </a:solidFill>
+        <a:solidFill>
+          <a:schemeClr val="phClr">
+            <a:tint val="95000"/>
+            <a:satMod val="170000"/>
+          </a:schemeClr>
+        </a:solidFill>
+        <a:gradFill rotWithShape="1">
+          <a:gsLst>
+            <a:gs pos="0">
+              <a:schemeClr val="phClr">
+                <a:tint val="93000"/>
+                <a:satMod val="150000"/>
+                <a:shade val="98000"/>
+                <a:lumMod val="102000"/>
+              </a:schemeClr>
+            </a:gs>
+            <a:gs pos="50000">
+              <a:schemeClr val="phClr">
+                <a:tint val="98000"/>
+                <a:satMod val="130000"/>
+                <a:shade val="90000"/>
+                <a:lumMod val="103000"/>
+              </a:schemeClr>
+            </a:gs>
+            <a:gs pos="100000">
+              <a:schemeClr val="phClr">
+                <a:shade val="63000"/>
+                <a:satMod val="120000"/>
+              </a:schemeClr>
+            </a:gs>
+          </a:gsLst>
+          <a:lin ang="5400000" scaled="0"/>
+        </a:gradFill>
+      </a:bgFillStyleLst>
+    </a:fmtScheme>
+  </a:themeElements>
+  <a:objectDefaults/>
+  <a:extraClrSchemeLst/>
+  <a:extLst>
+    <a:ext uri="{05A4C25C-085E-4340-85A3-A5531E510DB2}">
+      <thm15:themeFamily xmlns:thm15="http://schemas.microsoft.com/office/thememl/2012/main" name="Office Theme" id="{62F939B6-93AF-4DB8-9C6B-D6C7DFDC589F}" vid="{4A3C46E8-61CC-4603-A589-7422A47A8E4A}"/>
+    </a:ext>
+  </a:extLst>
+</a:theme>
+</file>
+
+<file path=ppt/theme/theme3.xml><?xml version="1.0" encoding="utf-8"?>
 <a:theme xmlns:a="http://schemas.openxmlformats.org/drawingml/2006/main" name="Office Theme">
   <a:themeElements>
     <a:clrScheme name="Office">

--- a/presentation/Solace-Demo-Meridian-2026-09-04.pptx
+++ b/presentation/Solace-Demo-Meridian-2026-09-04.pptx
@@ -148,7 +148,7 @@
 <file path=ppt/revisionInfo.xml><?xml version="1.0" encoding="utf-8"?>
 <p1510:revInfo xmlns:a="http://schemas.openxmlformats.org/drawingml/2006/main" xmlns:r="http://schemas.openxmlformats.org/officeDocument/2006/relationships" xmlns:p1510="http://schemas.microsoft.com/office/powerpoint/2015/10/main">
   <p1510:revLst>
-    <p1510:client id="{A47D988F-889B-483D-889E-02BC87B607D3}" v="10" dt="2026-09-04T06:30:56.155"/>
+    <p1510:client id="{A47D988F-889B-483D-889E-02BC87B607D3}" v="14" dt="2026-09-04T14:03:31.224"/>
   </p1510:revLst>
 </p1510:revInfo>
 </file>
@@ -158,12 +158,12 @@
   <pc:docChgLst>
     <pc:chgData name="tony august" userId="0e1c2837a28b706a" providerId="LiveId" clId="{AD05CBBD-285A-40D0-ABA1-E4D8FAD69F9B}"/>
     <pc:docChg chg="undo custSel addSld delSld modSld sldOrd modNotesMaster">
-      <pc:chgData name="tony august" userId="0e1c2837a28b706a" providerId="LiveId" clId="{AD05CBBD-285A-40D0-ABA1-E4D8FAD69F9B}" dt="2026-09-04T06:42:28.146" v="3027" actId="20577"/>
+      <pc:chgData name="tony august" userId="0e1c2837a28b706a" providerId="LiveId" clId="{AD05CBBD-285A-40D0-ABA1-E4D8FAD69F9B}" dt="2026-09-04T14:55:52.363" v="3616" actId="20577"/>
       <pc:docMkLst>
         <pc:docMk/>
       </pc:docMkLst>
       <pc:sldChg chg="addSp delSp modSp add mod">
-        <pc:chgData name="tony august" userId="0e1c2837a28b706a" providerId="LiveId" clId="{AD05CBBD-285A-40D0-ABA1-E4D8FAD69F9B}" dt="2026-09-04T06:02:04.717" v="2115" actId="1076"/>
+        <pc:chgData name="tony august" userId="0e1c2837a28b706a" providerId="LiveId" clId="{AD05CBBD-285A-40D0-ABA1-E4D8FAD69F9B}" dt="2026-09-04T14:07:07.855" v="3258" actId="6549"/>
         <pc:sldMkLst>
           <pc:docMk/>
           <pc:sldMk cId="3530555159" sldId="276"/>
@@ -249,7 +249,7 @@
           </ac:spMkLst>
         </pc:spChg>
         <pc:spChg chg="mod">
-          <ac:chgData name="tony august" userId="0e1c2837a28b706a" providerId="LiveId" clId="{AD05CBBD-285A-40D0-ABA1-E4D8FAD69F9B}" dt="2026-09-04T05:50:42.755" v="2084" actId="1076"/>
+          <ac:chgData name="tony august" userId="0e1c2837a28b706a" providerId="LiveId" clId="{AD05CBBD-285A-40D0-ABA1-E4D8FAD69F9B}" dt="2026-09-04T14:07:07.855" v="3258" actId="6549"/>
           <ac:spMkLst>
             <pc:docMk/>
             <pc:sldMk cId="3530555159" sldId="276"/>
@@ -499,6 +499,21 @@
           </ac:spMkLst>
         </pc:spChg>
       </pc:sldChg>
+      <pc:sldChg chg="modSp mod">
+        <pc:chgData name="tony august" userId="0e1c2837a28b706a" providerId="LiveId" clId="{AD05CBBD-285A-40D0-ABA1-E4D8FAD69F9B}" dt="2026-09-04T07:07:43.940" v="3069" actId="20577"/>
+        <pc:sldMkLst>
+          <pc:docMk/>
+          <pc:sldMk cId="4248351729" sldId="323"/>
+        </pc:sldMkLst>
+        <pc:spChg chg="mod">
+          <ac:chgData name="tony august" userId="0e1c2837a28b706a" providerId="LiveId" clId="{AD05CBBD-285A-40D0-ABA1-E4D8FAD69F9B}" dt="2026-09-04T07:07:43.940" v="3069" actId="20577"/>
+          <ac:spMkLst>
+            <pc:docMk/>
+            <pc:sldMk cId="4248351729" sldId="323"/>
+            <ac:spMk id="2" creationId="{00000000-0000-0000-0000-000000000000}"/>
+          </ac:spMkLst>
+        </pc:spChg>
+      </pc:sldChg>
       <pc:sldChg chg="modSp del mod">
         <pc:chgData name="tony august" userId="0e1c2837a28b706a" providerId="LiveId" clId="{AD05CBBD-285A-40D0-ABA1-E4D8FAD69F9B}" dt="2026-09-04T01:28:11.763" v="1358"/>
         <pc:sldMkLst>
@@ -515,11 +530,19 @@
         </pc:spChg>
       </pc:sldChg>
       <pc:sldChg chg="modSp add mod">
-        <pc:chgData name="tony august" userId="0e1c2837a28b706a" providerId="LiveId" clId="{AD05CBBD-285A-40D0-ABA1-E4D8FAD69F9B}" dt="2026-09-04T06:42:28.146" v="3027" actId="20577"/>
+        <pc:chgData name="tony august" userId="0e1c2837a28b706a" providerId="LiveId" clId="{AD05CBBD-285A-40D0-ABA1-E4D8FAD69F9B}" dt="2026-09-04T14:23:39.089" v="3614" actId="313"/>
         <pc:sldMkLst>
           <pc:docMk/>
           <pc:sldMk cId="698426052" sldId="327"/>
         </pc:sldMkLst>
+        <pc:spChg chg="mod">
+          <ac:chgData name="tony august" userId="0e1c2837a28b706a" providerId="LiveId" clId="{AD05CBBD-285A-40D0-ABA1-E4D8FAD69F9B}" dt="2026-09-04T14:23:39.089" v="3614" actId="313"/>
+          <ac:spMkLst>
+            <pc:docMk/>
+            <pc:sldMk cId="698426052" sldId="327"/>
+            <ac:spMk id="7" creationId="{00000000-0000-0000-0000-000000000000}"/>
+          </ac:spMkLst>
+        </pc:spChg>
         <pc:spChg chg="mod">
           <ac:chgData name="tony august" userId="0e1c2837a28b706a" providerId="LiveId" clId="{AD05CBBD-285A-40D0-ABA1-E4D8FAD69F9B}" dt="2026-09-04T01:18:51.673" v="1334"/>
           <ac:spMkLst>
@@ -561,7 +584,7 @@
           </ac:spMkLst>
         </pc:spChg>
         <pc:spChg chg="mod">
-          <ac:chgData name="tony august" userId="0e1c2837a28b706a" providerId="LiveId" clId="{AD05CBBD-285A-40D0-ABA1-E4D8FAD69F9B}" dt="2026-09-04T01:18:51.681" v="1342"/>
+          <ac:chgData name="tony august" userId="0e1c2837a28b706a" providerId="LiveId" clId="{AD05CBBD-285A-40D0-ABA1-E4D8FAD69F9B}" dt="2026-09-04T14:21:42.413" v="3526" actId="114"/>
           <ac:spMkLst>
             <pc:docMk/>
             <pc:sldMk cId="698426052" sldId="327"/>
@@ -585,7 +608,7 @@
           </ac:spMkLst>
         </pc:spChg>
         <pc:spChg chg="mod">
-          <ac:chgData name="tony august" userId="0e1c2837a28b706a" providerId="LiveId" clId="{AD05CBBD-285A-40D0-ABA1-E4D8FAD69F9B}" dt="2026-09-04T06:42:28.146" v="3027" actId="20577"/>
+          <ac:chgData name="tony august" userId="0e1c2837a28b706a" providerId="LiveId" clId="{AD05CBBD-285A-40D0-ABA1-E4D8FAD69F9B}" dt="2026-09-04T14:16:35.464" v="3339" actId="20577"/>
           <ac:spMkLst>
             <pc:docMk/>
             <pc:sldMk cId="698426052" sldId="327"/>
@@ -593,7 +616,7 @@
           </ac:spMkLst>
         </pc:spChg>
         <pc:picChg chg="mod">
-          <ac:chgData name="tony august" userId="0e1c2837a28b706a" providerId="LiveId" clId="{AD05CBBD-285A-40D0-ABA1-E4D8FAD69F9B}" dt="2026-09-04T01:18:51.686" v="1348"/>
+          <ac:chgData name="tony august" userId="0e1c2837a28b706a" providerId="LiveId" clId="{AD05CBBD-285A-40D0-ABA1-E4D8FAD69F9B}" dt="2026-09-04T14:08:44.648" v="3288" actId="1036"/>
           <ac:picMkLst>
             <pc:docMk/>
             <pc:sldMk cId="698426052" sldId="327"/>
@@ -615,19 +638,35 @@
           <pc:sldMk cId="1139307564" sldId="329"/>
         </pc:sldMkLst>
       </pc:sldChg>
-      <pc:sldChg chg="add">
-        <pc:chgData name="tony august" userId="0e1c2837a28b706a" providerId="LiveId" clId="{AD05CBBD-285A-40D0-ABA1-E4D8FAD69F9B}" dt="2026-09-04T01:27:15.405" v="1351"/>
+      <pc:sldChg chg="modSp add mod">
+        <pc:chgData name="tony august" userId="0e1c2837a28b706a" providerId="LiveId" clId="{AD05CBBD-285A-40D0-ABA1-E4D8FAD69F9B}" dt="2026-09-04T07:11:44.165" v="3200" actId="6549"/>
         <pc:sldMkLst>
           <pc:docMk/>
           <pc:sldMk cId="2843641642" sldId="330"/>
         </pc:sldMkLst>
+        <pc:spChg chg="mod">
+          <ac:chgData name="tony august" userId="0e1c2837a28b706a" providerId="LiveId" clId="{AD05CBBD-285A-40D0-ABA1-E4D8FAD69F9B}" dt="2026-09-04T07:11:44.165" v="3200" actId="6549"/>
+          <ac:spMkLst>
+            <pc:docMk/>
+            <pc:sldMk cId="2843641642" sldId="330"/>
+            <ac:spMk id="2" creationId="{00000000-0000-0000-0000-000000000000}"/>
+          </ac:spMkLst>
+        </pc:spChg>
       </pc:sldChg>
       <pc:sldChg chg="modSp add mod">
-        <pc:chgData name="tony august" userId="0e1c2837a28b706a" providerId="LiveId" clId="{AD05CBBD-285A-40D0-ABA1-E4D8FAD69F9B}" dt="2026-09-04T02:29:45.929" v="1749" actId="6549"/>
+        <pc:chgData name="tony august" userId="0e1c2837a28b706a" providerId="LiveId" clId="{AD05CBBD-285A-40D0-ABA1-E4D8FAD69F9B}" dt="2026-09-04T07:11:56.131" v="3217" actId="20577"/>
         <pc:sldMkLst>
           <pc:docMk/>
           <pc:sldMk cId="2488136294" sldId="331"/>
         </pc:sldMkLst>
+        <pc:spChg chg="mod">
+          <ac:chgData name="tony august" userId="0e1c2837a28b706a" providerId="LiveId" clId="{AD05CBBD-285A-40D0-ABA1-E4D8FAD69F9B}" dt="2026-09-04T07:11:56.131" v="3217" actId="20577"/>
+          <ac:spMkLst>
+            <pc:docMk/>
+            <pc:sldMk cId="2488136294" sldId="331"/>
+            <ac:spMk id="2" creationId="{00000000-0000-0000-0000-000000000000}"/>
+          </ac:spMkLst>
+        </pc:spChg>
         <pc:spChg chg="mod">
           <ac:chgData name="tony august" userId="0e1c2837a28b706a" providerId="LiveId" clId="{AD05CBBD-285A-40D0-ABA1-E4D8FAD69F9B}" dt="2026-09-04T02:05:15.865" v="1494" actId="20577"/>
           <ac:spMkLst>
@@ -683,12 +722,20 @@
           </ac:spMkLst>
         </pc:spChg>
       </pc:sldChg>
-      <pc:sldChg chg="modSp add mod">
-        <pc:chgData name="tony august" userId="0e1c2837a28b706a" providerId="LiveId" clId="{AD05CBBD-285A-40D0-ABA1-E4D8FAD69F9B}" dt="2026-09-04T02:54:44.347" v="1758"/>
+      <pc:sldChg chg="addSp modSp add mod">
+        <pc:chgData name="tony august" userId="0e1c2837a28b706a" providerId="LiveId" clId="{AD05CBBD-285A-40D0-ABA1-E4D8FAD69F9B}" dt="2026-09-04T07:12:27.580" v="3224" actId="20577"/>
         <pc:sldMkLst>
           <pc:docMk/>
           <pc:sldMk cId="3136990422" sldId="334"/>
         </pc:sldMkLst>
+        <pc:spChg chg="mod">
+          <ac:chgData name="tony august" userId="0e1c2837a28b706a" providerId="LiveId" clId="{AD05CBBD-285A-40D0-ABA1-E4D8FAD69F9B}" dt="2026-09-04T07:12:27.580" v="3224" actId="20577"/>
+          <ac:spMkLst>
+            <pc:docMk/>
+            <pc:sldMk cId="3136990422" sldId="334"/>
+            <ac:spMk id="2" creationId="{00000000-0000-0000-0000-000000000000}"/>
+          </ac:spMkLst>
+        </pc:spChg>
         <pc:spChg chg="mod">
           <ac:chgData name="tony august" userId="0e1c2837a28b706a" providerId="LiveId" clId="{AD05CBBD-285A-40D0-ABA1-E4D8FAD69F9B}" dt="2026-09-04T02:54:44.342" v="1752"/>
           <ac:spMkLst>
@@ -753,6 +800,14 @@
             <ac:spMk id="206" creationId="{00000000-0000-0000-0000-000000000000}"/>
           </ac:spMkLst>
         </pc:spChg>
+        <pc:picChg chg="add mod">
+          <ac:chgData name="tony august" userId="0e1c2837a28b706a" providerId="LiveId" clId="{AD05CBBD-285A-40D0-ABA1-E4D8FAD69F9B}" dt="2026-09-04T07:02:19.645" v="3051" actId="1076"/>
+          <ac:picMkLst>
+            <pc:docMk/>
+            <pc:sldMk cId="3136990422" sldId="334"/>
+            <ac:picMk id="8" creationId="{43B64F87-3567-2096-7509-BA848F2FB1B1}"/>
+          </ac:picMkLst>
+        </pc:picChg>
       </pc:sldChg>
       <pc:sldChg chg="modSp add del mod">
         <pc:chgData name="tony august" userId="0e1c2837a28b706a" providerId="LiveId" clId="{AD05CBBD-285A-40D0-ABA1-E4D8FAD69F9B}" dt="2026-09-04T06:23:23.149" v="2128"/>
@@ -810,13 +865,45 @@
         </pc:spChg>
       </pc:sldChg>
       <pc:sldChg chg="addSp modSp add mod">
-        <pc:chgData name="tony august" userId="0e1c2837a28b706a" providerId="LiveId" clId="{AD05CBBD-285A-40D0-ABA1-E4D8FAD69F9B}" dt="2026-09-04T06:31:23.714" v="2195" actId="1076"/>
+        <pc:chgData name="tony august" userId="0e1c2837a28b706a" providerId="LiveId" clId="{AD05CBBD-285A-40D0-ABA1-E4D8FAD69F9B}" dt="2026-09-04T14:55:52.363" v="3616" actId="20577"/>
         <pc:sldMkLst>
           <pc:docMk/>
           <pc:sldMk cId="2837592851" sldId="336"/>
         </pc:sldMkLst>
         <pc:spChg chg="mod">
-          <ac:chgData name="tony august" userId="0e1c2837a28b706a" providerId="LiveId" clId="{AD05CBBD-285A-40D0-ABA1-E4D8FAD69F9B}" dt="2026-09-04T06:30:42.294" v="2190" actId="255"/>
+          <ac:chgData name="tony august" userId="0e1c2837a28b706a" providerId="LiveId" clId="{AD05CBBD-285A-40D0-ABA1-E4D8FAD69F9B}" dt="2026-09-04T14:05:50.220" v="3247" actId="1076"/>
+          <ac:spMkLst>
+            <pc:docMk/>
+            <pc:sldMk cId="2837592851" sldId="336"/>
+            <ac:spMk id="2" creationId="{00000000-0000-0000-0000-000000000000}"/>
+          </ac:spMkLst>
+        </pc:spChg>
+        <pc:spChg chg="mod">
+          <ac:chgData name="tony august" userId="0e1c2837a28b706a" providerId="LiveId" clId="{AD05CBBD-285A-40D0-ABA1-E4D8FAD69F9B}" dt="2026-09-04T14:55:52.363" v="3616" actId="20577"/>
+          <ac:spMkLst>
+            <pc:docMk/>
+            <pc:sldMk cId="2837592851" sldId="336"/>
+            <ac:spMk id="3" creationId="{00000000-0000-0000-0000-000000000000}"/>
+          </ac:spMkLst>
+        </pc:spChg>
+        <pc:spChg chg="mod">
+          <ac:chgData name="tony august" userId="0e1c2837a28b706a" providerId="LiveId" clId="{AD05CBBD-285A-40D0-ABA1-E4D8FAD69F9B}" dt="2026-09-04T14:05:50.220" v="3247" actId="1076"/>
+          <ac:spMkLst>
+            <pc:docMk/>
+            <pc:sldMk cId="2837592851" sldId="336"/>
+            <ac:spMk id="4" creationId="{00000000-0000-0000-0000-000000000000}"/>
+          </ac:spMkLst>
+        </pc:spChg>
+        <pc:spChg chg="mod">
+          <ac:chgData name="tony august" userId="0e1c2837a28b706a" providerId="LiveId" clId="{AD05CBBD-285A-40D0-ABA1-E4D8FAD69F9B}" dt="2026-09-04T14:05:50.220" v="3247" actId="1076"/>
+          <ac:spMkLst>
+            <pc:docMk/>
+            <pc:sldMk cId="2837592851" sldId="336"/>
+            <ac:spMk id="5" creationId="{00000000-0000-0000-0000-000000000000}"/>
+          </ac:spMkLst>
+        </pc:spChg>
+        <pc:spChg chg="mod">
+          <ac:chgData name="tony august" userId="0e1c2837a28b706a" providerId="LiveId" clId="{AD05CBBD-285A-40D0-ABA1-E4D8FAD69F9B}" dt="2026-09-04T14:07:30.469" v="3261" actId="403"/>
           <ac:spMkLst>
             <pc:docMk/>
             <pc:sldMk cId="2837592851" sldId="336"/>
@@ -832,7 +919,7 @@
           </ac:spMkLst>
         </pc:spChg>
         <pc:spChg chg="mod">
-          <ac:chgData name="tony august" userId="0e1c2837a28b706a" providerId="LiveId" clId="{AD05CBBD-285A-40D0-ABA1-E4D8FAD69F9B}" dt="2026-09-04T06:29:54" v="2179" actId="1035"/>
+          <ac:chgData name="tony august" userId="0e1c2837a28b706a" providerId="LiveId" clId="{AD05CBBD-285A-40D0-ABA1-E4D8FAD69F9B}" dt="2026-09-04T14:05:30.951" v="3246" actId="404"/>
           <ac:spMkLst>
             <pc:docMk/>
             <pc:sldMk cId="2837592851" sldId="336"/>
@@ -840,7 +927,7 @@
           </ac:spMkLst>
         </pc:spChg>
         <pc:spChg chg="add mod">
-          <ac:chgData name="tony august" userId="0e1c2837a28b706a" providerId="LiveId" clId="{AD05CBBD-285A-40D0-ABA1-E4D8FAD69F9B}" dt="2026-09-04T06:25:41.709" v="2144" actId="207"/>
+          <ac:chgData name="tony august" userId="0e1c2837a28b706a" providerId="LiveId" clId="{AD05CBBD-285A-40D0-ABA1-E4D8FAD69F9B}" dt="2026-09-04T14:05:50.220" v="3247" actId="1076"/>
           <ac:spMkLst>
             <pc:docMk/>
             <pc:sldMk cId="2837592851" sldId="336"/>
@@ -848,7 +935,7 @@
           </ac:spMkLst>
         </pc:spChg>
         <pc:spChg chg="add mod">
-          <ac:chgData name="tony august" userId="0e1c2837a28b706a" providerId="LiveId" clId="{AD05CBBD-285A-40D0-ABA1-E4D8FAD69F9B}" dt="2026-09-04T06:31:23.714" v="2195" actId="1076"/>
+          <ac:chgData name="tony august" userId="0e1c2837a28b706a" providerId="LiveId" clId="{AD05CBBD-285A-40D0-ABA1-E4D8FAD69F9B}" dt="2026-09-04T14:55:33.158" v="3615" actId="1076"/>
           <ac:spMkLst>
             <pc:docMk/>
             <pc:sldMk cId="2837592851" sldId="336"/>
@@ -856,7 +943,7 @@
           </ac:spMkLst>
         </pc:spChg>
         <pc:spChg chg="mod">
-          <ac:chgData name="tony august" userId="0e1c2837a28b706a" providerId="LiveId" clId="{AD05CBBD-285A-40D0-ABA1-E4D8FAD69F9B}" dt="2026-09-04T06:30:02.416" v="2180" actId="1076"/>
+          <ac:chgData name="tony august" userId="0e1c2837a28b706a" providerId="LiveId" clId="{AD05CBBD-285A-40D0-ABA1-E4D8FAD69F9B}" dt="2026-09-04T14:08:04.521" v="3265" actId="1076"/>
           <ac:spMkLst>
             <pc:docMk/>
             <pc:sldMk cId="2837592851" sldId="336"/>
@@ -864,7 +951,7 @@
           </ac:spMkLst>
         </pc:spChg>
         <pc:spChg chg="mod">
-          <ac:chgData name="tony august" userId="0e1c2837a28b706a" providerId="LiveId" clId="{AD05CBBD-285A-40D0-ABA1-E4D8FAD69F9B}" dt="2026-09-04T06:30:02.416" v="2180" actId="1076"/>
+          <ac:chgData name="tony august" userId="0e1c2837a28b706a" providerId="LiveId" clId="{AD05CBBD-285A-40D0-ABA1-E4D8FAD69F9B}" dt="2026-09-04T14:08:04.521" v="3265" actId="1076"/>
           <ac:spMkLst>
             <pc:docMk/>
             <pc:sldMk cId="2837592851" sldId="336"/>
@@ -872,7 +959,7 @@
           </ac:spMkLst>
         </pc:spChg>
         <pc:spChg chg="mod">
-          <ac:chgData name="tony august" userId="0e1c2837a28b706a" providerId="LiveId" clId="{AD05CBBD-285A-40D0-ABA1-E4D8FAD69F9B}" dt="2026-09-04T06:30:02.416" v="2180" actId="1076"/>
+          <ac:chgData name="tony august" userId="0e1c2837a28b706a" providerId="LiveId" clId="{AD05CBBD-285A-40D0-ABA1-E4D8FAD69F9B}" dt="2026-09-04T14:08:04.521" v="3265" actId="1076"/>
           <ac:spMkLst>
             <pc:docMk/>
             <pc:sldMk cId="2837592851" sldId="336"/>
@@ -880,13 +967,36 @@
           </ac:spMkLst>
         </pc:spChg>
         <pc:spChg chg="mod">
-          <ac:chgData name="tony august" userId="0e1c2837a28b706a" providerId="LiveId" clId="{AD05CBBD-285A-40D0-ABA1-E4D8FAD69F9B}" dt="2026-09-04T06:30:02.416" v="2180" actId="1076"/>
+          <ac:chgData name="tony august" userId="0e1c2837a28b706a" providerId="LiveId" clId="{AD05CBBD-285A-40D0-ABA1-E4D8FAD69F9B}" dt="2026-09-04T14:08:04.521" v="3265" actId="1076"/>
           <ac:spMkLst>
             <pc:docMk/>
             <pc:sldMk cId="2837592851" sldId="336"/>
             <ac:spMk id="203" creationId="{00000000-0000-0000-0000-000000000000}"/>
           </ac:spMkLst>
         </pc:spChg>
+        <pc:picChg chg="add mod modCrop">
+          <ac:chgData name="tony august" userId="0e1c2837a28b706a" providerId="LiveId" clId="{AD05CBBD-285A-40D0-ABA1-E4D8FAD69F9B}" dt="2026-09-04T07:00:56.792" v="3047"/>
+          <ac:picMkLst>
+            <pc:docMk/>
+            <pc:sldMk cId="2837592851" sldId="336"/>
+            <ac:picMk id="7" creationId="{3A49C4D0-2E17-0A15-575C-60424F98F838}"/>
+          </ac:picMkLst>
+        </pc:picChg>
+        <pc:picChg chg="add mod">
+          <ac:chgData name="tony august" userId="0e1c2837a28b706a" providerId="LiveId" clId="{AD05CBBD-285A-40D0-ABA1-E4D8FAD69F9B}" dt="2026-09-04T14:07:40.725" v="3264" actId="1076"/>
+          <ac:picMkLst>
+            <pc:docMk/>
+            <pc:sldMk cId="2837592851" sldId="336"/>
+            <ac:picMk id="12" creationId="{D5CFD1AB-9383-81EF-16DE-0D5B631B914D}"/>
+          </ac:picMkLst>
+        </pc:picChg>
+      </pc:sldChg>
+      <pc:sldChg chg="new del">
+        <pc:chgData name="tony august" userId="0e1c2837a28b706a" providerId="LiveId" clId="{AD05CBBD-285A-40D0-ABA1-E4D8FAD69F9B}" dt="2026-09-04T07:03:39.134" v="3053" actId="680"/>
+        <pc:sldMkLst>
+          <pc:docMk/>
+          <pc:sldMk cId="1832732562" sldId="337"/>
+        </pc:sldMkLst>
       </pc:sldChg>
     </pc:docChg>
   </pc:docChgLst>
@@ -6035,7 +6145,7 @@
         <p:spPr>
           <a:xfrm>
             <a:off x="822960" y="685800"/>
-            <a:ext cx="10515600" cy="292608"/>
+            <a:ext cx="10515600" cy="276999"/>
           </a:xfrm>
           <a:prstGeom prst="rect">
             <a:avLst/>
@@ -6057,14 +6167,20 @@
               </a:spcAft>
             </a:pPr>
             <a:r>
-              <a:rPr sz="1200" b="1" i="0">
+              <a:rPr lang="en-US" sz="1200" b="1" i="0" dirty="0">
                 <a:solidFill>
                   <a:srgbClr val="00785A"/>
                 </a:solidFill>
                 <a:latin typeface="Segoe UI"/>
               </a:rPr>
-              <a:t>ARCHITECTURE WITH SOLACE</a:t>
-            </a:r>
+              <a:t>ENTERPRISE QOS’s</a:t>
+            </a:r>
+            <a:endParaRPr sz="1200" b="1" i="0" dirty="0">
+              <a:solidFill>
+                <a:srgbClr val="00785A"/>
+              </a:solidFill>
+              <a:latin typeface="Segoe UI"/>
+            </a:endParaRPr>
           </a:p>
         </p:txBody>
       </p:sp>
@@ -10794,7 +10910,7 @@
         </p:nvSpPr>
         <p:spPr>
           <a:xfrm>
-            <a:off x="822960" y="685800"/>
+            <a:off x="822960" y="650810"/>
             <a:ext cx="10515600" cy="292608"/>
           </a:xfrm>
           <a:prstGeom prst="rect">
@@ -10817,7 +10933,7 @@
               </a:spcAft>
             </a:pPr>
             <a:r>
-              <a:rPr sz="1200" b="1" i="0">
+              <a:rPr sz="1200" b="1" i="0" dirty="0">
                 <a:solidFill>
                   <a:srgbClr val="00785A"/>
                 </a:solidFill>
@@ -10836,8 +10952,8 @@
         </p:nvSpPr>
         <p:spPr>
           <a:xfrm>
-            <a:off x="822960" y="996696"/>
-            <a:ext cx="10515600" cy="658368"/>
+            <a:off x="822960" y="961706"/>
+            <a:ext cx="10515600" cy="584775"/>
           </a:xfrm>
           <a:prstGeom prst="rect">
             <a:avLst/>
@@ -10859,13 +10975,31 @@
               </a:spcAft>
             </a:pPr>
             <a:r>
-              <a:rPr sz="3200" b="1" i="0">
+              <a:rPr sz="3200" b="1" i="0" dirty="0">
                 <a:solidFill>
                   <a:srgbClr val="093B5F"/>
                 </a:solidFill>
                 <a:latin typeface="Segoe UI"/>
               </a:rPr>
-              <a:t>Why the broker, and not point-to-point</a:t>
+              <a:t>Why </a:t>
+            </a:r>
+            <a:r>
+              <a:rPr lang="en-US" sz="3200" b="1" i="0" dirty="0">
+                <a:solidFill>
+                  <a:srgbClr val="093B5F"/>
+                </a:solidFill>
+                <a:latin typeface="Segoe UI"/>
+              </a:rPr>
+              <a:t>a</a:t>
+            </a:r>
+            <a:r>
+              <a:rPr sz="3200" b="1" i="0" dirty="0">
+                <a:solidFill>
+                  <a:srgbClr val="093B5F"/>
+                </a:solidFill>
+                <a:latin typeface="Segoe UI"/>
+              </a:rPr>
+              <a:t> broker, and not point-to-point</a:t>
             </a:r>
           </a:p>
         </p:txBody>
@@ -10878,7 +11012,7 @@
         </p:nvSpPr>
         <p:spPr>
           <a:xfrm>
-            <a:off x="822960" y="1709928"/>
+            <a:off x="822960" y="1674938"/>
             <a:ext cx="10515600" cy="9525"/>
           </a:xfrm>
           <a:prstGeom prst="rect">
@@ -10923,7 +11057,7 @@
         </p:nvSpPr>
         <p:spPr>
           <a:xfrm>
-            <a:off x="822960" y="1856232"/>
+            <a:off x="822960" y="1821242"/>
             <a:ext cx="566928" cy="274320"/>
           </a:xfrm>
           <a:prstGeom prst="roundRect">
@@ -10978,7 +11112,7 @@
         </p:nvSpPr>
         <p:spPr>
           <a:xfrm>
-            <a:off x="1830040" y="2269295"/>
+            <a:off x="710580" y="2424698"/>
             <a:ext cx="7603893" cy="1918474"/>
           </a:xfrm>
           <a:prstGeom prst="rect">
@@ -11192,8 +11326,8 @@
         </p:nvSpPr>
         <p:spPr>
           <a:xfrm>
-            <a:off x="939800" y="6150341"/>
-            <a:ext cx="10241280" cy="523220"/>
+            <a:off x="939800" y="6273451"/>
+            <a:ext cx="10241280" cy="276999"/>
           </a:xfrm>
           <a:prstGeom prst="rect">
             <a:avLst/>
@@ -11215,7 +11349,7 @@
               </a:spcAft>
             </a:pPr>
             <a:r>
-              <a:rPr sz="1400" b="1" i="0" dirty="0">
+              <a:rPr sz="1200" b="1" i="0" dirty="0">
                 <a:solidFill>
                   <a:srgbClr val="093B5F"/>
                 </a:solidFill>
@@ -11234,8 +11368,8 @@
         </p:nvSpPr>
         <p:spPr>
           <a:xfrm>
-            <a:off x="812800" y="4495005"/>
-            <a:ext cx="5156200" cy="1287086"/>
+            <a:off x="812800" y="4718304"/>
+            <a:ext cx="5156200" cy="1120104"/>
           </a:xfrm>
           <a:prstGeom prst="roundRect">
             <a:avLst>
@@ -11267,7 +11401,7 @@
           <a:bodyPr/>
           <a:lstStyle/>
           <a:p>
-            <a:endParaRPr>
+            <a:endParaRPr sz="1600">
               <a:solidFill>
                 <a:schemeClr val="bg1">
                   <a:lumMod val="50000"/>
@@ -11285,8 +11419,8 @@
         </p:nvSpPr>
         <p:spPr>
           <a:xfrm>
-            <a:off x="1066800" y="4647404"/>
-            <a:ext cx="4648200" cy="1060344"/>
+            <a:off x="1066800" y="4870703"/>
+            <a:ext cx="4648200" cy="922779"/>
           </a:xfrm>
           <a:prstGeom prst="rect">
             <a:avLst/>
@@ -11305,7 +11439,7 @@
               </a:spcAft>
             </a:pPr>
             <a:r>
-              <a:rPr lang="en-US" sz="1600" b="1" i="0" dirty="0">
+              <a:rPr lang="en-US" sz="1400" b="1" i="0" dirty="0">
                 <a:solidFill>
                   <a:schemeClr val="bg1">
                     <a:lumMod val="50000"/>
@@ -11323,7 +11457,7 @@
               </a:spcAft>
             </a:pPr>
             <a:r>
-              <a:rPr lang="en-US" sz="1200" b="0" i="0" dirty="0">
+              <a:rPr lang="en-US" sz="1100" b="0" i="0" dirty="0">
                 <a:solidFill>
                   <a:schemeClr val="bg1">
                     <a:lumMod val="50000"/>
@@ -11344,8 +11478,8 @@
         </p:nvSpPr>
         <p:spPr>
           <a:xfrm>
-            <a:off x="6172200" y="4495005"/>
-            <a:ext cx="5156200" cy="1287086"/>
+            <a:off x="6172200" y="4718304"/>
+            <a:ext cx="5156200" cy="1120104"/>
           </a:xfrm>
           <a:prstGeom prst="roundRect">
             <a:avLst>
@@ -11377,7 +11511,7 @@
           <a:bodyPr/>
           <a:lstStyle/>
           <a:p>
-            <a:endParaRPr>
+            <a:endParaRPr sz="1600">
               <a:solidFill>
                 <a:schemeClr val="bg1">
                   <a:lumMod val="50000"/>
@@ -11395,8 +11529,8 @@
         </p:nvSpPr>
         <p:spPr>
           <a:xfrm>
-            <a:off x="6426200" y="4647404"/>
-            <a:ext cx="4648200" cy="1060344"/>
+            <a:off x="6426200" y="4870703"/>
+            <a:ext cx="4648200" cy="922779"/>
           </a:xfrm>
           <a:prstGeom prst="rect">
             <a:avLst/>
@@ -11415,7 +11549,7 @@
               </a:spcAft>
             </a:pPr>
             <a:r>
-              <a:rPr lang="en-US" sz="1600" b="1" i="0" dirty="0">
+              <a:rPr lang="en-US" sz="1400" b="1" i="0" dirty="0">
                 <a:solidFill>
                   <a:schemeClr val="bg1">
                     <a:lumMod val="50000"/>
@@ -11433,7 +11567,7 @@
               </a:spcAft>
             </a:pPr>
             <a:r>
-              <a:rPr lang="en-US" sz="1200" b="0" i="0" dirty="0">
+              <a:rPr lang="en-US" sz="1100" b="0" i="0" dirty="0">
                 <a:solidFill>
                   <a:schemeClr val="bg1">
                     <a:lumMod val="50000"/>
@@ -11460,7 +11594,7 @@
         </p:nvSpPr>
         <p:spPr>
           <a:xfrm>
-            <a:off x="1464527" y="1806169"/>
+            <a:off x="1464527" y="1771179"/>
             <a:ext cx="6096000" cy="353943"/>
           </a:xfrm>
           <a:prstGeom prst="rect">
@@ -11509,7 +11643,7 @@
         </p:nvSpPr>
         <p:spPr>
           <a:xfrm>
-            <a:off x="4512527" y="2777577"/>
+            <a:off x="3287756" y="2873697"/>
             <a:ext cx="639336" cy="830997"/>
           </a:xfrm>
           <a:prstGeom prst="rect">
@@ -11530,6 +11664,91 @@
           </a:p>
         </p:txBody>
       </p:sp>
+      <p:pic>
+        <p:nvPicPr>
+          <p:cNvPr id="7" name="Picture 6" descr="A2A Extensions: Empowering Custom Agent Functionality - Google Developers  Blog">
+            <a:extLst>
+              <a:ext uri="{FF2B5EF4-FFF2-40B4-BE49-F238E27FC236}">
+                <a16:creationId xmlns:a16="http://schemas.microsoft.com/office/drawing/2014/main" id="{3A49C4D0-2E17-0A15-575C-60424F98F838}"/>
+              </a:ext>
+            </a:extLst>
+          </p:cNvPr>
+          <p:cNvPicPr>
+            <a:picLocks noChangeAspect="1"/>
+          </p:cNvPicPr>
+          <p:nvPr/>
+        </p:nvPicPr>
+        <p:blipFill>
+          <a:blip r:embed="rId2">
+            <a:clrChange>
+              <a:clrFrom>
+                <a:srgbClr val="FFFFFF"/>
+              </a:clrFrom>
+              <a:clrTo>
+                <a:srgbClr val="FFFFFF">
+                  <a:alpha val="0"/>
+                </a:srgbClr>
+              </a:clrTo>
+            </a:clrChange>
+            <a:duotone>
+              <a:schemeClr val="bg2">
+                <a:shade val="45000"/>
+                <a:satMod val="135000"/>
+              </a:schemeClr>
+              <a:prstClr val="white"/>
+            </a:duotone>
+          </a:blip>
+          <a:srcRect l="36606" r="35766"/>
+          <a:stretch>
+            <a:fillRect/>
+          </a:stretch>
+        </p:blipFill>
+        <p:spPr>
+          <a:xfrm>
+            <a:off x="10872776" y="250244"/>
+            <a:ext cx="931567" cy="1004254"/>
+          </a:xfrm>
+          <a:prstGeom prst="rect">
+            <a:avLst/>
+          </a:prstGeom>
+        </p:spPr>
+      </p:pic>
+      <p:pic>
+        <p:nvPicPr>
+          <p:cNvPr id="12" name="Graphic 11" descr="Components and Capabilities - Agent Mesh">
+            <a:extLst>
+              <a:ext uri="{FF2B5EF4-FFF2-40B4-BE49-F238E27FC236}">
+                <a16:creationId xmlns:a16="http://schemas.microsoft.com/office/drawing/2014/main" id="{D5CFD1AB-9383-81EF-16DE-0D5B631B914D}"/>
+              </a:ext>
+            </a:extLst>
+          </p:cNvPr>
+          <p:cNvPicPr>
+            <a:picLocks noChangeAspect="1"/>
+          </p:cNvPicPr>
+          <p:nvPr/>
+        </p:nvPicPr>
+        <p:blipFill>
+          <a:blip>
+            <a:extLst>
+              <a:ext uri="{96DAC541-7B7A-43D3-8B79-37D633B846F1}">
+                <asvg:svgBlip xmlns:asvg="http://schemas.microsoft.com/office/drawing/2016/SVG/main" r:embed="rId3"/>
+              </a:ext>
+            </a:extLst>
+          </a:blip>
+          <a:stretch>
+            <a:fillRect/>
+          </a:stretch>
+        </p:blipFill>
+        <p:spPr>
+          <a:xfrm>
+            <a:off x="7560527" y="1896693"/>
+            <a:ext cx="4302721" cy="2387138"/>
+          </a:xfrm>
+          <a:prstGeom prst="rect">
+            <a:avLst/>
+          </a:prstGeom>
+        </p:spPr>
+      </p:pic>
     </p:spTree>
     <p:extLst>
       <p:ext uri="{BB962C8B-B14F-4D97-AF65-F5344CB8AC3E}">
@@ -15043,7 +15262,7 @@
                 </a:solidFill>
                 <a:latin typeface="Segoe UI"/>
               </a:rPr>
-              <a:t>Each fix removes one piece. The 24–36 hour delay and the 46 hours a day survive all three.</a:t>
+              <a:t>Scalability Failure:  Majority of 24–36 hour delay and the 46 hours a day survives for Majority of Exceptions</a:t>
             </a:r>
           </a:p>
         </p:txBody>
@@ -15070,7 +15289,7 @@
         </p:blipFill>
         <p:spPr>
           <a:xfrm>
-            <a:off x="7874000" y="2946400"/>
+            <a:off x="7874000" y="2799820"/>
             <a:ext cx="3735728" cy="2291246"/>
           </a:xfrm>
           <a:prstGeom prst="rect">
@@ -15323,7 +15542,25 @@
                 </a:solidFill>
                 <a:latin typeface="Segoe UI"/>
               </a:rPr>
-              <a:t>This is what you already did. The cost of the eleventh consumer is what stopped you</a:t>
+              <a:t>Tried this already. The cost of the </a:t>
+            </a:r>
+            <a:r>
+              <a:rPr lang="en-US" sz="1400" b="0" i="1" dirty="0">
+                <a:solidFill>
+                  <a:srgbClr val="4C5F70"/>
+                </a:solidFill>
+                <a:latin typeface="Segoe UI"/>
+              </a:rPr>
+              <a:t>n</a:t>
+            </a:r>
+            <a:r>
+              <a:rPr lang="en-US" sz="1400" b="0" i="0" dirty="0">
+                <a:solidFill>
+                  <a:srgbClr val="4C5F70"/>
+                </a:solidFill>
+                <a:latin typeface="Segoe UI"/>
+              </a:rPr>
+              <a:t>th consumer is what stopped you</a:t>
             </a:r>
           </a:p>
         </p:txBody>
@@ -15448,16 +15685,7 @@
                 </a:solidFill>
                 <a:latin typeface="Segoe UI"/>
               </a:rPr>
-              <a:t>Brittle hard-configured routes challenging to maintain at scale.  Lacks true </a:t>
-            </a:r>
-            <a:r>
-              <a:rPr lang="en-US" sz="1400">
-                <a:solidFill>
-                  <a:srgbClr val="4C5F70"/>
-                </a:solidFill>
-                <a:latin typeface="Segoe UI"/>
-              </a:rPr>
-              <a:t>broadcast support.</a:t>
+              <a:t>DIY route configuration routing challenging to maintain at scale.  Lacks true broadcast support.</a:t>
             </a:r>
             <a:endParaRPr lang="en-US" sz="1400" b="0" i="0" dirty="0">
               <a:solidFill>
@@ -16458,7 +16686,7 @@
         <p:spPr>
           <a:xfrm>
             <a:off x="822960" y="685800"/>
-            <a:ext cx="10515600" cy="292608"/>
+            <a:ext cx="10515600" cy="276999"/>
           </a:xfrm>
           <a:prstGeom prst="rect">
             <a:avLst/>
@@ -16480,14 +16708,20 @@
               </a:spcAft>
             </a:pPr>
             <a:r>
-              <a:rPr sz="1200" b="1" i="0" dirty="0">
+              <a:rPr lang="en-US" sz="1200" b="1" i="0" dirty="0">
                 <a:solidFill>
                   <a:srgbClr val="00785A"/>
                 </a:solidFill>
                 <a:latin typeface="Segoe UI"/>
               </a:rPr>
-              <a:t>ARCHITECTURE WITH SOLACE</a:t>
-            </a:r>
+              <a:t>ORDER EXCEPTIONS</a:t>
+            </a:r>
+            <a:endParaRPr sz="1200" b="1" i="0" dirty="0">
+              <a:solidFill>
+                <a:srgbClr val="00785A"/>
+              </a:solidFill>
+              <a:latin typeface="Segoe UI"/>
+            </a:endParaRPr>
           </a:p>
         </p:txBody>
       </p:sp>
@@ -17112,7 +17346,7 @@
         <p:spPr>
           <a:xfrm>
             <a:off x="822960" y="685800"/>
-            <a:ext cx="10515600" cy="292608"/>
+            <a:ext cx="10515600" cy="276999"/>
           </a:xfrm>
           <a:prstGeom prst="rect">
             <a:avLst/>
@@ -17134,14 +17368,20 @@
               </a:spcAft>
             </a:pPr>
             <a:r>
-              <a:rPr sz="1200" b="1" i="0">
+              <a:rPr lang="en-US" sz="1200" b="1" i="0" dirty="0">
                 <a:solidFill>
                   <a:srgbClr val="00785A"/>
                 </a:solidFill>
                 <a:latin typeface="Segoe UI"/>
               </a:rPr>
-              <a:t>ARCHITECTURE WITH SOLACE</a:t>
-            </a:r>
+              <a:t>ROUTING PLAN</a:t>
+            </a:r>
+            <a:endParaRPr sz="1200" b="1" i="0" dirty="0">
+              <a:solidFill>
+                <a:srgbClr val="00785A"/>
+              </a:solidFill>
+              <a:latin typeface="Segoe UI"/>
+            </a:endParaRPr>
           </a:p>
         </p:txBody>
       </p:sp>
@@ -17876,6 +18116,36 @@
           </a:p>
         </p:txBody>
       </p:sp>
+      <p:pic>
+        <p:nvPicPr>
+          <p:cNvPr id="8" name="Picture 7" descr="Finding The Right Architecture Drawing Tools - archisoup">
+            <a:extLst>
+              <a:ext uri="{FF2B5EF4-FFF2-40B4-BE49-F238E27FC236}">
+                <a16:creationId xmlns:a16="http://schemas.microsoft.com/office/drawing/2014/main" id="{43B64F87-3567-2096-7509-BA848F2FB1B1}"/>
+              </a:ext>
+            </a:extLst>
+          </p:cNvPr>
+          <p:cNvPicPr>
+            <a:picLocks noChangeAspect="1"/>
+          </p:cNvPicPr>
+          <p:nvPr/>
+        </p:nvPicPr>
+        <p:blipFill>
+          <a:blip r:embed="rId3"/>
+          <a:stretch>
+            <a:fillRect/>
+          </a:stretch>
+        </p:blipFill>
+        <p:spPr>
+          <a:xfrm>
+            <a:off x="8614537" y="310443"/>
+            <a:ext cx="2317552" cy="1545789"/>
+          </a:xfrm>
+          <a:prstGeom prst="rect">
+            <a:avLst/>
+          </a:prstGeom>
+        </p:spPr>
+      </p:pic>
     </p:spTree>
     <p:extLst>
       <p:ext uri="{BB962C8B-B14F-4D97-AF65-F5344CB8AC3E}">
@@ -17915,7 +18185,7 @@
         <p:spPr>
           <a:xfrm>
             <a:off x="822960" y="685800"/>
-            <a:ext cx="10515600" cy="292608"/>
+            <a:ext cx="10515600" cy="276999"/>
           </a:xfrm>
           <a:prstGeom prst="rect">
             <a:avLst/>
@@ -17937,14 +18207,20 @@
               </a:spcAft>
             </a:pPr>
             <a:r>
-              <a:rPr sz="1200" b="1" i="0">
+              <a:rPr lang="en-US" sz="1200" b="1" dirty="0">
                 <a:solidFill>
                   <a:srgbClr val="00785A"/>
                 </a:solidFill>
                 <a:latin typeface="Segoe UI"/>
               </a:rPr>
-              <a:t>ARCHITECTURE WITH SOLACE</a:t>
-            </a:r>
+              <a:t>DELIVERY GUARANTEES</a:t>
+            </a:r>
+            <a:endParaRPr sz="1200" b="1" i="0" dirty="0">
+              <a:solidFill>
+                <a:srgbClr val="00785A"/>
+              </a:solidFill>
+              <a:latin typeface="Segoe UI"/>
+            </a:endParaRPr>
           </a:p>
         </p:txBody>
       </p:sp>
